--- a/logo/logo.pptx
+++ b/logo/logo.pptx
@@ -2964,1000 +2964,2751 @@
           <a:chExt cx="0" cy="0"/>
         </a:xfrm>
       </p:grpSpPr>
-      <p:sp>
-        <p:nvSpPr>
-          <p:cNvPr id="11" name="Freeform 10"/>
-          <p:cNvSpPr/>
-          <p:nvPr/>
-        </p:nvSpPr>
-        <p:spPr>
-          <a:xfrm>
-            <a:off x="6997700" y="2503487"/>
-            <a:ext cx="736600" cy="1725613"/>
-          </a:xfrm>
-          <a:custGeom>
-            <a:avLst/>
-            <a:gdLst>
-              <a:gd name="connsiteX0" fmla="*/ 660400 w 1320800"/>
-              <a:gd name="connsiteY0" fmla="*/ 0 h 3175000"/>
-              <a:gd name="connsiteX1" fmla="*/ 1320800 w 1320800"/>
-              <a:gd name="connsiteY1" fmla="*/ 660400 h 3175000"/>
-              <a:gd name="connsiteX2" fmla="*/ 1314060 w 1320800"/>
-              <a:gd name="connsiteY2" fmla="*/ 727266 h 3175000"/>
-              <a:gd name="connsiteX3" fmla="*/ 1316328 w 1320800"/>
-              <a:gd name="connsiteY3" fmla="*/ 734573 h 3175000"/>
-              <a:gd name="connsiteX4" fmla="*/ 1320800 w 1320800"/>
-              <a:gd name="connsiteY4" fmla="*/ 778938 h 3175000"/>
-              <a:gd name="connsiteX5" fmla="*/ 1320800 w 1320800"/>
-              <a:gd name="connsiteY5" fmla="*/ 2954862 h 3175000"/>
-              <a:gd name="connsiteX6" fmla="*/ 1100662 w 1320800"/>
-              <a:gd name="connsiteY6" fmla="*/ 3175000 h 3175000"/>
-              <a:gd name="connsiteX7" fmla="*/ 220138 w 1320800"/>
-              <a:gd name="connsiteY7" fmla="*/ 3175000 h 3175000"/>
-              <a:gd name="connsiteX8" fmla="*/ 0 w 1320800"/>
-              <a:gd name="connsiteY8" fmla="*/ 2954862 h 3175000"/>
-              <a:gd name="connsiteX9" fmla="*/ 0 w 1320800"/>
-              <a:gd name="connsiteY9" fmla="*/ 778938 h 3175000"/>
-              <a:gd name="connsiteX10" fmla="*/ 4473 w 1320800"/>
-              <a:gd name="connsiteY10" fmla="*/ 734573 h 3175000"/>
-              <a:gd name="connsiteX11" fmla="*/ 6741 w 1320800"/>
-              <a:gd name="connsiteY11" fmla="*/ 727266 h 3175000"/>
-              <a:gd name="connsiteX12" fmla="*/ 0 w 1320800"/>
-              <a:gd name="connsiteY12" fmla="*/ 660400 h 3175000"/>
-              <a:gd name="connsiteX13" fmla="*/ 660400 w 1320800"/>
-              <a:gd name="connsiteY13" fmla="*/ 0 h 3175000"/>
-            </a:gdLst>
-            <a:ahLst/>
-            <a:cxnLst>
-              <a:cxn ang="0">
-                <a:pos x="connsiteX0" y="connsiteY0"/>
-              </a:cxn>
-              <a:cxn ang="0">
-                <a:pos x="connsiteX1" y="connsiteY1"/>
-              </a:cxn>
-              <a:cxn ang="0">
-                <a:pos x="connsiteX2" y="connsiteY2"/>
-              </a:cxn>
-              <a:cxn ang="0">
-                <a:pos x="connsiteX3" y="connsiteY3"/>
-              </a:cxn>
-              <a:cxn ang="0">
-                <a:pos x="connsiteX4" y="connsiteY4"/>
-              </a:cxn>
-              <a:cxn ang="0">
-                <a:pos x="connsiteX5" y="connsiteY5"/>
-              </a:cxn>
-              <a:cxn ang="0">
-                <a:pos x="connsiteX6" y="connsiteY6"/>
-              </a:cxn>
-              <a:cxn ang="0">
-                <a:pos x="connsiteX7" y="connsiteY7"/>
-              </a:cxn>
-              <a:cxn ang="0">
-                <a:pos x="connsiteX8" y="connsiteY8"/>
-              </a:cxn>
-              <a:cxn ang="0">
-                <a:pos x="connsiteX9" y="connsiteY9"/>
-              </a:cxn>
-              <a:cxn ang="0">
-                <a:pos x="connsiteX10" y="connsiteY10"/>
-              </a:cxn>
-              <a:cxn ang="0">
-                <a:pos x="connsiteX11" y="connsiteY11"/>
-              </a:cxn>
-              <a:cxn ang="0">
-                <a:pos x="connsiteX12" y="connsiteY12"/>
-              </a:cxn>
-              <a:cxn ang="0">
-                <a:pos x="connsiteX13" y="connsiteY13"/>
-              </a:cxn>
-            </a:cxnLst>
-            <a:rect l="l" t="t" r="r" b="b"/>
-            <a:pathLst>
-              <a:path w="1320800" h="3175000">
-                <a:moveTo>
-                  <a:pt x="660400" y="0"/>
-                </a:moveTo>
-                <a:cubicBezTo>
-                  <a:pt x="1025129" y="0"/>
-                  <a:pt x="1320800" y="295671"/>
-                  <a:pt x="1320800" y="660400"/>
-                </a:cubicBezTo>
-                <a:lnTo>
-                  <a:pt x="1314060" y="727266"/>
-                </a:lnTo>
-                <a:lnTo>
-                  <a:pt x="1316328" y="734573"/>
-                </a:lnTo>
-                <a:cubicBezTo>
-                  <a:pt x="1319260" y="748903"/>
-                  <a:pt x="1320800" y="763741"/>
-                  <a:pt x="1320800" y="778938"/>
-                </a:cubicBezTo>
-                <a:lnTo>
-                  <a:pt x="1320800" y="2954862"/>
-                </a:lnTo>
-                <a:cubicBezTo>
-                  <a:pt x="1320800" y="3076441"/>
-                  <a:pt x="1222241" y="3175000"/>
-                  <a:pt x="1100662" y="3175000"/>
-                </a:cubicBezTo>
-                <a:lnTo>
-                  <a:pt x="220138" y="3175000"/>
-                </a:lnTo>
-                <a:cubicBezTo>
-                  <a:pt x="98559" y="3175000"/>
-                  <a:pt x="0" y="3076441"/>
-                  <a:pt x="0" y="2954862"/>
-                </a:cubicBezTo>
-                <a:lnTo>
-                  <a:pt x="0" y="778938"/>
-                </a:lnTo>
-                <a:cubicBezTo>
-                  <a:pt x="0" y="763741"/>
-                  <a:pt x="1540" y="748903"/>
-                  <a:pt x="4473" y="734573"/>
-                </a:cubicBezTo>
-                <a:lnTo>
-                  <a:pt x="6741" y="727266"/>
-                </a:lnTo>
-                <a:lnTo>
-                  <a:pt x="0" y="660400"/>
-                </a:lnTo>
-                <a:cubicBezTo>
-                  <a:pt x="0" y="295671"/>
-                  <a:pt x="295671" y="0"/>
-                  <a:pt x="660400" y="0"/>
-                </a:cubicBezTo>
-                <a:close/>
-              </a:path>
-            </a:pathLst>
-          </a:custGeom>
-          <a:ln>
-            <a:noFill/>
-          </a:ln>
-          <a:effectLst>
-            <a:outerShdw blurRad="190500" dist="228600" dir="2700000" algn="ctr">
-              <a:srgbClr val="000000">
-                <a:alpha val="30000"/>
-              </a:srgbClr>
-            </a:outerShdw>
-          </a:effectLst>
-          <a:scene3d>
-            <a:camera prst="orthographicFront">
-              <a:rot lat="0" lon="0" rev="0"/>
-            </a:camera>
-            <a:lightRig rig="glow" dir="t">
-              <a:rot lat="0" lon="0" rev="4800000"/>
-            </a:lightRig>
-          </a:scene3d>
-          <a:sp3d prstMaterial="matte">
-            <a:bevelT w="127000" h="63500"/>
-          </a:sp3d>
-        </p:spPr>
-        <p:style>
-          <a:lnRef idx="2">
-            <a:schemeClr val="accent1">
-              <a:shade val="50000"/>
-            </a:schemeClr>
-          </a:lnRef>
-          <a:fillRef idx="1">
-            <a:schemeClr val="accent1"/>
-          </a:fillRef>
-          <a:effectRef idx="0">
-            <a:schemeClr val="accent1"/>
-          </a:effectRef>
-          <a:fontRef idx="minor">
-            <a:schemeClr val="lt1"/>
-          </a:fontRef>
-        </p:style>
-        <p:txBody>
-          <a:bodyPr rtlCol="0" anchor="ctr"/>
-          <a:lstStyle/>
-          <a:p>
-            <a:pPr algn="ctr"/>
-            <a:endParaRPr lang="en-IN"/>
-          </a:p>
-        </p:txBody>
-      </p:sp>
-      <p:sp>
-        <p:nvSpPr>
-          <p:cNvPr id="10" name="Freeform 9"/>
-          <p:cNvSpPr/>
-          <p:nvPr/>
-        </p:nvSpPr>
-        <p:spPr>
-          <a:xfrm>
-            <a:off x="6223000" y="2208212"/>
-            <a:ext cx="1016000" cy="2233613"/>
-          </a:xfrm>
-          <a:custGeom>
-            <a:avLst/>
-            <a:gdLst>
-              <a:gd name="connsiteX0" fmla="*/ 660400 w 1320800"/>
-              <a:gd name="connsiteY0" fmla="*/ 0 h 3175000"/>
-              <a:gd name="connsiteX1" fmla="*/ 1320800 w 1320800"/>
-              <a:gd name="connsiteY1" fmla="*/ 660400 h 3175000"/>
-              <a:gd name="connsiteX2" fmla="*/ 1314060 w 1320800"/>
-              <a:gd name="connsiteY2" fmla="*/ 727266 h 3175000"/>
-              <a:gd name="connsiteX3" fmla="*/ 1316328 w 1320800"/>
-              <a:gd name="connsiteY3" fmla="*/ 734573 h 3175000"/>
-              <a:gd name="connsiteX4" fmla="*/ 1320800 w 1320800"/>
-              <a:gd name="connsiteY4" fmla="*/ 778938 h 3175000"/>
-              <a:gd name="connsiteX5" fmla="*/ 1320800 w 1320800"/>
-              <a:gd name="connsiteY5" fmla="*/ 2954862 h 3175000"/>
-              <a:gd name="connsiteX6" fmla="*/ 1100662 w 1320800"/>
-              <a:gd name="connsiteY6" fmla="*/ 3175000 h 3175000"/>
-              <a:gd name="connsiteX7" fmla="*/ 220138 w 1320800"/>
-              <a:gd name="connsiteY7" fmla="*/ 3175000 h 3175000"/>
-              <a:gd name="connsiteX8" fmla="*/ 0 w 1320800"/>
-              <a:gd name="connsiteY8" fmla="*/ 2954862 h 3175000"/>
-              <a:gd name="connsiteX9" fmla="*/ 0 w 1320800"/>
-              <a:gd name="connsiteY9" fmla="*/ 778938 h 3175000"/>
-              <a:gd name="connsiteX10" fmla="*/ 4473 w 1320800"/>
-              <a:gd name="connsiteY10" fmla="*/ 734573 h 3175000"/>
-              <a:gd name="connsiteX11" fmla="*/ 6741 w 1320800"/>
-              <a:gd name="connsiteY11" fmla="*/ 727266 h 3175000"/>
-              <a:gd name="connsiteX12" fmla="*/ 0 w 1320800"/>
-              <a:gd name="connsiteY12" fmla="*/ 660400 h 3175000"/>
-              <a:gd name="connsiteX13" fmla="*/ 660400 w 1320800"/>
-              <a:gd name="connsiteY13" fmla="*/ 0 h 3175000"/>
-            </a:gdLst>
-            <a:ahLst/>
-            <a:cxnLst>
-              <a:cxn ang="0">
-                <a:pos x="connsiteX0" y="connsiteY0"/>
-              </a:cxn>
-              <a:cxn ang="0">
-                <a:pos x="connsiteX1" y="connsiteY1"/>
-              </a:cxn>
-              <a:cxn ang="0">
-                <a:pos x="connsiteX2" y="connsiteY2"/>
-              </a:cxn>
-              <a:cxn ang="0">
-                <a:pos x="connsiteX3" y="connsiteY3"/>
-              </a:cxn>
-              <a:cxn ang="0">
-                <a:pos x="connsiteX4" y="connsiteY4"/>
-              </a:cxn>
-              <a:cxn ang="0">
-                <a:pos x="connsiteX5" y="connsiteY5"/>
-              </a:cxn>
-              <a:cxn ang="0">
-                <a:pos x="connsiteX6" y="connsiteY6"/>
-              </a:cxn>
-              <a:cxn ang="0">
-                <a:pos x="connsiteX7" y="connsiteY7"/>
-              </a:cxn>
-              <a:cxn ang="0">
-                <a:pos x="connsiteX8" y="connsiteY8"/>
-              </a:cxn>
-              <a:cxn ang="0">
-                <a:pos x="connsiteX9" y="connsiteY9"/>
-              </a:cxn>
-              <a:cxn ang="0">
-                <a:pos x="connsiteX10" y="connsiteY10"/>
-              </a:cxn>
-              <a:cxn ang="0">
-                <a:pos x="connsiteX11" y="connsiteY11"/>
-              </a:cxn>
-              <a:cxn ang="0">
-                <a:pos x="connsiteX12" y="connsiteY12"/>
-              </a:cxn>
-              <a:cxn ang="0">
-                <a:pos x="connsiteX13" y="connsiteY13"/>
-              </a:cxn>
-            </a:cxnLst>
-            <a:rect l="l" t="t" r="r" b="b"/>
-            <a:pathLst>
-              <a:path w="1320800" h="3175000">
-                <a:moveTo>
-                  <a:pt x="660400" y="0"/>
-                </a:moveTo>
-                <a:cubicBezTo>
-                  <a:pt x="1025129" y="0"/>
-                  <a:pt x="1320800" y="295671"/>
-                  <a:pt x="1320800" y="660400"/>
-                </a:cubicBezTo>
-                <a:lnTo>
-                  <a:pt x="1314060" y="727266"/>
-                </a:lnTo>
-                <a:lnTo>
-                  <a:pt x="1316328" y="734573"/>
-                </a:lnTo>
-                <a:cubicBezTo>
-                  <a:pt x="1319260" y="748903"/>
-                  <a:pt x="1320800" y="763741"/>
-                  <a:pt x="1320800" y="778938"/>
-                </a:cubicBezTo>
-                <a:lnTo>
-                  <a:pt x="1320800" y="2954862"/>
-                </a:lnTo>
-                <a:cubicBezTo>
-                  <a:pt x="1320800" y="3076441"/>
-                  <a:pt x="1222241" y="3175000"/>
-                  <a:pt x="1100662" y="3175000"/>
-                </a:cubicBezTo>
-                <a:lnTo>
-                  <a:pt x="220138" y="3175000"/>
-                </a:lnTo>
-                <a:cubicBezTo>
-                  <a:pt x="98559" y="3175000"/>
-                  <a:pt x="0" y="3076441"/>
-                  <a:pt x="0" y="2954862"/>
-                </a:cubicBezTo>
-                <a:lnTo>
-                  <a:pt x="0" y="778938"/>
-                </a:lnTo>
-                <a:cubicBezTo>
-                  <a:pt x="0" y="763741"/>
-                  <a:pt x="1540" y="748903"/>
-                  <a:pt x="4473" y="734573"/>
-                </a:cubicBezTo>
-                <a:lnTo>
-                  <a:pt x="6741" y="727266"/>
-                </a:lnTo>
-                <a:lnTo>
-                  <a:pt x="0" y="660400"/>
-                </a:lnTo>
-                <a:cubicBezTo>
-                  <a:pt x="0" y="295671"/>
-                  <a:pt x="295671" y="0"/>
-                  <a:pt x="660400" y="0"/>
-                </a:cubicBezTo>
-                <a:close/>
-              </a:path>
-            </a:pathLst>
-          </a:custGeom>
-          <a:ln>
-            <a:noFill/>
-          </a:ln>
-          <a:effectLst>
-            <a:outerShdw blurRad="190500" dist="228600" dir="2700000" algn="ctr">
-              <a:srgbClr val="000000">
-                <a:alpha val="30000"/>
-              </a:srgbClr>
-            </a:outerShdw>
-          </a:effectLst>
-          <a:scene3d>
-            <a:camera prst="orthographicFront">
-              <a:rot lat="0" lon="0" rev="0"/>
-            </a:camera>
-            <a:lightRig rig="glow" dir="t">
-              <a:rot lat="0" lon="0" rev="4800000"/>
-            </a:lightRig>
-          </a:scene3d>
-          <a:sp3d prstMaterial="matte">
-            <a:bevelT w="127000" h="63500"/>
-          </a:sp3d>
-        </p:spPr>
-        <p:style>
-          <a:lnRef idx="2">
-            <a:schemeClr val="accent1">
-              <a:shade val="50000"/>
-            </a:schemeClr>
-          </a:lnRef>
-          <a:fillRef idx="1">
-            <a:schemeClr val="accent1"/>
-          </a:fillRef>
-          <a:effectRef idx="0">
-            <a:schemeClr val="accent1"/>
-          </a:effectRef>
-          <a:fontRef idx="minor">
-            <a:schemeClr val="lt1"/>
-          </a:fontRef>
-        </p:style>
-        <p:txBody>
-          <a:bodyPr rtlCol="0" anchor="ctr"/>
-          <a:lstStyle/>
-          <a:p>
-            <a:pPr algn="ctr"/>
-            <a:endParaRPr lang="en-IN"/>
-          </a:p>
-        </p:txBody>
-      </p:sp>
-      <p:sp>
-        <p:nvSpPr>
-          <p:cNvPr id="9" name="Freeform 8"/>
-          <p:cNvSpPr/>
-          <p:nvPr/>
-        </p:nvSpPr>
-        <p:spPr>
-          <a:xfrm>
-            <a:off x="5435600" y="1965325"/>
-            <a:ext cx="1066800" cy="2670175"/>
-          </a:xfrm>
-          <a:custGeom>
-            <a:avLst/>
-            <a:gdLst>
-              <a:gd name="connsiteX0" fmla="*/ 660400 w 1320800"/>
-              <a:gd name="connsiteY0" fmla="*/ 0 h 3175000"/>
-              <a:gd name="connsiteX1" fmla="*/ 1320800 w 1320800"/>
-              <a:gd name="connsiteY1" fmla="*/ 660400 h 3175000"/>
-              <a:gd name="connsiteX2" fmla="*/ 1314060 w 1320800"/>
-              <a:gd name="connsiteY2" fmla="*/ 727266 h 3175000"/>
-              <a:gd name="connsiteX3" fmla="*/ 1316328 w 1320800"/>
-              <a:gd name="connsiteY3" fmla="*/ 734573 h 3175000"/>
-              <a:gd name="connsiteX4" fmla="*/ 1320800 w 1320800"/>
-              <a:gd name="connsiteY4" fmla="*/ 778938 h 3175000"/>
-              <a:gd name="connsiteX5" fmla="*/ 1320800 w 1320800"/>
-              <a:gd name="connsiteY5" fmla="*/ 2954862 h 3175000"/>
-              <a:gd name="connsiteX6" fmla="*/ 1100662 w 1320800"/>
-              <a:gd name="connsiteY6" fmla="*/ 3175000 h 3175000"/>
-              <a:gd name="connsiteX7" fmla="*/ 220138 w 1320800"/>
-              <a:gd name="connsiteY7" fmla="*/ 3175000 h 3175000"/>
-              <a:gd name="connsiteX8" fmla="*/ 0 w 1320800"/>
-              <a:gd name="connsiteY8" fmla="*/ 2954862 h 3175000"/>
-              <a:gd name="connsiteX9" fmla="*/ 0 w 1320800"/>
-              <a:gd name="connsiteY9" fmla="*/ 778938 h 3175000"/>
-              <a:gd name="connsiteX10" fmla="*/ 4473 w 1320800"/>
-              <a:gd name="connsiteY10" fmla="*/ 734573 h 3175000"/>
-              <a:gd name="connsiteX11" fmla="*/ 6741 w 1320800"/>
-              <a:gd name="connsiteY11" fmla="*/ 727266 h 3175000"/>
-              <a:gd name="connsiteX12" fmla="*/ 0 w 1320800"/>
-              <a:gd name="connsiteY12" fmla="*/ 660400 h 3175000"/>
-              <a:gd name="connsiteX13" fmla="*/ 660400 w 1320800"/>
-              <a:gd name="connsiteY13" fmla="*/ 0 h 3175000"/>
-            </a:gdLst>
-            <a:ahLst/>
-            <a:cxnLst>
-              <a:cxn ang="0">
-                <a:pos x="connsiteX0" y="connsiteY0"/>
-              </a:cxn>
-              <a:cxn ang="0">
-                <a:pos x="connsiteX1" y="connsiteY1"/>
-              </a:cxn>
-              <a:cxn ang="0">
-                <a:pos x="connsiteX2" y="connsiteY2"/>
-              </a:cxn>
-              <a:cxn ang="0">
-                <a:pos x="connsiteX3" y="connsiteY3"/>
-              </a:cxn>
-              <a:cxn ang="0">
-                <a:pos x="connsiteX4" y="connsiteY4"/>
-              </a:cxn>
-              <a:cxn ang="0">
-                <a:pos x="connsiteX5" y="connsiteY5"/>
-              </a:cxn>
-              <a:cxn ang="0">
-                <a:pos x="connsiteX6" y="connsiteY6"/>
-              </a:cxn>
-              <a:cxn ang="0">
-                <a:pos x="connsiteX7" y="connsiteY7"/>
-              </a:cxn>
-              <a:cxn ang="0">
-                <a:pos x="connsiteX8" y="connsiteY8"/>
-              </a:cxn>
-              <a:cxn ang="0">
-                <a:pos x="connsiteX9" y="connsiteY9"/>
-              </a:cxn>
-              <a:cxn ang="0">
-                <a:pos x="connsiteX10" y="connsiteY10"/>
-              </a:cxn>
-              <a:cxn ang="0">
-                <a:pos x="connsiteX11" y="connsiteY11"/>
-              </a:cxn>
-              <a:cxn ang="0">
-                <a:pos x="connsiteX12" y="connsiteY12"/>
-              </a:cxn>
-              <a:cxn ang="0">
-                <a:pos x="connsiteX13" y="connsiteY13"/>
-              </a:cxn>
-            </a:cxnLst>
-            <a:rect l="l" t="t" r="r" b="b"/>
-            <a:pathLst>
-              <a:path w="1320800" h="3175000">
-                <a:moveTo>
-                  <a:pt x="660400" y="0"/>
-                </a:moveTo>
-                <a:cubicBezTo>
-                  <a:pt x="1025129" y="0"/>
-                  <a:pt x="1320800" y="295671"/>
-                  <a:pt x="1320800" y="660400"/>
-                </a:cubicBezTo>
-                <a:lnTo>
-                  <a:pt x="1314060" y="727266"/>
-                </a:lnTo>
-                <a:lnTo>
-                  <a:pt x="1316328" y="734573"/>
-                </a:lnTo>
-                <a:cubicBezTo>
-                  <a:pt x="1319260" y="748903"/>
-                  <a:pt x="1320800" y="763741"/>
-                  <a:pt x="1320800" y="778938"/>
-                </a:cubicBezTo>
-                <a:lnTo>
-                  <a:pt x="1320800" y="2954862"/>
-                </a:lnTo>
-                <a:cubicBezTo>
-                  <a:pt x="1320800" y="3076441"/>
-                  <a:pt x="1222241" y="3175000"/>
-                  <a:pt x="1100662" y="3175000"/>
-                </a:cubicBezTo>
-                <a:lnTo>
-                  <a:pt x="220138" y="3175000"/>
-                </a:lnTo>
-                <a:cubicBezTo>
-                  <a:pt x="98559" y="3175000"/>
-                  <a:pt x="0" y="3076441"/>
-                  <a:pt x="0" y="2954862"/>
-                </a:cubicBezTo>
-                <a:lnTo>
-                  <a:pt x="0" y="778938"/>
-                </a:lnTo>
-                <a:cubicBezTo>
-                  <a:pt x="0" y="763741"/>
-                  <a:pt x="1540" y="748903"/>
-                  <a:pt x="4473" y="734573"/>
-                </a:cubicBezTo>
-                <a:lnTo>
-                  <a:pt x="6741" y="727266"/>
-                </a:lnTo>
-                <a:lnTo>
-                  <a:pt x="0" y="660400"/>
-                </a:lnTo>
-                <a:cubicBezTo>
-                  <a:pt x="0" y="295671"/>
-                  <a:pt x="295671" y="0"/>
-                  <a:pt x="660400" y="0"/>
-                </a:cubicBezTo>
-                <a:close/>
-              </a:path>
-            </a:pathLst>
-          </a:custGeom>
-          <a:ln>
-            <a:noFill/>
-          </a:ln>
-          <a:effectLst>
-            <a:outerShdw blurRad="190500" dist="228600" dir="2700000" algn="ctr">
-              <a:srgbClr val="000000">
-                <a:alpha val="30000"/>
-              </a:srgbClr>
-            </a:outerShdw>
-          </a:effectLst>
-          <a:scene3d>
-            <a:camera prst="orthographicFront">
-              <a:rot lat="0" lon="0" rev="0"/>
-            </a:camera>
-            <a:lightRig rig="glow" dir="t">
-              <a:rot lat="0" lon="0" rev="4800000"/>
-            </a:lightRig>
-          </a:scene3d>
-          <a:sp3d prstMaterial="matte">
-            <a:bevelT w="127000" h="63500"/>
-          </a:sp3d>
-        </p:spPr>
-        <p:style>
-          <a:lnRef idx="2">
-            <a:schemeClr val="accent1">
-              <a:shade val="50000"/>
-            </a:schemeClr>
-          </a:lnRef>
-          <a:fillRef idx="1">
-            <a:schemeClr val="accent1"/>
-          </a:fillRef>
-          <a:effectRef idx="0">
-            <a:schemeClr val="accent1"/>
-          </a:effectRef>
-          <a:fontRef idx="minor">
-            <a:schemeClr val="lt1"/>
-          </a:fontRef>
-        </p:style>
-        <p:txBody>
-          <a:bodyPr rtlCol="0" anchor="ctr"/>
-          <a:lstStyle/>
-          <a:p>
-            <a:pPr algn="ctr"/>
-            <a:endParaRPr lang="en-IN"/>
-          </a:p>
-        </p:txBody>
-      </p:sp>
-      <p:sp>
-        <p:nvSpPr>
-          <p:cNvPr id="8" name="Freeform 7"/>
-          <p:cNvSpPr/>
-          <p:nvPr/>
-        </p:nvSpPr>
-        <p:spPr>
-          <a:xfrm>
-            <a:off x="4508500" y="1758950"/>
-            <a:ext cx="1219200" cy="2984500"/>
-          </a:xfrm>
-          <a:custGeom>
-            <a:avLst/>
-            <a:gdLst>
-              <a:gd name="connsiteX0" fmla="*/ 660400 w 1320800"/>
-              <a:gd name="connsiteY0" fmla="*/ 0 h 3175000"/>
-              <a:gd name="connsiteX1" fmla="*/ 1320800 w 1320800"/>
-              <a:gd name="connsiteY1" fmla="*/ 660400 h 3175000"/>
-              <a:gd name="connsiteX2" fmla="*/ 1314060 w 1320800"/>
-              <a:gd name="connsiteY2" fmla="*/ 727266 h 3175000"/>
-              <a:gd name="connsiteX3" fmla="*/ 1316328 w 1320800"/>
-              <a:gd name="connsiteY3" fmla="*/ 734573 h 3175000"/>
-              <a:gd name="connsiteX4" fmla="*/ 1320800 w 1320800"/>
-              <a:gd name="connsiteY4" fmla="*/ 778938 h 3175000"/>
-              <a:gd name="connsiteX5" fmla="*/ 1320800 w 1320800"/>
-              <a:gd name="connsiteY5" fmla="*/ 2954862 h 3175000"/>
-              <a:gd name="connsiteX6" fmla="*/ 1100662 w 1320800"/>
-              <a:gd name="connsiteY6" fmla="*/ 3175000 h 3175000"/>
-              <a:gd name="connsiteX7" fmla="*/ 220138 w 1320800"/>
-              <a:gd name="connsiteY7" fmla="*/ 3175000 h 3175000"/>
-              <a:gd name="connsiteX8" fmla="*/ 0 w 1320800"/>
-              <a:gd name="connsiteY8" fmla="*/ 2954862 h 3175000"/>
-              <a:gd name="connsiteX9" fmla="*/ 0 w 1320800"/>
-              <a:gd name="connsiteY9" fmla="*/ 778938 h 3175000"/>
-              <a:gd name="connsiteX10" fmla="*/ 4473 w 1320800"/>
-              <a:gd name="connsiteY10" fmla="*/ 734573 h 3175000"/>
-              <a:gd name="connsiteX11" fmla="*/ 6741 w 1320800"/>
-              <a:gd name="connsiteY11" fmla="*/ 727266 h 3175000"/>
-              <a:gd name="connsiteX12" fmla="*/ 0 w 1320800"/>
-              <a:gd name="connsiteY12" fmla="*/ 660400 h 3175000"/>
-              <a:gd name="connsiteX13" fmla="*/ 660400 w 1320800"/>
-              <a:gd name="connsiteY13" fmla="*/ 0 h 3175000"/>
-            </a:gdLst>
-            <a:ahLst/>
-            <a:cxnLst>
-              <a:cxn ang="0">
-                <a:pos x="connsiteX0" y="connsiteY0"/>
-              </a:cxn>
-              <a:cxn ang="0">
-                <a:pos x="connsiteX1" y="connsiteY1"/>
-              </a:cxn>
-              <a:cxn ang="0">
-                <a:pos x="connsiteX2" y="connsiteY2"/>
-              </a:cxn>
-              <a:cxn ang="0">
-                <a:pos x="connsiteX3" y="connsiteY3"/>
-              </a:cxn>
-              <a:cxn ang="0">
-                <a:pos x="connsiteX4" y="connsiteY4"/>
-              </a:cxn>
-              <a:cxn ang="0">
-                <a:pos x="connsiteX5" y="connsiteY5"/>
-              </a:cxn>
-              <a:cxn ang="0">
-                <a:pos x="connsiteX6" y="connsiteY6"/>
-              </a:cxn>
-              <a:cxn ang="0">
-                <a:pos x="connsiteX7" y="connsiteY7"/>
-              </a:cxn>
-              <a:cxn ang="0">
-                <a:pos x="connsiteX8" y="connsiteY8"/>
-              </a:cxn>
-              <a:cxn ang="0">
-                <a:pos x="connsiteX9" y="connsiteY9"/>
-              </a:cxn>
-              <a:cxn ang="0">
-                <a:pos x="connsiteX10" y="connsiteY10"/>
-              </a:cxn>
-              <a:cxn ang="0">
-                <a:pos x="connsiteX11" y="connsiteY11"/>
-              </a:cxn>
-              <a:cxn ang="0">
-                <a:pos x="connsiteX12" y="connsiteY12"/>
-              </a:cxn>
-              <a:cxn ang="0">
-                <a:pos x="connsiteX13" y="connsiteY13"/>
-              </a:cxn>
-            </a:cxnLst>
-            <a:rect l="l" t="t" r="r" b="b"/>
-            <a:pathLst>
-              <a:path w="1320800" h="3175000">
-                <a:moveTo>
-                  <a:pt x="660400" y="0"/>
-                </a:moveTo>
-                <a:cubicBezTo>
-                  <a:pt x="1025129" y="0"/>
-                  <a:pt x="1320800" y="295671"/>
-                  <a:pt x="1320800" y="660400"/>
-                </a:cubicBezTo>
-                <a:lnTo>
-                  <a:pt x="1314060" y="727266"/>
-                </a:lnTo>
-                <a:lnTo>
-                  <a:pt x="1316328" y="734573"/>
-                </a:lnTo>
-                <a:cubicBezTo>
-                  <a:pt x="1319260" y="748903"/>
-                  <a:pt x="1320800" y="763741"/>
-                  <a:pt x="1320800" y="778938"/>
-                </a:cubicBezTo>
-                <a:lnTo>
-                  <a:pt x="1320800" y="2954862"/>
-                </a:lnTo>
-                <a:cubicBezTo>
-                  <a:pt x="1320800" y="3076441"/>
-                  <a:pt x="1222241" y="3175000"/>
-                  <a:pt x="1100662" y="3175000"/>
-                </a:cubicBezTo>
-                <a:lnTo>
-                  <a:pt x="220138" y="3175000"/>
-                </a:lnTo>
-                <a:cubicBezTo>
-                  <a:pt x="98559" y="3175000"/>
-                  <a:pt x="0" y="3076441"/>
-                  <a:pt x="0" y="2954862"/>
-                </a:cubicBezTo>
-                <a:lnTo>
-                  <a:pt x="0" y="778938"/>
-                </a:lnTo>
-                <a:cubicBezTo>
-                  <a:pt x="0" y="763741"/>
-                  <a:pt x="1540" y="748903"/>
-                  <a:pt x="4473" y="734573"/>
-                </a:cubicBezTo>
-                <a:lnTo>
-                  <a:pt x="6741" y="727266"/>
-                </a:lnTo>
-                <a:lnTo>
-                  <a:pt x="0" y="660400"/>
-                </a:lnTo>
-                <a:cubicBezTo>
-                  <a:pt x="0" y="295671"/>
-                  <a:pt x="295671" y="0"/>
-                  <a:pt x="660400" y="0"/>
-                </a:cubicBezTo>
-                <a:close/>
-              </a:path>
-            </a:pathLst>
-          </a:custGeom>
-          <a:ln>
-            <a:noFill/>
-          </a:ln>
-          <a:effectLst>
-            <a:outerShdw blurRad="190500" dist="228600" dir="2700000" algn="ctr">
-              <a:srgbClr val="000000">
-                <a:alpha val="30000"/>
-              </a:srgbClr>
-            </a:outerShdw>
-          </a:effectLst>
-          <a:scene3d>
-            <a:camera prst="orthographicFront">
-              <a:rot lat="0" lon="0" rev="0"/>
-            </a:camera>
-            <a:lightRig rig="glow" dir="t">
-              <a:rot lat="0" lon="0" rev="4800000"/>
-            </a:lightRig>
-          </a:scene3d>
-          <a:sp3d prstMaterial="matte">
-            <a:bevelT w="127000" h="63500"/>
-          </a:sp3d>
-        </p:spPr>
-        <p:style>
-          <a:lnRef idx="2">
-            <a:schemeClr val="accent1">
-              <a:shade val="50000"/>
-            </a:schemeClr>
-          </a:lnRef>
-          <a:fillRef idx="1">
-            <a:schemeClr val="accent1"/>
-          </a:fillRef>
-          <a:effectRef idx="0">
-            <a:schemeClr val="accent1"/>
-          </a:effectRef>
-          <a:fontRef idx="minor">
-            <a:schemeClr val="lt1"/>
-          </a:fontRef>
-        </p:style>
-        <p:txBody>
-          <a:bodyPr rtlCol="0" anchor="ctr"/>
-          <a:lstStyle/>
-          <a:p>
-            <a:pPr algn="ctr"/>
-            <a:endParaRPr lang="en-IN"/>
-          </a:p>
-        </p:txBody>
-      </p:sp>
-      <p:sp>
-        <p:nvSpPr>
-          <p:cNvPr id="6" name="Freeform 5"/>
-          <p:cNvSpPr/>
-          <p:nvPr/>
-        </p:nvSpPr>
-        <p:spPr>
-          <a:xfrm>
-            <a:off x="3530600" y="1600200"/>
-            <a:ext cx="1409700" cy="3302000"/>
-          </a:xfrm>
-          <a:custGeom>
-            <a:avLst/>
-            <a:gdLst>
-              <a:gd name="connsiteX0" fmla="*/ 660400 w 1320800"/>
-              <a:gd name="connsiteY0" fmla="*/ 0 h 3175000"/>
-              <a:gd name="connsiteX1" fmla="*/ 1320800 w 1320800"/>
-              <a:gd name="connsiteY1" fmla="*/ 660400 h 3175000"/>
-              <a:gd name="connsiteX2" fmla="*/ 1314060 w 1320800"/>
-              <a:gd name="connsiteY2" fmla="*/ 727266 h 3175000"/>
-              <a:gd name="connsiteX3" fmla="*/ 1316328 w 1320800"/>
-              <a:gd name="connsiteY3" fmla="*/ 734573 h 3175000"/>
-              <a:gd name="connsiteX4" fmla="*/ 1320800 w 1320800"/>
-              <a:gd name="connsiteY4" fmla="*/ 778938 h 3175000"/>
-              <a:gd name="connsiteX5" fmla="*/ 1320800 w 1320800"/>
-              <a:gd name="connsiteY5" fmla="*/ 2954862 h 3175000"/>
-              <a:gd name="connsiteX6" fmla="*/ 1100662 w 1320800"/>
-              <a:gd name="connsiteY6" fmla="*/ 3175000 h 3175000"/>
-              <a:gd name="connsiteX7" fmla="*/ 220138 w 1320800"/>
-              <a:gd name="connsiteY7" fmla="*/ 3175000 h 3175000"/>
-              <a:gd name="connsiteX8" fmla="*/ 0 w 1320800"/>
-              <a:gd name="connsiteY8" fmla="*/ 2954862 h 3175000"/>
-              <a:gd name="connsiteX9" fmla="*/ 0 w 1320800"/>
-              <a:gd name="connsiteY9" fmla="*/ 778938 h 3175000"/>
-              <a:gd name="connsiteX10" fmla="*/ 4473 w 1320800"/>
-              <a:gd name="connsiteY10" fmla="*/ 734573 h 3175000"/>
-              <a:gd name="connsiteX11" fmla="*/ 6741 w 1320800"/>
-              <a:gd name="connsiteY11" fmla="*/ 727266 h 3175000"/>
-              <a:gd name="connsiteX12" fmla="*/ 0 w 1320800"/>
-              <a:gd name="connsiteY12" fmla="*/ 660400 h 3175000"/>
-              <a:gd name="connsiteX13" fmla="*/ 660400 w 1320800"/>
-              <a:gd name="connsiteY13" fmla="*/ 0 h 3175000"/>
-            </a:gdLst>
-            <a:ahLst/>
-            <a:cxnLst>
-              <a:cxn ang="0">
-                <a:pos x="connsiteX0" y="connsiteY0"/>
-              </a:cxn>
-              <a:cxn ang="0">
-                <a:pos x="connsiteX1" y="connsiteY1"/>
-              </a:cxn>
-              <a:cxn ang="0">
-                <a:pos x="connsiteX2" y="connsiteY2"/>
-              </a:cxn>
-              <a:cxn ang="0">
-                <a:pos x="connsiteX3" y="connsiteY3"/>
-              </a:cxn>
-              <a:cxn ang="0">
-                <a:pos x="connsiteX4" y="connsiteY4"/>
-              </a:cxn>
-              <a:cxn ang="0">
-                <a:pos x="connsiteX5" y="connsiteY5"/>
-              </a:cxn>
-              <a:cxn ang="0">
-                <a:pos x="connsiteX6" y="connsiteY6"/>
-              </a:cxn>
-              <a:cxn ang="0">
-                <a:pos x="connsiteX7" y="connsiteY7"/>
-              </a:cxn>
-              <a:cxn ang="0">
-                <a:pos x="connsiteX8" y="connsiteY8"/>
-              </a:cxn>
-              <a:cxn ang="0">
-                <a:pos x="connsiteX9" y="connsiteY9"/>
-              </a:cxn>
-              <a:cxn ang="0">
-                <a:pos x="connsiteX10" y="connsiteY10"/>
-              </a:cxn>
-              <a:cxn ang="0">
-                <a:pos x="connsiteX11" y="connsiteY11"/>
-              </a:cxn>
-              <a:cxn ang="0">
-                <a:pos x="connsiteX12" y="connsiteY12"/>
-              </a:cxn>
-              <a:cxn ang="0">
-                <a:pos x="connsiteX13" y="connsiteY13"/>
-              </a:cxn>
-            </a:cxnLst>
-            <a:rect l="l" t="t" r="r" b="b"/>
-            <a:pathLst>
-              <a:path w="1320800" h="3175000">
-                <a:moveTo>
-                  <a:pt x="660400" y="0"/>
-                </a:moveTo>
-                <a:cubicBezTo>
-                  <a:pt x="1025129" y="0"/>
-                  <a:pt x="1320800" y="295671"/>
-                  <a:pt x="1320800" y="660400"/>
-                </a:cubicBezTo>
-                <a:lnTo>
-                  <a:pt x="1314060" y="727266"/>
-                </a:lnTo>
-                <a:lnTo>
-                  <a:pt x="1316328" y="734573"/>
-                </a:lnTo>
-                <a:cubicBezTo>
-                  <a:pt x="1319260" y="748903"/>
-                  <a:pt x="1320800" y="763741"/>
-                  <a:pt x="1320800" y="778938"/>
-                </a:cubicBezTo>
-                <a:lnTo>
-                  <a:pt x="1320800" y="2954862"/>
-                </a:lnTo>
-                <a:cubicBezTo>
-                  <a:pt x="1320800" y="3076441"/>
-                  <a:pt x="1222241" y="3175000"/>
-                  <a:pt x="1100662" y="3175000"/>
-                </a:cubicBezTo>
-                <a:lnTo>
-                  <a:pt x="220138" y="3175000"/>
-                </a:lnTo>
-                <a:cubicBezTo>
-                  <a:pt x="98559" y="3175000"/>
-                  <a:pt x="0" y="3076441"/>
-                  <a:pt x="0" y="2954862"/>
-                </a:cubicBezTo>
-                <a:lnTo>
-                  <a:pt x="0" y="778938"/>
-                </a:lnTo>
-                <a:cubicBezTo>
-                  <a:pt x="0" y="763741"/>
-                  <a:pt x="1540" y="748903"/>
-                  <a:pt x="4473" y="734573"/>
-                </a:cubicBezTo>
-                <a:lnTo>
-                  <a:pt x="6741" y="727266"/>
-                </a:lnTo>
-                <a:lnTo>
-                  <a:pt x="0" y="660400"/>
-                </a:lnTo>
-                <a:cubicBezTo>
-                  <a:pt x="0" y="295671"/>
-                  <a:pt x="295671" y="0"/>
-                  <a:pt x="660400" y="0"/>
-                </a:cubicBezTo>
-                <a:close/>
-              </a:path>
-            </a:pathLst>
-          </a:custGeom>
-          <a:ln>
-            <a:noFill/>
-          </a:ln>
-          <a:effectLst>
-            <a:outerShdw blurRad="190500" dist="228600" dir="2700000" algn="ctr">
-              <a:srgbClr val="000000">
-                <a:alpha val="30000"/>
-              </a:srgbClr>
-            </a:outerShdw>
-          </a:effectLst>
-          <a:scene3d>
-            <a:camera prst="orthographicFront">
-              <a:rot lat="0" lon="0" rev="0"/>
-            </a:camera>
-            <a:lightRig rig="glow" dir="t">
-              <a:rot lat="0" lon="0" rev="4800000"/>
-            </a:lightRig>
-          </a:scene3d>
-          <a:sp3d prstMaterial="matte">
-            <a:bevelT w="127000" h="63500"/>
-          </a:sp3d>
-        </p:spPr>
-        <p:style>
-          <a:lnRef idx="2">
-            <a:schemeClr val="accent1">
-              <a:shade val="50000"/>
-            </a:schemeClr>
-          </a:lnRef>
-          <a:fillRef idx="1">
-            <a:schemeClr val="accent1"/>
-          </a:fillRef>
-          <a:effectRef idx="0">
-            <a:schemeClr val="accent1"/>
-          </a:effectRef>
-          <a:fontRef idx="minor">
-            <a:schemeClr val="lt1"/>
-          </a:fontRef>
-        </p:style>
-        <p:txBody>
-          <a:bodyPr rtlCol="0" anchor="ctr"/>
-          <a:lstStyle/>
-          <a:p>
-            <a:pPr algn="ctr"/>
-            <a:endParaRPr lang="en-IN"/>
-          </a:p>
-        </p:txBody>
-      </p:sp>
       <p:grpSp>
         <p:nvGrpSpPr>
-          <p:cNvPr id="21" name="Group 20"/>
+          <p:cNvPr id="55" name="Group 54"/>
           <p:cNvGrpSpPr/>
           <p:nvPr/>
         </p:nvGrpSpPr>
         <p:grpSpPr>
           <a:xfrm>
-            <a:off x="4280438" y="2503487"/>
-            <a:ext cx="456124" cy="2239963"/>
-            <a:chOff x="9411776" y="2021680"/>
-            <a:chExt cx="799024" cy="2105820"/>
+            <a:off x="2990063" y="606424"/>
+            <a:ext cx="5992464" cy="4774748"/>
+            <a:chOff x="3628692" y="577395"/>
+            <a:chExt cx="5992464" cy="4774748"/>
           </a:xfrm>
+          <a:solidFill>
+            <a:srgbClr val="0066FF"/>
+          </a:solidFill>
         </p:grpSpPr>
+        <p:grpSp>
+          <p:nvGrpSpPr>
+            <p:cNvPr id="52" name="Group 51"/>
+            <p:cNvGrpSpPr/>
+            <p:nvPr/>
+          </p:nvGrpSpPr>
+          <p:grpSpPr>
+            <a:xfrm rot="4561140">
+              <a:off x="4563611" y="1869797"/>
+              <a:ext cx="461028" cy="2330866"/>
+              <a:chOff x="3782448" y="2508076"/>
+              <a:chExt cx="461028" cy="2330866"/>
+            </a:xfrm>
+            <a:grpFill/>
+          </p:grpSpPr>
+          <p:sp>
+            <p:nvSpPr>
+              <p:cNvPr id="49" name="Freeform 48"/>
+              <p:cNvSpPr/>
+              <p:nvPr/>
+            </p:nvSpPr>
+            <p:spPr>
+              <a:xfrm>
+                <a:off x="3782448" y="2508076"/>
+                <a:ext cx="456124" cy="2226454"/>
+              </a:xfrm>
+              <a:custGeom>
+                <a:avLst/>
+                <a:gdLst>
+                  <a:gd name="connsiteX0" fmla="*/ 399512 w 799024"/>
+                  <a:gd name="connsiteY0" fmla="*/ 0 h 2093120"/>
+                  <a:gd name="connsiteX1" fmla="*/ 799024 w 799024"/>
+                  <a:gd name="connsiteY1" fmla="*/ 358927 h 2093120"/>
+                  <a:gd name="connsiteX2" fmla="*/ 794947 w 799024"/>
+                  <a:gd name="connsiteY2" fmla="*/ 395269 h 2093120"/>
+                  <a:gd name="connsiteX3" fmla="*/ 796319 w 799024"/>
+                  <a:gd name="connsiteY3" fmla="*/ 399240 h 2093120"/>
+                  <a:gd name="connsiteX4" fmla="*/ 799024 w 799024"/>
+                  <a:gd name="connsiteY4" fmla="*/ 423353 h 2093120"/>
+                  <a:gd name="connsiteX5" fmla="*/ 799024 w 799024"/>
+                  <a:gd name="connsiteY5" fmla="*/ 1605968 h 2093120"/>
+                  <a:gd name="connsiteX6" fmla="*/ 791359 w 799024"/>
+                  <a:gd name="connsiteY6" fmla="*/ 1640078 h 2093120"/>
+                  <a:gd name="connsiteX7" fmla="*/ 799024 w 799024"/>
+                  <a:gd name="connsiteY7" fmla="*/ 1712516 h 2093120"/>
+                  <a:gd name="connsiteX8" fmla="*/ 399512 w 799024"/>
+                  <a:gd name="connsiteY8" fmla="*/ 2093120 h 2093120"/>
+                  <a:gd name="connsiteX9" fmla="*/ 0 w 799024"/>
+                  <a:gd name="connsiteY9" fmla="*/ 1712516 h 2093120"/>
+                  <a:gd name="connsiteX10" fmla="*/ 7665 w 799024"/>
+                  <a:gd name="connsiteY10" fmla="*/ 1640078 h 2093120"/>
+                  <a:gd name="connsiteX11" fmla="*/ 0 w 799024"/>
+                  <a:gd name="connsiteY11" fmla="*/ 1605968 h 2093120"/>
+                  <a:gd name="connsiteX12" fmla="*/ 0 w 799024"/>
+                  <a:gd name="connsiteY12" fmla="*/ 423353 h 2093120"/>
+                  <a:gd name="connsiteX13" fmla="*/ 2706 w 799024"/>
+                  <a:gd name="connsiteY13" fmla="*/ 399240 h 2093120"/>
+                  <a:gd name="connsiteX14" fmla="*/ 4078 w 799024"/>
+                  <a:gd name="connsiteY14" fmla="*/ 395269 h 2093120"/>
+                  <a:gd name="connsiteX15" fmla="*/ 0 w 799024"/>
+                  <a:gd name="connsiteY15" fmla="*/ 358927 h 2093120"/>
+                  <a:gd name="connsiteX16" fmla="*/ 399512 w 799024"/>
+                  <a:gd name="connsiteY16" fmla="*/ 0 h 2093120"/>
+                </a:gdLst>
+                <a:ahLst/>
+                <a:cxnLst>
+                  <a:cxn ang="0">
+                    <a:pos x="connsiteX0" y="connsiteY0"/>
+                  </a:cxn>
+                  <a:cxn ang="0">
+                    <a:pos x="connsiteX1" y="connsiteY1"/>
+                  </a:cxn>
+                  <a:cxn ang="0">
+                    <a:pos x="connsiteX2" y="connsiteY2"/>
+                  </a:cxn>
+                  <a:cxn ang="0">
+                    <a:pos x="connsiteX3" y="connsiteY3"/>
+                  </a:cxn>
+                  <a:cxn ang="0">
+                    <a:pos x="connsiteX4" y="connsiteY4"/>
+                  </a:cxn>
+                  <a:cxn ang="0">
+                    <a:pos x="connsiteX5" y="connsiteY5"/>
+                  </a:cxn>
+                  <a:cxn ang="0">
+                    <a:pos x="connsiteX6" y="connsiteY6"/>
+                  </a:cxn>
+                  <a:cxn ang="0">
+                    <a:pos x="connsiteX7" y="connsiteY7"/>
+                  </a:cxn>
+                  <a:cxn ang="0">
+                    <a:pos x="connsiteX8" y="connsiteY8"/>
+                  </a:cxn>
+                  <a:cxn ang="0">
+                    <a:pos x="connsiteX9" y="connsiteY9"/>
+                  </a:cxn>
+                  <a:cxn ang="0">
+                    <a:pos x="connsiteX10" y="connsiteY10"/>
+                  </a:cxn>
+                  <a:cxn ang="0">
+                    <a:pos x="connsiteX11" y="connsiteY11"/>
+                  </a:cxn>
+                  <a:cxn ang="0">
+                    <a:pos x="connsiteX12" y="connsiteY12"/>
+                  </a:cxn>
+                  <a:cxn ang="0">
+                    <a:pos x="connsiteX13" y="connsiteY13"/>
+                  </a:cxn>
+                  <a:cxn ang="0">
+                    <a:pos x="connsiteX14" y="connsiteY14"/>
+                  </a:cxn>
+                  <a:cxn ang="0">
+                    <a:pos x="connsiteX15" y="connsiteY15"/>
+                  </a:cxn>
+                  <a:cxn ang="0">
+                    <a:pos x="connsiteX16" y="connsiteY16"/>
+                  </a:cxn>
+                </a:cxnLst>
+                <a:rect l="l" t="t" r="r" b="b"/>
+                <a:pathLst>
+                  <a:path w="799024" h="2093120">
+                    <a:moveTo>
+                      <a:pt x="399512" y="0"/>
+                    </a:moveTo>
+                    <a:cubicBezTo>
+                      <a:pt x="620156" y="0"/>
+                      <a:pt x="799024" y="160697"/>
+                      <a:pt x="799024" y="358927"/>
+                    </a:cubicBezTo>
+                    <a:lnTo>
+                      <a:pt x="794947" y="395269"/>
+                    </a:lnTo>
+                    <a:lnTo>
+                      <a:pt x="796319" y="399240"/>
+                    </a:lnTo>
+                    <a:cubicBezTo>
+                      <a:pt x="798092" y="407029"/>
+                      <a:pt x="799024" y="415093"/>
+                      <a:pt x="799024" y="423353"/>
+                    </a:cubicBezTo>
+                    <a:lnTo>
+                      <a:pt x="799024" y="1605968"/>
+                    </a:lnTo>
+                    <a:lnTo>
+                      <a:pt x="791359" y="1640078"/>
+                    </a:lnTo>
+                    <a:lnTo>
+                      <a:pt x="799024" y="1712516"/>
+                    </a:lnTo>
+                    <a:cubicBezTo>
+                      <a:pt x="799024" y="1922718"/>
+                      <a:pt x="620156" y="2093120"/>
+                      <a:pt x="399512" y="2093120"/>
+                    </a:cubicBezTo>
+                    <a:cubicBezTo>
+                      <a:pt x="178868" y="2093120"/>
+                      <a:pt x="0" y="1922718"/>
+                      <a:pt x="0" y="1712516"/>
+                    </a:cubicBezTo>
+                    <a:lnTo>
+                      <a:pt x="7665" y="1640078"/>
+                    </a:lnTo>
+                    <a:lnTo>
+                      <a:pt x="0" y="1605968"/>
+                    </a:lnTo>
+                    <a:lnTo>
+                      <a:pt x="0" y="423353"/>
+                    </a:lnTo>
+                    <a:cubicBezTo>
+                      <a:pt x="0" y="415093"/>
+                      <a:pt x="932" y="407029"/>
+                      <a:pt x="2706" y="399240"/>
+                    </a:cubicBezTo>
+                    <a:lnTo>
+                      <a:pt x="4078" y="395269"/>
+                    </a:lnTo>
+                    <a:lnTo>
+                      <a:pt x="0" y="358927"/>
+                    </a:lnTo>
+                    <a:cubicBezTo>
+                      <a:pt x="0" y="160697"/>
+                      <a:pt x="178868" y="0"/>
+                      <a:pt x="399512" y="0"/>
+                    </a:cubicBezTo>
+                    <a:close/>
+                  </a:path>
+                </a:pathLst>
+              </a:custGeom>
+              <a:grpFill/>
+              <a:ln>
+                <a:noFill/>
+              </a:ln>
+              <a:effectLst>
+                <a:outerShdw blurRad="190500" dist="228600" dir="2700000" algn="ctr">
+                  <a:srgbClr val="000000">
+                    <a:alpha val="30000"/>
+                  </a:srgbClr>
+                </a:outerShdw>
+              </a:effectLst>
+              <a:scene3d>
+                <a:camera prst="orthographicFront">
+                  <a:rot lat="0" lon="0" rev="0"/>
+                </a:camera>
+                <a:lightRig rig="glow" dir="t">
+                  <a:rot lat="0" lon="0" rev="4800000"/>
+                </a:lightRig>
+              </a:scene3d>
+              <a:sp3d prstMaterial="matte">
+                <a:bevelT w="127000" h="63500"/>
+              </a:sp3d>
+            </p:spPr>
+            <p:style>
+              <a:lnRef idx="2">
+                <a:schemeClr val="accent1">
+                  <a:shade val="50000"/>
+                </a:schemeClr>
+              </a:lnRef>
+              <a:fillRef idx="1">
+                <a:schemeClr val="accent1"/>
+              </a:fillRef>
+              <a:effectRef idx="0">
+                <a:schemeClr val="accent1"/>
+              </a:effectRef>
+              <a:fontRef idx="minor">
+                <a:schemeClr val="lt1"/>
+              </a:fontRef>
+            </p:style>
+            <p:txBody>
+              <a:bodyPr rtlCol="0" anchor="ctr"/>
+              <a:lstStyle/>
+              <a:p>
+                <a:pPr algn="ctr"/>
+                <a:endParaRPr lang="en-IN" dirty="0"/>
+              </a:p>
+            </p:txBody>
+          </p:sp>
+          <p:sp>
+            <p:nvSpPr>
+              <p:cNvPr id="50" name="Oval 49"/>
+              <p:cNvSpPr/>
+              <p:nvPr/>
+            </p:nvSpPr>
+            <p:spPr>
+              <a:xfrm>
+                <a:off x="3787352" y="4411542"/>
+                <a:ext cx="456124" cy="427400"/>
+              </a:xfrm>
+              <a:prstGeom prst="ellipse">
+                <a:avLst/>
+              </a:prstGeom>
+              <a:grpFill/>
+              <a:ln>
+                <a:noFill/>
+              </a:ln>
+              <a:effectLst>
+                <a:outerShdw blurRad="190500" dist="228600" dir="2700000" algn="ctr">
+                  <a:srgbClr val="000000">
+                    <a:alpha val="30000"/>
+                  </a:srgbClr>
+                </a:outerShdw>
+              </a:effectLst>
+              <a:scene3d>
+                <a:camera prst="orthographicFront">
+                  <a:rot lat="0" lon="0" rev="0"/>
+                </a:camera>
+                <a:lightRig rig="glow" dir="t">
+                  <a:rot lat="0" lon="0" rev="4800000"/>
+                </a:lightRig>
+              </a:scene3d>
+              <a:sp3d prstMaterial="matte">
+                <a:bevelT w="127000" h="63500"/>
+              </a:sp3d>
+            </p:spPr>
+            <p:style>
+              <a:lnRef idx="2">
+                <a:schemeClr val="accent1">
+                  <a:shade val="50000"/>
+                </a:schemeClr>
+              </a:lnRef>
+              <a:fillRef idx="1">
+                <a:schemeClr val="accent1"/>
+              </a:fillRef>
+              <a:effectRef idx="0">
+                <a:schemeClr val="accent1"/>
+              </a:effectRef>
+              <a:fontRef idx="minor">
+                <a:schemeClr val="lt1"/>
+              </a:fontRef>
+            </p:style>
+            <p:txBody>
+              <a:bodyPr rtlCol="0" anchor="ctr"/>
+              <a:lstStyle/>
+              <a:p>
+                <a:pPr algn="ctr"/>
+                <a:endParaRPr lang="en-IN"/>
+              </a:p>
+            </p:txBody>
+          </p:sp>
+        </p:grpSp>
+        <p:sp>
+          <p:nvSpPr>
+            <p:cNvPr id="11" name="Freeform 10"/>
+            <p:cNvSpPr/>
+            <p:nvPr/>
+          </p:nvSpPr>
+          <p:spPr>
+            <a:xfrm>
+              <a:off x="8884556" y="2953430"/>
+              <a:ext cx="736600" cy="1725613"/>
+            </a:xfrm>
+            <a:custGeom>
+              <a:avLst/>
+              <a:gdLst>
+                <a:gd name="connsiteX0" fmla="*/ 660400 w 1320800"/>
+                <a:gd name="connsiteY0" fmla="*/ 0 h 3175000"/>
+                <a:gd name="connsiteX1" fmla="*/ 1320800 w 1320800"/>
+                <a:gd name="connsiteY1" fmla="*/ 660400 h 3175000"/>
+                <a:gd name="connsiteX2" fmla="*/ 1314060 w 1320800"/>
+                <a:gd name="connsiteY2" fmla="*/ 727266 h 3175000"/>
+                <a:gd name="connsiteX3" fmla="*/ 1316328 w 1320800"/>
+                <a:gd name="connsiteY3" fmla="*/ 734573 h 3175000"/>
+                <a:gd name="connsiteX4" fmla="*/ 1320800 w 1320800"/>
+                <a:gd name="connsiteY4" fmla="*/ 778938 h 3175000"/>
+                <a:gd name="connsiteX5" fmla="*/ 1320800 w 1320800"/>
+                <a:gd name="connsiteY5" fmla="*/ 2954862 h 3175000"/>
+                <a:gd name="connsiteX6" fmla="*/ 1100662 w 1320800"/>
+                <a:gd name="connsiteY6" fmla="*/ 3175000 h 3175000"/>
+                <a:gd name="connsiteX7" fmla="*/ 220138 w 1320800"/>
+                <a:gd name="connsiteY7" fmla="*/ 3175000 h 3175000"/>
+                <a:gd name="connsiteX8" fmla="*/ 0 w 1320800"/>
+                <a:gd name="connsiteY8" fmla="*/ 2954862 h 3175000"/>
+                <a:gd name="connsiteX9" fmla="*/ 0 w 1320800"/>
+                <a:gd name="connsiteY9" fmla="*/ 778938 h 3175000"/>
+                <a:gd name="connsiteX10" fmla="*/ 4473 w 1320800"/>
+                <a:gd name="connsiteY10" fmla="*/ 734573 h 3175000"/>
+                <a:gd name="connsiteX11" fmla="*/ 6741 w 1320800"/>
+                <a:gd name="connsiteY11" fmla="*/ 727266 h 3175000"/>
+                <a:gd name="connsiteX12" fmla="*/ 0 w 1320800"/>
+                <a:gd name="connsiteY12" fmla="*/ 660400 h 3175000"/>
+                <a:gd name="connsiteX13" fmla="*/ 660400 w 1320800"/>
+                <a:gd name="connsiteY13" fmla="*/ 0 h 3175000"/>
+              </a:gdLst>
+              <a:ahLst/>
+              <a:cxnLst>
+                <a:cxn ang="0">
+                  <a:pos x="connsiteX0" y="connsiteY0"/>
+                </a:cxn>
+                <a:cxn ang="0">
+                  <a:pos x="connsiteX1" y="connsiteY1"/>
+                </a:cxn>
+                <a:cxn ang="0">
+                  <a:pos x="connsiteX2" y="connsiteY2"/>
+                </a:cxn>
+                <a:cxn ang="0">
+                  <a:pos x="connsiteX3" y="connsiteY3"/>
+                </a:cxn>
+                <a:cxn ang="0">
+                  <a:pos x="connsiteX4" y="connsiteY4"/>
+                </a:cxn>
+                <a:cxn ang="0">
+                  <a:pos x="connsiteX5" y="connsiteY5"/>
+                </a:cxn>
+                <a:cxn ang="0">
+                  <a:pos x="connsiteX6" y="connsiteY6"/>
+                </a:cxn>
+                <a:cxn ang="0">
+                  <a:pos x="connsiteX7" y="connsiteY7"/>
+                </a:cxn>
+                <a:cxn ang="0">
+                  <a:pos x="connsiteX8" y="connsiteY8"/>
+                </a:cxn>
+                <a:cxn ang="0">
+                  <a:pos x="connsiteX9" y="connsiteY9"/>
+                </a:cxn>
+                <a:cxn ang="0">
+                  <a:pos x="connsiteX10" y="connsiteY10"/>
+                </a:cxn>
+                <a:cxn ang="0">
+                  <a:pos x="connsiteX11" y="connsiteY11"/>
+                </a:cxn>
+                <a:cxn ang="0">
+                  <a:pos x="connsiteX12" y="connsiteY12"/>
+                </a:cxn>
+                <a:cxn ang="0">
+                  <a:pos x="connsiteX13" y="connsiteY13"/>
+                </a:cxn>
+              </a:cxnLst>
+              <a:rect l="l" t="t" r="r" b="b"/>
+              <a:pathLst>
+                <a:path w="1320800" h="3175000">
+                  <a:moveTo>
+                    <a:pt x="660400" y="0"/>
+                  </a:moveTo>
+                  <a:cubicBezTo>
+                    <a:pt x="1025129" y="0"/>
+                    <a:pt x="1320800" y="295671"/>
+                    <a:pt x="1320800" y="660400"/>
+                  </a:cubicBezTo>
+                  <a:lnTo>
+                    <a:pt x="1314060" y="727266"/>
+                  </a:lnTo>
+                  <a:lnTo>
+                    <a:pt x="1316328" y="734573"/>
+                  </a:lnTo>
+                  <a:cubicBezTo>
+                    <a:pt x="1319260" y="748903"/>
+                    <a:pt x="1320800" y="763741"/>
+                    <a:pt x="1320800" y="778938"/>
+                  </a:cubicBezTo>
+                  <a:lnTo>
+                    <a:pt x="1320800" y="2954862"/>
+                  </a:lnTo>
+                  <a:cubicBezTo>
+                    <a:pt x="1320800" y="3076441"/>
+                    <a:pt x="1222241" y="3175000"/>
+                    <a:pt x="1100662" y="3175000"/>
+                  </a:cubicBezTo>
+                  <a:lnTo>
+                    <a:pt x="220138" y="3175000"/>
+                  </a:lnTo>
+                  <a:cubicBezTo>
+                    <a:pt x="98559" y="3175000"/>
+                    <a:pt x="0" y="3076441"/>
+                    <a:pt x="0" y="2954862"/>
+                  </a:cubicBezTo>
+                  <a:lnTo>
+                    <a:pt x="0" y="778938"/>
+                  </a:lnTo>
+                  <a:cubicBezTo>
+                    <a:pt x="0" y="763741"/>
+                    <a:pt x="1540" y="748903"/>
+                    <a:pt x="4473" y="734573"/>
+                  </a:cubicBezTo>
+                  <a:lnTo>
+                    <a:pt x="6741" y="727266"/>
+                  </a:lnTo>
+                  <a:lnTo>
+                    <a:pt x="0" y="660400"/>
+                  </a:lnTo>
+                  <a:cubicBezTo>
+                    <a:pt x="0" y="295671"/>
+                    <a:pt x="295671" y="0"/>
+                    <a:pt x="660400" y="0"/>
+                  </a:cubicBezTo>
+                  <a:close/>
+                </a:path>
+              </a:pathLst>
+            </a:custGeom>
+            <a:grpFill/>
+            <a:ln>
+              <a:noFill/>
+            </a:ln>
+            <a:effectLst>
+              <a:outerShdw blurRad="152400" dist="317500" dir="5400000" sx="90000" sy="-19000" rotWithShape="0">
+                <a:prstClr val="black">
+                  <a:alpha val="15000"/>
+                </a:prstClr>
+              </a:outerShdw>
+            </a:effectLst>
+            <a:scene3d>
+              <a:camera prst="orthographicFront">
+                <a:rot lat="0" lon="0" rev="0"/>
+              </a:camera>
+              <a:lightRig rig="glow" dir="t">
+                <a:rot lat="0" lon="0" rev="4800000"/>
+              </a:lightRig>
+            </a:scene3d>
+            <a:sp3d prstMaterial="matte">
+              <a:bevelT w="127000" h="63500"/>
+            </a:sp3d>
+          </p:spPr>
+          <p:style>
+            <a:lnRef idx="2">
+              <a:schemeClr val="accent1">
+                <a:shade val="50000"/>
+              </a:schemeClr>
+            </a:lnRef>
+            <a:fillRef idx="1">
+              <a:schemeClr val="accent1"/>
+            </a:fillRef>
+            <a:effectRef idx="0">
+              <a:schemeClr val="accent1"/>
+            </a:effectRef>
+            <a:fontRef idx="minor">
+              <a:schemeClr val="lt1"/>
+            </a:fontRef>
+          </p:style>
+          <p:txBody>
+            <a:bodyPr rtlCol="0" anchor="ctr"/>
+            <a:lstStyle/>
+            <a:p>
+              <a:pPr algn="ctr"/>
+              <a:endParaRPr lang="en-IN"/>
+            </a:p>
+          </p:txBody>
+        </p:sp>
+        <p:sp>
+          <p:nvSpPr>
+            <p:cNvPr id="10" name="Freeform 9"/>
+            <p:cNvSpPr/>
+            <p:nvPr/>
+          </p:nvSpPr>
+          <p:spPr>
+            <a:xfrm>
+              <a:off x="8109856" y="2658155"/>
+              <a:ext cx="1016000" cy="2233613"/>
+            </a:xfrm>
+            <a:custGeom>
+              <a:avLst/>
+              <a:gdLst>
+                <a:gd name="connsiteX0" fmla="*/ 660400 w 1320800"/>
+                <a:gd name="connsiteY0" fmla="*/ 0 h 3175000"/>
+                <a:gd name="connsiteX1" fmla="*/ 1320800 w 1320800"/>
+                <a:gd name="connsiteY1" fmla="*/ 660400 h 3175000"/>
+                <a:gd name="connsiteX2" fmla="*/ 1314060 w 1320800"/>
+                <a:gd name="connsiteY2" fmla="*/ 727266 h 3175000"/>
+                <a:gd name="connsiteX3" fmla="*/ 1316328 w 1320800"/>
+                <a:gd name="connsiteY3" fmla="*/ 734573 h 3175000"/>
+                <a:gd name="connsiteX4" fmla="*/ 1320800 w 1320800"/>
+                <a:gd name="connsiteY4" fmla="*/ 778938 h 3175000"/>
+                <a:gd name="connsiteX5" fmla="*/ 1320800 w 1320800"/>
+                <a:gd name="connsiteY5" fmla="*/ 2954862 h 3175000"/>
+                <a:gd name="connsiteX6" fmla="*/ 1100662 w 1320800"/>
+                <a:gd name="connsiteY6" fmla="*/ 3175000 h 3175000"/>
+                <a:gd name="connsiteX7" fmla="*/ 220138 w 1320800"/>
+                <a:gd name="connsiteY7" fmla="*/ 3175000 h 3175000"/>
+                <a:gd name="connsiteX8" fmla="*/ 0 w 1320800"/>
+                <a:gd name="connsiteY8" fmla="*/ 2954862 h 3175000"/>
+                <a:gd name="connsiteX9" fmla="*/ 0 w 1320800"/>
+                <a:gd name="connsiteY9" fmla="*/ 778938 h 3175000"/>
+                <a:gd name="connsiteX10" fmla="*/ 4473 w 1320800"/>
+                <a:gd name="connsiteY10" fmla="*/ 734573 h 3175000"/>
+                <a:gd name="connsiteX11" fmla="*/ 6741 w 1320800"/>
+                <a:gd name="connsiteY11" fmla="*/ 727266 h 3175000"/>
+                <a:gd name="connsiteX12" fmla="*/ 0 w 1320800"/>
+                <a:gd name="connsiteY12" fmla="*/ 660400 h 3175000"/>
+                <a:gd name="connsiteX13" fmla="*/ 660400 w 1320800"/>
+                <a:gd name="connsiteY13" fmla="*/ 0 h 3175000"/>
+              </a:gdLst>
+              <a:ahLst/>
+              <a:cxnLst>
+                <a:cxn ang="0">
+                  <a:pos x="connsiteX0" y="connsiteY0"/>
+                </a:cxn>
+                <a:cxn ang="0">
+                  <a:pos x="connsiteX1" y="connsiteY1"/>
+                </a:cxn>
+                <a:cxn ang="0">
+                  <a:pos x="connsiteX2" y="connsiteY2"/>
+                </a:cxn>
+                <a:cxn ang="0">
+                  <a:pos x="connsiteX3" y="connsiteY3"/>
+                </a:cxn>
+                <a:cxn ang="0">
+                  <a:pos x="connsiteX4" y="connsiteY4"/>
+                </a:cxn>
+                <a:cxn ang="0">
+                  <a:pos x="connsiteX5" y="connsiteY5"/>
+                </a:cxn>
+                <a:cxn ang="0">
+                  <a:pos x="connsiteX6" y="connsiteY6"/>
+                </a:cxn>
+                <a:cxn ang="0">
+                  <a:pos x="connsiteX7" y="connsiteY7"/>
+                </a:cxn>
+                <a:cxn ang="0">
+                  <a:pos x="connsiteX8" y="connsiteY8"/>
+                </a:cxn>
+                <a:cxn ang="0">
+                  <a:pos x="connsiteX9" y="connsiteY9"/>
+                </a:cxn>
+                <a:cxn ang="0">
+                  <a:pos x="connsiteX10" y="connsiteY10"/>
+                </a:cxn>
+                <a:cxn ang="0">
+                  <a:pos x="connsiteX11" y="connsiteY11"/>
+                </a:cxn>
+                <a:cxn ang="0">
+                  <a:pos x="connsiteX12" y="connsiteY12"/>
+                </a:cxn>
+                <a:cxn ang="0">
+                  <a:pos x="connsiteX13" y="connsiteY13"/>
+                </a:cxn>
+              </a:cxnLst>
+              <a:rect l="l" t="t" r="r" b="b"/>
+              <a:pathLst>
+                <a:path w="1320800" h="3175000">
+                  <a:moveTo>
+                    <a:pt x="660400" y="0"/>
+                  </a:moveTo>
+                  <a:cubicBezTo>
+                    <a:pt x="1025129" y="0"/>
+                    <a:pt x="1320800" y="295671"/>
+                    <a:pt x="1320800" y="660400"/>
+                  </a:cubicBezTo>
+                  <a:lnTo>
+                    <a:pt x="1314060" y="727266"/>
+                  </a:lnTo>
+                  <a:lnTo>
+                    <a:pt x="1316328" y="734573"/>
+                  </a:lnTo>
+                  <a:cubicBezTo>
+                    <a:pt x="1319260" y="748903"/>
+                    <a:pt x="1320800" y="763741"/>
+                    <a:pt x="1320800" y="778938"/>
+                  </a:cubicBezTo>
+                  <a:lnTo>
+                    <a:pt x="1320800" y="2954862"/>
+                  </a:lnTo>
+                  <a:cubicBezTo>
+                    <a:pt x="1320800" y="3076441"/>
+                    <a:pt x="1222241" y="3175000"/>
+                    <a:pt x="1100662" y="3175000"/>
+                  </a:cubicBezTo>
+                  <a:lnTo>
+                    <a:pt x="220138" y="3175000"/>
+                  </a:lnTo>
+                  <a:cubicBezTo>
+                    <a:pt x="98559" y="3175000"/>
+                    <a:pt x="0" y="3076441"/>
+                    <a:pt x="0" y="2954862"/>
+                  </a:cubicBezTo>
+                  <a:lnTo>
+                    <a:pt x="0" y="778938"/>
+                  </a:lnTo>
+                  <a:cubicBezTo>
+                    <a:pt x="0" y="763741"/>
+                    <a:pt x="1540" y="748903"/>
+                    <a:pt x="4473" y="734573"/>
+                  </a:cubicBezTo>
+                  <a:lnTo>
+                    <a:pt x="6741" y="727266"/>
+                  </a:lnTo>
+                  <a:lnTo>
+                    <a:pt x="0" y="660400"/>
+                  </a:lnTo>
+                  <a:cubicBezTo>
+                    <a:pt x="0" y="295671"/>
+                    <a:pt x="295671" y="0"/>
+                    <a:pt x="660400" y="0"/>
+                  </a:cubicBezTo>
+                  <a:close/>
+                </a:path>
+              </a:pathLst>
+            </a:custGeom>
+            <a:grpFill/>
+            <a:ln>
+              <a:noFill/>
+            </a:ln>
+            <a:effectLst>
+              <a:outerShdw blurRad="152400" dist="317500" dir="5400000" sx="90000" sy="-19000" rotWithShape="0">
+                <a:prstClr val="black">
+                  <a:alpha val="15000"/>
+                </a:prstClr>
+              </a:outerShdw>
+            </a:effectLst>
+            <a:scene3d>
+              <a:camera prst="orthographicFront">
+                <a:rot lat="0" lon="0" rev="0"/>
+              </a:camera>
+              <a:lightRig rig="glow" dir="t">
+                <a:rot lat="0" lon="0" rev="4800000"/>
+              </a:lightRig>
+            </a:scene3d>
+            <a:sp3d prstMaterial="matte">
+              <a:bevelT w="127000" h="63500"/>
+            </a:sp3d>
+          </p:spPr>
+          <p:style>
+            <a:lnRef idx="2">
+              <a:schemeClr val="accent1">
+                <a:shade val="50000"/>
+              </a:schemeClr>
+            </a:lnRef>
+            <a:fillRef idx="1">
+              <a:schemeClr val="accent1"/>
+            </a:fillRef>
+            <a:effectRef idx="0">
+              <a:schemeClr val="accent1"/>
+            </a:effectRef>
+            <a:fontRef idx="minor">
+              <a:schemeClr val="lt1"/>
+            </a:fontRef>
+          </p:style>
+          <p:txBody>
+            <a:bodyPr rtlCol="0" anchor="ctr"/>
+            <a:lstStyle/>
+            <a:p>
+              <a:pPr algn="ctr"/>
+              <a:endParaRPr lang="en-IN"/>
+            </a:p>
+          </p:txBody>
+        </p:sp>
+        <p:sp>
+          <p:nvSpPr>
+            <p:cNvPr id="9" name="Freeform 8"/>
+            <p:cNvSpPr/>
+            <p:nvPr/>
+          </p:nvSpPr>
+          <p:spPr>
+            <a:xfrm>
+              <a:off x="7322456" y="2415268"/>
+              <a:ext cx="1066800" cy="2670175"/>
+            </a:xfrm>
+            <a:custGeom>
+              <a:avLst/>
+              <a:gdLst>
+                <a:gd name="connsiteX0" fmla="*/ 660400 w 1320800"/>
+                <a:gd name="connsiteY0" fmla="*/ 0 h 3175000"/>
+                <a:gd name="connsiteX1" fmla="*/ 1320800 w 1320800"/>
+                <a:gd name="connsiteY1" fmla="*/ 660400 h 3175000"/>
+                <a:gd name="connsiteX2" fmla="*/ 1314060 w 1320800"/>
+                <a:gd name="connsiteY2" fmla="*/ 727266 h 3175000"/>
+                <a:gd name="connsiteX3" fmla="*/ 1316328 w 1320800"/>
+                <a:gd name="connsiteY3" fmla="*/ 734573 h 3175000"/>
+                <a:gd name="connsiteX4" fmla="*/ 1320800 w 1320800"/>
+                <a:gd name="connsiteY4" fmla="*/ 778938 h 3175000"/>
+                <a:gd name="connsiteX5" fmla="*/ 1320800 w 1320800"/>
+                <a:gd name="connsiteY5" fmla="*/ 2954862 h 3175000"/>
+                <a:gd name="connsiteX6" fmla="*/ 1100662 w 1320800"/>
+                <a:gd name="connsiteY6" fmla="*/ 3175000 h 3175000"/>
+                <a:gd name="connsiteX7" fmla="*/ 220138 w 1320800"/>
+                <a:gd name="connsiteY7" fmla="*/ 3175000 h 3175000"/>
+                <a:gd name="connsiteX8" fmla="*/ 0 w 1320800"/>
+                <a:gd name="connsiteY8" fmla="*/ 2954862 h 3175000"/>
+                <a:gd name="connsiteX9" fmla="*/ 0 w 1320800"/>
+                <a:gd name="connsiteY9" fmla="*/ 778938 h 3175000"/>
+                <a:gd name="connsiteX10" fmla="*/ 4473 w 1320800"/>
+                <a:gd name="connsiteY10" fmla="*/ 734573 h 3175000"/>
+                <a:gd name="connsiteX11" fmla="*/ 6741 w 1320800"/>
+                <a:gd name="connsiteY11" fmla="*/ 727266 h 3175000"/>
+                <a:gd name="connsiteX12" fmla="*/ 0 w 1320800"/>
+                <a:gd name="connsiteY12" fmla="*/ 660400 h 3175000"/>
+                <a:gd name="connsiteX13" fmla="*/ 660400 w 1320800"/>
+                <a:gd name="connsiteY13" fmla="*/ 0 h 3175000"/>
+              </a:gdLst>
+              <a:ahLst/>
+              <a:cxnLst>
+                <a:cxn ang="0">
+                  <a:pos x="connsiteX0" y="connsiteY0"/>
+                </a:cxn>
+                <a:cxn ang="0">
+                  <a:pos x="connsiteX1" y="connsiteY1"/>
+                </a:cxn>
+                <a:cxn ang="0">
+                  <a:pos x="connsiteX2" y="connsiteY2"/>
+                </a:cxn>
+                <a:cxn ang="0">
+                  <a:pos x="connsiteX3" y="connsiteY3"/>
+                </a:cxn>
+                <a:cxn ang="0">
+                  <a:pos x="connsiteX4" y="connsiteY4"/>
+                </a:cxn>
+                <a:cxn ang="0">
+                  <a:pos x="connsiteX5" y="connsiteY5"/>
+                </a:cxn>
+                <a:cxn ang="0">
+                  <a:pos x="connsiteX6" y="connsiteY6"/>
+                </a:cxn>
+                <a:cxn ang="0">
+                  <a:pos x="connsiteX7" y="connsiteY7"/>
+                </a:cxn>
+                <a:cxn ang="0">
+                  <a:pos x="connsiteX8" y="connsiteY8"/>
+                </a:cxn>
+                <a:cxn ang="0">
+                  <a:pos x="connsiteX9" y="connsiteY9"/>
+                </a:cxn>
+                <a:cxn ang="0">
+                  <a:pos x="connsiteX10" y="connsiteY10"/>
+                </a:cxn>
+                <a:cxn ang="0">
+                  <a:pos x="connsiteX11" y="connsiteY11"/>
+                </a:cxn>
+                <a:cxn ang="0">
+                  <a:pos x="connsiteX12" y="connsiteY12"/>
+                </a:cxn>
+                <a:cxn ang="0">
+                  <a:pos x="connsiteX13" y="connsiteY13"/>
+                </a:cxn>
+              </a:cxnLst>
+              <a:rect l="l" t="t" r="r" b="b"/>
+              <a:pathLst>
+                <a:path w="1320800" h="3175000">
+                  <a:moveTo>
+                    <a:pt x="660400" y="0"/>
+                  </a:moveTo>
+                  <a:cubicBezTo>
+                    <a:pt x="1025129" y="0"/>
+                    <a:pt x="1320800" y="295671"/>
+                    <a:pt x="1320800" y="660400"/>
+                  </a:cubicBezTo>
+                  <a:lnTo>
+                    <a:pt x="1314060" y="727266"/>
+                  </a:lnTo>
+                  <a:lnTo>
+                    <a:pt x="1316328" y="734573"/>
+                  </a:lnTo>
+                  <a:cubicBezTo>
+                    <a:pt x="1319260" y="748903"/>
+                    <a:pt x="1320800" y="763741"/>
+                    <a:pt x="1320800" y="778938"/>
+                  </a:cubicBezTo>
+                  <a:lnTo>
+                    <a:pt x="1320800" y="2954862"/>
+                  </a:lnTo>
+                  <a:cubicBezTo>
+                    <a:pt x="1320800" y="3076441"/>
+                    <a:pt x="1222241" y="3175000"/>
+                    <a:pt x="1100662" y="3175000"/>
+                  </a:cubicBezTo>
+                  <a:lnTo>
+                    <a:pt x="220138" y="3175000"/>
+                  </a:lnTo>
+                  <a:cubicBezTo>
+                    <a:pt x="98559" y="3175000"/>
+                    <a:pt x="0" y="3076441"/>
+                    <a:pt x="0" y="2954862"/>
+                  </a:cubicBezTo>
+                  <a:lnTo>
+                    <a:pt x="0" y="778938"/>
+                  </a:lnTo>
+                  <a:cubicBezTo>
+                    <a:pt x="0" y="763741"/>
+                    <a:pt x="1540" y="748903"/>
+                    <a:pt x="4473" y="734573"/>
+                  </a:cubicBezTo>
+                  <a:lnTo>
+                    <a:pt x="6741" y="727266"/>
+                  </a:lnTo>
+                  <a:lnTo>
+                    <a:pt x="0" y="660400"/>
+                  </a:lnTo>
+                  <a:cubicBezTo>
+                    <a:pt x="0" y="295671"/>
+                    <a:pt x="295671" y="0"/>
+                    <a:pt x="660400" y="0"/>
+                  </a:cubicBezTo>
+                  <a:close/>
+                </a:path>
+              </a:pathLst>
+            </a:custGeom>
+            <a:grpFill/>
+            <a:ln>
+              <a:noFill/>
+            </a:ln>
+            <a:effectLst>
+              <a:outerShdw blurRad="152400" dist="317500" dir="5400000" sx="90000" sy="-19000" rotWithShape="0">
+                <a:prstClr val="black">
+                  <a:alpha val="15000"/>
+                </a:prstClr>
+              </a:outerShdw>
+            </a:effectLst>
+            <a:scene3d>
+              <a:camera prst="orthographicFront">
+                <a:rot lat="0" lon="0" rev="0"/>
+              </a:camera>
+              <a:lightRig rig="glow" dir="t">
+                <a:rot lat="0" lon="0" rev="4800000"/>
+              </a:lightRig>
+            </a:scene3d>
+            <a:sp3d prstMaterial="matte">
+              <a:bevelT w="127000" h="63500"/>
+            </a:sp3d>
+          </p:spPr>
+          <p:style>
+            <a:lnRef idx="2">
+              <a:schemeClr val="accent1">
+                <a:shade val="50000"/>
+              </a:schemeClr>
+            </a:lnRef>
+            <a:fillRef idx="1">
+              <a:schemeClr val="accent1"/>
+            </a:fillRef>
+            <a:effectRef idx="0">
+              <a:schemeClr val="accent1"/>
+            </a:effectRef>
+            <a:fontRef idx="minor">
+              <a:schemeClr val="lt1"/>
+            </a:fontRef>
+          </p:style>
+          <p:txBody>
+            <a:bodyPr rtlCol="0" anchor="ctr"/>
+            <a:lstStyle/>
+            <a:p>
+              <a:pPr algn="ctr"/>
+              <a:endParaRPr lang="en-IN"/>
+            </a:p>
+          </p:txBody>
+        </p:sp>
+        <p:sp>
+          <p:nvSpPr>
+            <p:cNvPr id="8" name="Freeform 7"/>
+            <p:cNvSpPr/>
+            <p:nvPr/>
+          </p:nvSpPr>
+          <p:spPr>
+            <a:xfrm>
+              <a:off x="6395356" y="2208893"/>
+              <a:ext cx="1219200" cy="2984500"/>
+            </a:xfrm>
+            <a:custGeom>
+              <a:avLst/>
+              <a:gdLst>
+                <a:gd name="connsiteX0" fmla="*/ 660400 w 1320800"/>
+                <a:gd name="connsiteY0" fmla="*/ 0 h 3175000"/>
+                <a:gd name="connsiteX1" fmla="*/ 1320800 w 1320800"/>
+                <a:gd name="connsiteY1" fmla="*/ 660400 h 3175000"/>
+                <a:gd name="connsiteX2" fmla="*/ 1314060 w 1320800"/>
+                <a:gd name="connsiteY2" fmla="*/ 727266 h 3175000"/>
+                <a:gd name="connsiteX3" fmla="*/ 1316328 w 1320800"/>
+                <a:gd name="connsiteY3" fmla="*/ 734573 h 3175000"/>
+                <a:gd name="connsiteX4" fmla="*/ 1320800 w 1320800"/>
+                <a:gd name="connsiteY4" fmla="*/ 778938 h 3175000"/>
+                <a:gd name="connsiteX5" fmla="*/ 1320800 w 1320800"/>
+                <a:gd name="connsiteY5" fmla="*/ 2954862 h 3175000"/>
+                <a:gd name="connsiteX6" fmla="*/ 1100662 w 1320800"/>
+                <a:gd name="connsiteY6" fmla="*/ 3175000 h 3175000"/>
+                <a:gd name="connsiteX7" fmla="*/ 220138 w 1320800"/>
+                <a:gd name="connsiteY7" fmla="*/ 3175000 h 3175000"/>
+                <a:gd name="connsiteX8" fmla="*/ 0 w 1320800"/>
+                <a:gd name="connsiteY8" fmla="*/ 2954862 h 3175000"/>
+                <a:gd name="connsiteX9" fmla="*/ 0 w 1320800"/>
+                <a:gd name="connsiteY9" fmla="*/ 778938 h 3175000"/>
+                <a:gd name="connsiteX10" fmla="*/ 4473 w 1320800"/>
+                <a:gd name="connsiteY10" fmla="*/ 734573 h 3175000"/>
+                <a:gd name="connsiteX11" fmla="*/ 6741 w 1320800"/>
+                <a:gd name="connsiteY11" fmla="*/ 727266 h 3175000"/>
+                <a:gd name="connsiteX12" fmla="*/ 0 w 1320800"/>
+                <a:gd name="connsiteY12" fmla="*/ 660400 h 3175000"/>
+                <a:gd name="connsiteX13" fmla="*/ 660400 w 1320800"/>
+                <a:gd name="connsiteY13" fmla="*/ 0 h 3175000"/>
+              </a:gdLst>
+              <a:ahLst/>
+              <a:cxnLst>
+                <a:cxn ang="0">
+                  <a:pos x="connsiteX0" y="connsiteY0"/>
+                </a:cxn>
+                <a:cxn ang="0">
+                  <a:pos x="connsiteX1" y="connsiteY1"/>
+                </a:cxn>
+                <a:cxn ang="0">
+                  <a:pos x="connsiteX2" y="connsiteY2"/>
+                </a:cxn>
+                <a:cxn ang="0">
+                  <a:pos x="connsiteX3" y="connsiteY3"/>
+                </a:cxn>
+                <a:cxn ang="0">
+                  <a:pos x="connsiteX4" y="connsiteY4"/>
+                </a:cxn>
+                <a:cxn ang="0">
+                  <a:pos x="connsiteX5" y="connsiteY5"/>
+                </a:cxn>
+                <a:cxn ang="0">
+                  <a:pos x="connsiteX6" y="connsiteY6"/>
+                </a:cxn>
+                <a:cxn ang="0">
+                  <a:pos x="connsiteX7" y="connsiteY7"/>
+                </a:cxn>
+                <a:cxn ang="0">
+                  <a:pos x="connsiteX8" y="connsiteY8"/>
+                </a:cxn>
+                <a:cxn ang="0">
+                  <a:pos x="connsiteX9" y="connsiteY9"/>
+                </a:cxn>
+                <a:cxn ang="0">
+                  <a:pos x="connsiteX10" y="connsiteY10"/>
+                </a:cxn>
+                <a:cxn ang="0">
+                  <a:pos x="connsiteX11" y="connsiteY11"/>
+                </a:cxn>
+                <a:cxn ang="0">
+                  <a:pos x="connsiteX12" y="connsiteY12"/>
+                </a:cxn>
+                <a:cxn ang="0">
+                  <a:pos x="connsiteX13" y="connsiteY13"/>
+                </a:cxn>
+              </a:cxnLst>
+              <a:rect l="l" t="t" r="r" b="b"/>
+              <a:pathLst>
+                <a:path w="1320800" h="3175000">
+                  <a:moveTo>
+                    <a:pt x="660400" y="0"/>
+                  </a:moveTo>
+                  <a:cubicBezTo>
+                    <a:pt x="1025129" y="0"/>
+                    <a:pt x="1320800" y="295671"/>
+                    <a:pt x="1320800" y="660400"/>
+                  </a:cubicBezTo>
+                  <a:lnTo>
+                    <a:pt x="1314060" y="727266"/>
+                  </a:lnTo>
+                  <a:lnTo>
+                    <a:pt x="1316328" y="734573"/>
+                  </a:lnTo>
+                  <a:cubicBezTo>
+                    <a:pt x="1319260" y="748903"/>
+                    <a:pt x="1320800" y="763741"/>
+                    <a:pt x="1320800" y="778938"/>
+                  </a:cubicBezTo>
+                  <a:lnTo>
+                    <a:pt x="1320800" y="2954862"/>
+                  </a:lnTo>
+                  <a:cubicBezTo>
+                    <a:pt x="1320800" y="3076441"/>
+                    <a:pt x="1222241" y="3175000"/>
+                    <a:pt x="1100662" y="3175000"/>
+                  </a:cubicBezTo>
+                  <a:lnTo>
+                    <a:pt x="220138" y="3175000"/>
+                  </a:lnTo>
+                  <a:cubicBezTo>
+                    <a:pt x="98559" y="3175000"/>
+                    <a:pt x="0" y="3076441"/>
+                    <a:pt x="0" y="2954862"/>
+                  </a:cubicBezTo>
+                  <a:lnTo>
+                    <a:pt x="0" y="778938"/>
+                  </a:lnTo>
+                  <a:cubicBezTo>
+                    <a:pt x="0" y="763741"/>
+                    <a:pt x="1540" y="748903"/>
+                    <a:pt x="4473" y="734573"/>
+                  </a:cubicBezTo>
+                  <a:lnTo>
+                    <a:pt x="6741" y="727266"/>
+                  </a:lnTo>
+                  <a:lnTo>
+                    <a:pt x="0" y="660400"/>
+                  </a:lnTo>
+                  <a:cubicBezTo>
+                    <a:pt x="0" y="295671"/>
+                    <a:pt x="295671" y="0"/>
+                    <a:pt x="660400" y="0"/>
+                  </a:cubicBezTo>
+                  <a:close/>
+                </a:path>
+              </a:pathLst>
+            </a:custGeom>
+            <a:grpFill/>
+            <a:ln>
+              <a:noFill/>
+            </a:ln>
+            <a:effectLst>
+              <a:outerShdw blurRad="152400" dist="317500" dir="5400000" sx="90000" sy="-19000" rotWithShape="0">
+                <a:prstClr val="black">
+                  <a:alpha val="15000"/>
+                </a:prstClr>
+              </a:outerShdw>
+            </a:effectLst>
+            <a:scene3d>
+              <a:camera prst="orthographicFront">
+                <a:rot lat="0" lon="0" rev="0"/>
+              </a:camera>
+              <a:lightRig rig="glow" dir="t">
+                <a:rot lat="0" lon="0" rev="4800000"/>
+              </a:lightRig>
+            </a:scene3d>
+            <a:sp3d prstMaterial="matte">
+              <a:bevelT w="127000" h="63500"/>
+            </a:sp3d>
+          </p:spPr>
+          <p:style>
+            <a:lnRef idx="2">
+              <a:schemeClr val="accent1">
+                <a:shade val="50000"/>
+              </a:schemeClr>
+            </a:lnRef>
+            <a:fillRef idx="1">
+              <a:schemeClr val="accent1"/>
+            </a:fillRef>
+            <a:effectRef idx="0">
+              <a:schemeClr val="accent1"/>
+            </a:effectRef>
+            <a:fontRef idx="minor">
+              <a:schemeClr val="lt1"/>
+            </a:fontRef>
+          </p:style>
+          <p:txBody>
+            <a:bodyPr rtlCol="0" anchor="ctr"/>
+            <a:lstStyle/>
+            <a:p>
+              <a:pPr algn="ctr"/>
+              <a:endParaRPr lang="en-IN"/>
+            </a:p>
+          </p:txBody>
+        </p:sp>
+        <p:sp>
+          <p:nvSpPr>
+            <p:cNvPr id="6" name="Freeform 5"/>
+            <p:cNvSpPr/>
+            <p:nvPr/>
+          </p:nvSpPr>
+          <p:spPr>
+            <a:xfrm>
+              <a:off x="5417456" y="2050143"/>
+              <a:ext cx="1409700" cy="3302000"/>
+            </a:xfrm>
+            <a:custGeom>
+              <a:avLst/>
+              <a:gdLst>
+                <a:gd name="connsiteX0" fmla="*/ 660400 w 1320800"/>
+                <a:gd name="connsiteY0" fmla="*/ 0 h 3175000"/>
+                <a:gd name="connsiteX1" fmla="*/ 1320800 w 1320800"/>
+                <a:gd name="connsiteY1" fmla="*/ 660400 h 3175000"/>
+                <a:gd name="connsiteX2" fmla="*/ 1314060 w 1320800"/>
+                <a:gd name="connsiteY2" fmla="*/ 727266 h 3175000"/>
+                <a:gd name="connsiteX3" fmla="*/ 1316328 w 1320800"/>
+                <a:gd name="connsiteY3" fmla="*/ 734573 h 3175000"/>
+                <a:gd name="connsiteX4" fmla="*/ 1320800 w 1320800"/>
+                <a:gd name="connsiteY4" fmla="*/ 778938 h 3175000"/>
+                <a:gd name="connsiteX5" fmla="*/ 1320800 w 1320800"/>
+                <a:gd name="connsiteY5" fmla="*/ 2954862 h 3175000"/>
+                <a:gd name="connsiteX6" fmla="*/ 1100662 w 1320800"/>
+                <a:gd name="connsiteY6" fmla="*/ 3175000 h 3175000"/>
+                <a:gd name="connsiteX7" fmla="*/ 220138 w 1320800"/>
+                <a:gd name="connsiteY7" fmla="*/ 3175000 h 3175000"/>
+                <a:gd name="connsiteX8" fmla="*/ 0 w 1320800"/>
+                <a:gd name="connsiteY8" fmla="*/ 2954862 h 3175000"/>
+                <a:gd name="connsiteX9" fmla="*/ 0 w 1320800"/>
+                <a:gd name="connsiteY9" fmla="*/ 778938 h 3175000"/>
+                <a:gd name="connsiteX10" fmla="*/ 4473 w 1320800"/>
+                <a:gd name="connsiteY10" fmla="*/ 734573 h 3175000"/>
+                <a:gd name="connsiteX11" fmla="*/ 6741 w 1320800"/>
+                <a:gd name="connsiteY11" fmla="*/ 727266 h 3175000"/>
+                <a:gd name="connsiteX12" fmla="*/ 0 w 1320800"/>
+                <a:gd name="connsiteY12" fmla="*/ 660400 h 3175000"/>
+                <a:gd name="connsiteX13" fmla="*/ 660400 w 1320800"/>
+                <a:gd name="connsiteY13" fmla="*/ 0 h 3175000"/>
+              </a:gdLst>
+              <a:ahLst/>
+              <a:cxnLst>
+                <a:cxn ang="0">
+                  <a:pos x="connsiteX0" y="connsiteY0"/>
+                </a:cxn>
+                <a:cxn ang="0">
+                  <a:pos x="connsiteX1" y="connsiteY1"/>
+                </a:cxn>
+                <a:cxn ang="0">
+                  <a:pos x="connsiteX2" y="connsiteY2"/>
+                </a:cxn>
+                <a:cxn ang="0">
+                  <a:pos x="connsiteX3" y="connsiteY3"/>
+                </a:cxn>
+                <a:cxn ang="0">
+                  <a:pos x="connsiteX4" y="connsiteY4"/>
+                </a:cxn>
+                <a:cxn ang="0">
+                  <a:pos x="connsiteX5" y="connsiteY5"/>
+                </a:cxn>
+                <a:cxn ang="0">
+                  <a:pos x="connsiteX6" y="connsiteY6"/>
+                </a:cxn>
+                <a:cxn ang="0">
+                  <a:pos x="connsiteX7" y="connsiteY7"/>
+                </a:cxn>
+                <a:cxn ang="0">
+                  <a:pos x="connsiteX8" y="connsiteY8"/>
+                </a:cxn>
+                <a:cxn ang="0">
+                  <a:pos x="connsiteX9" y="connsiteY9"/>
+                </a:cxn>
+                <a:cxn ang="0">
+                  <a:pos x="connsiteX10" y="connsiteY10"/>
+                </a:cxn>
+                <a:cxn ang="0">
+                  <a:pos x="connsiteX11" y="connsiteY11"/>
+                </a:cxn>
+                <a:cxn ang="0">
+                  <a:pos x="connsiteX12" y="connsiteY12"/>
+                </a:cxn>
+                <a:cxn ang="0">
+                  <a:pos x="connsiteX13" y="connsiteY13"/>
+                </a:cxn>
+              </a:cxnLst>
+              <a:rect l="l" t="t" r="r" b="b"/>
+              <a:pathLst>
+                <a:path w="1320800" h="3175000">
+                  <a:moveTo>
+                    <a:pt x="660400" y="0"/>
+                  </a:moveTo>
+                  <a:cubicBezTo>
+                    <a:pt x="1025129" y="0"/>
+                    <a:pt x="1320800" y="295671"/>
+                    <a:pt x="1320800" y="660400"/>
+                  </a:cubicBezTo>
+                  <a:lnTo>
+                    <a:pt x="1314060" y="727266"/>
+                  </a:lnTo>
+                  <a:lnTo>
+                    <a:pt x="1316328" y="734573"/>
+                  </a:lnTo>
+                  <a:cubicBezTo>
+                    <a:pt x="1319260" y="748903"/>
+                    <a:pt x="1320800" y="763741"/>
+                    <a:pt x="1320800" y="778938"/>
+                  </a:cubicBezTo>
+                  <a:lnTo>
+                    <a:pt x="1320800" y="2954862"/>
+                  </a:lnTo>
+                  <a:cubicBezTo>
+                    <a:pt x="1320800" y="3076441"/>
+                    <a:pt x="1222241" y="3175000"/>
+                    <a:pt x="1100662" y="3175000"/>
+                  </a:cubicBezTo>
+                  <a:lnTo>
+                    <a:pt x="220138" y="3175000"/>
+                  </a:lnTo>
+                  <a:cubicBezTo>
+                    <a:pt x="98559" y="3175000"/>
+                    <a:pt x="0" y="3076441"/>
+                    <a:pt x="0" y="2954862"/>
+                  </a:cubicBezTo>
+                  <a:lnTo>
+                    <a:pt x="0" y="778938"/>
+                  </a:lnTo>
+                  <a:cubicBezTo>
+                    <a:pt x="0" y="763741"/>
+                    <a:pt x="1540" y="748903"/>
+                    <a:pt x="4473" y="734573"/>
+                  </a:cubicBezTo>
+                  <a:lnTo>
+                    <a:pt x="6741" y="727266"/>
+                  </a:lnTo>
+                  <a:lnTo>
+                    <a:pt x="0" y="660400"/>
+                  </a:lnTo>
+                  <a:cubicBezTo>
+                    <a:pt x="0" y="295671"/>
+                    <a:pt x="295671" y="0"/>
+                    <a:pt x="660400" y="0"/>
+                  </a:cubicBezTo>
+                  <a:close/>
+                </a:path>
+              </a:pathLst>
+            </a:custGeom>
+            <a:grpFill/>
+            <a:ln>
+              <a:noFill/>
+            </a:ln>
+            <a:effectLst>
+              <a:outerShdw blurRad="152400" dist="317500" dir="5400000" sx="90000" sy="-19000" rotWithShape="0">
+                <a:prstClr val="black">
+                  <a:alpha val="15000"/>
+                </a:prstClr>
+              </a:outerShdw>
+            </a:effectLst>
+            <a:scene3d>
+              <a:camera prst="orthographicFront">
+                <a:rot lat="0" lon="0" rev="0"/>
+              </a:camera>
+              <a:lightRig rig="glow" dir="t">
+                <a:rot lat="0" lon="0" rev="4800000"/>
+              </a:lightRig>
+            </a:scene3d>
+            <a:sp3d prstMaterial="matte">
+              <a:bevelT w="127000" h="63500"/>
+            </a:sp3d>
+          </p:spPr>
+          <p:style>
+            <a:lnRef idx="2">
+              <a:schemeClr val="accent1">
+                <a:shade val="50000"/>
+              </a:schemeClr>
+            </a:lnRef>
+            <a:fillRef idx="1">
+              <a:schemeClr val="accent1"/>
+            </a:fillRef>
+            <a:effectRef idx="0">
+              <a:schemeClr val="accent1"/>
+            </a:effectRef>
+            <a:fontRef idx="minor">
+              <a:schemeClr val="lt1"/>
+            </a:fontRef>
+          </p:style>
+          <p:txBody>
+            <a:bodyPr rtlCol="0" anchor="ctr"/>
+            <a:lstStyle/>
+            <a:p>
+              <a:pPr algn="ctr"/>
+              <a:endParaRPr lang="en-IN"/>
+            </a:p>
+          </p:txBody>
+        </p:sp>
+        <p:grpSp>
+          <p:nvGrpSpPr>
+            <p:cNvPr id="22" name="Group 21"/>
+            <p:cNvGrpSpPr/>
+            <p:nvPr/>
+          </p:nvGrpSpPr>
+          <p:grpSpPr>
+            <a:xfrm>
+              <a:off x="7118718" y="3115737"/>
+              <a:ext cx="355868" cy="1969706"/>
+              <a:chOff x="9411776" y="2021680"/>
+              <a:chExt cx="799024" cy="2105820"/>
+            </a:xfrm>
+            <a:grpFill/>
+          </p:grpSpPr>
+          <p:sp>
+            <p:nvSpPr>
+              <p:cNvPr id="23" name="Freeform 22"/>
+              <p:cNvSpPr/>
+              <p:nvPr/>
+            </p:nvSpPr>
+            <p:spPr>
+              <a:xfrm>
+                <a:off x="9411776" y="2021680"/>
+                <a:ext cx="799024" cy="2093120"/>
+              </a:xfrm>
+              <a:custGeom>
+                <a:avLst/>
+                <a:gdLst>
+                  <a:gd name="connsiteX0" fmla="*/ 399512 w 799024"/>
+                  <a:gd name="connsiteY0" fmla="*/ 0 h 2093120"/>
+                  <a:gd name="connsiteX1" fmla="*/ 799024 w 799024"/>
+                  <a:gd name="connsiteY1" fmla="*/ 358927 h 2093120"/>
+                  <a:gd name="connsiteX2" fmla="*/ 794947 w 799024"/>
+                  <a:gd name="connsiteY2" fmla="*/ 395269 h 2093120"/>
+                  <a:gd name="connsiteX3" fmla="*/ 796319 w 799024"/>
+                  <a:gd name="connsiteY3" fmla="*/ 399240 h 2093120"/>
+                  <a:gd name="connsiteX4" fmla="*/ 799024 w 799024"/>
+                  <a:gd name="connsiteY4" fmla="*/ 423353 h 2093120"/>
+                  <a:gd name="connsiteX5" fmla="*/ 799024 w 799024"/>
+                  <a:gd name="connsiteY5" fmla="*/ 1605968 h 2093120"/>
+                  <a:gd name="connsiteX6" fmla="*/ 791359 w 799024"/>
+                  <a:gd name="connsiteY6" fmla="*/ 1640078 h 2093120"/>
+                  <a:gd name="connsiteX7" fmla="*/ 799024 w 799024"/>
+                  <a:gd name="connsiteY7" fmla="*/ 1712516 h 2093120"/>
+                  <a:gd name="connsiteX8" fmla="*/ 399512 w 799024"/>
+                  <a:gd name="connsiteY8" fmla="*/ 2093120 h 2093120"/>
+                  <a:gd name="connsiteX9" fmla="*/ 0 w 799024"/>
+                  <a:gd name="connsiteY9" fmla="*/ 1712516 h 2093120"/>
+                  <a:gd name="connsiteX10" fmla="*/ 7665 w 799024"/>
+                  <a:gd name="connsiteY10" fmla="*/ 1640078 h 2093120"/>
+                  <a:gd name="connsiteX11" fmla="*/ 0 w 799024"/>
+                  <a:gd name="connsiteY11" fmla="*/ 1605968 h 2093120"/>
+                  <a:gd name="connsiteX12" fmla="*/ 0 w 799024"/>
+                  <a:gd name="connsiteY12" fmla="*/ 423353 h 2093120"/>
+                  <a:gd name="connsiteX13" fmla="*/ 2706 w 799024"/>
+                  <a:gd name="connsiteY13" fmla="*/ 399240 h 2093120"/>
+                  <a:gd name="connsiteX14" fmla="*/ 4078 w 799024"/>
+                  <a:gd name="connsiteY14" fmla="*/ 395269 h 2093120"/>
+                  <a:gd name="connsiteX15" fmla="*/ 0 w 799024"/>
+                  <a:gd name="connsiteY15" fmla="*/ 358927 h 2093120"/>
+                  <a:gd name="connsiteX16" fmla="*/ 399512 w 799024"/>
+                  <a:gd name="connsiteY16" fmla="*/ 0 h 2093120"/>
+                </a:gdLst>
+                <a:ahLst/>
+                <a:cxnLst>
+                  <a:cxn ang="0">
+                    <a:pos x="connsiteX0" y="connsiteY0"/>
+                  </a:cxn>
+                  <a:cxn ang="0">
+                    <a:pos x="connsiteX1" y="connsiteY1"/>
+                  </a:cxn>
+                  <a:cxn ang="0">
+                    <a:pos x="connsiteX2" y="connsiteY2"/>
+                  </a:cxn>
+                  <a:cxn ang="0">
+                    <a:pos x="connsiteX3" y="connsiteY3"/>
+                  </a:cxn>
+                  <a:cxn ang="0">
+                    <a:pos x="connsiteX4" y="connsiteY4"/>
+                  </a:cxn>
+                  <a:cxn ang="0">
+                    <a:pos x="connsiteX5" y="connsiteY5"/>
+                  </a:cxn>
+                  <a:cxn ang="0">
+                    <a:pos x="connsiteX6" y="connsiteY6"/>
+                  </a:cxn>
+                  <a:cxn ang="0">
+                    <a:pos x="connsiteX7" y="connsiteY7"/>
+                  </a:cxn>
+                  <a:cxn ang="0">
+                    <a:pos x="connsiteX8" y="connsiteY8"/>
+                  </a:cxn>
+                  <a:cxn ang="0">
+                    <a:pos x="connsiteX9" y="connsiteY9"/>
+                  </a:cxn>
+                  <a:cxn ang="0">
+                    <a:pos x="connsiteX10" y="connsiteY10"/>
+                  </a:cxn>
+                  <a:cxn ang="0">
+                    <a:pos x="connsiteX11" y="connsiteY11"/>
+                  </a:cxn>
+                  <a:cxn ang="0">
+                    <a:pos x="connsiteX12" y="connsiteY12"/>
+                  </a:cxn>
+                  <a:cxn ang="0">
+                    <a:pos x="connsiteX13" y="connsiteY13"/>
+                  </a:cxn>
+                  <a:cxn ang="0">
+                    <a:pos x="connsiteX14" y="connsiteY14"/>
+                  </a:cxn>
+                  <a:cxn ang="0">
+                    <a:pos x="connsiteX15" y="connsiteY15"/>
+                  </a:cxn>
+                  <a:cxn ang="0">
+                    <a:pos x="connsiteX16" y="connsiteY16"/>
+                  </a:cxn>
+                </a:cxnLst>
+                <a:rect l="l" t="t" r="r" b="b"/>
+                <a:pathLst>
+                  <a:path w="799024" h="2093120">
+                    <a:moveTo>
+                      <a:pt x="399512" y="0"/>
+                    </a:moveTo>
+                    <a:cubicBezTo>
+                      <a:pt x="620156" y="0"/>
+                      <a:pt x="799024" y="160697"/>
+                      <a:pt x="799024" y="358927"/>
+                    </a:cubicBezTo>
+                    <a:lnTo>
+                      <a:pt x="794947" y="395269"/>
+                    </a:lnTo>
+                    <a:lnTo>
+                      <a:pt x="796319" y="399240"/>
+                    </a:lnTo>
+                    <a:cubicBezTo>
+                      <a:pt x="798092" y="407029"/>
+                      <a:pt x="799024" y="415093"/>
+                      <a:pt x="799024" y="423353"/>
+                    </a:cubicBezTo>
+                    <a:lnTo>
+                      <a:pt x="799024" y="1605968"/>
+                    </a:lnTo>
+                    <a:lnTo>
+                      <a:pt x="791359" y="1640078"/>
+                    </a:lnTo>
+                    <a:lnTo>
+                      <a:pt x="799024" y="1712516"/>
+                    </a:lnTo>
+                    <a:cubicBezTo>
+                      <a:pt x="799024" y="1922718"/>
+                      <a:pt x="620156" y="2093120"/>
+                      <a:pt x="399512" y="2093120"/>
+                    </a:cubicBezTo>
+                    <a:cubicBezTo>
+                      <a:pt x="178868" y="2093120"/>
+                      <a:pt x="0" y="1922718"/>
+                      <a:pt x="0" y="1712516"/>
+                    </a:cubicBezTo>
+                    <a:lnTo>
+                      <a:pt x="7665" y="1640078"/>
+                    </a:lnTo>
+                    <a:lnTo>
+                      <a:pt x="0" y="1605968"/>
+                    </a:lnTo>
+                    <a:lnTo>
+                      <a:pt x="0" y="423353"/>
+                    </a:lnTo>
+                    <a:cubicBezTo>
+                      <a:pt x="0" y="415093"/>
+                      <a:pt x="932" y="407029"/>
+                      <a:pt x="2706" y="399240"/>
+                    </a:cubicBezTo>
+                    <a:lnTo>
+                      <a:pt x="4078" y="395269"/>
+                    </a:lnTo>
+                    <a:lnTo>
+                      <a:pt x="0" y="358927"/>
+                    </a:lnTo>
+                    <a:cubicBezTo>
+                      <a:pt x="0" y="160697"/>
+                      <a:pt x="178868" y="0"/>
+                      <a:pt x="399512" y="0"/>
+                    </a:cubicBezTo>
+                    <a:close/>
+                  </a:path>
+                </a:pathLst>
+              </a:custGeom>
+              <a:grpFill/>
+              <a:ln>
+                <a:noFill/>
+              </a:ln>
+              <a:effectLst>
+                <a:outerShdw blurRad="190500" dist="228600" dir="2700000" algn="ctr">
+                  <a:srgbClr val="000000">
+                    <a:alpha val="30000"/>
+                  </a:srgbClr>
+                </a:outerShdw>
+              </a:effectLst>
+              <a:scene3d>
+                <a:camera prst="orthographicFront">
+                  <a:rot lat="0" lon="0" rev="0"/>
+                </a:camera>
+                <a:lightRig rig="glow" dir="t">
+                  <a:rot lat="0" lon="0" rev="4800000"/>
+                </a:lightRig>
+              </a:scene3d>
+              <a:sp3d prstMaterial="matte">
+                <a:bevelT w="127000" h="63500"/>
+              </a:sp3d>
+            </p:spPr>
+            <p:style>
+              <a:lnRef idx="2">
+                <a:schemeClr val="accent1">
+                  <a:shade val="50000"/>
+                </a:schemeClr>
+              </a:lnRef>
+              <a:fillRef idx="1">
+                <a:schemeClr val="accent1"/>
+              </a:fillRef>
+              <a:effectRef idx="0">
+                <a:schemeClr val="accent1"/>
+              </a:effectRef>
+              <a:fontRef idx="minor">
+                <a:schemeClr val="lt1"/>
+              </a:fontRef>
+            </p:style>
+            <p:txBody>
+              <a:bodyPr rtlCol="0" anchor="ctr"/>
+              <a:lstStyle/>
+              <a:p>
+                <a:pPr algn="ctr"/>
+                <a:endParaRPr lang="en-IN" dirty="0"/>
+              </a:p>
+            </p:txBody>
+          </p:sp>
+          <p:sp>
+            <p:nvSpPr>
+              <p:cNvPr id="24" name="Oval 23"/>
+              <p:cNvSpPr/>
+              <p:nvPr/>
+            </p:nvSpPr>
+            <p:spPr>
+              <a:xfrm>
+                <a:off x="9411776" y="3725695"/>
+                <a:ext cx="799024" cy="401805"/>
+              </a:xfrm>
+              <a:prstGeom prst="ellipse">
+                <a:avLst/>
+              </a:prstGeom>
+              <a:grpFill/>
+              <a:ln>
+                <a:noFill/>
+              </a:ln>
+              <a:effectLst>
+                <a:outerShdw blurRad="190500" dist="228600" dir="2700000" algn="ctr">
+                  <a:srgbClr val="000000">
+                    <a:alpha val="30000"/>
+                  </a:srgbClr>
+                </a:outerShdw>
+              </a:effectLst>
+              <a:scene3d>
+                <a:camera prst="orthographicFront">
+                  <a:rot lat="0" lon="0" rev="0"/>
+                </a:camera>
+                <a:lightRig rig="glow" dir="t">
+                  <a:rot lat="0" lon="0" rev="4800000"/>
+                </a:lightRig>
+              </a:scene3d>
+              <a:sp3d prstMaterial="matte">
+                <a:bevelT w="127000" h="63500"/>
+              </a:sp3d>
+            </p:spPr>
+            <p:style>
+              <a:lnRef idx="2">
+                <a:schemeClr val="accent1">
+                  <a:shade val="50000"/>
+                </a:schemeClr>
+              </a:lnRef>
+              <a:fillRef idx="1">
+                <a:schemeClr val="accent1"/>
+              </a:fillRef>
+              <a:effectRef idx="0">
+                <a:schemeClr val="accent1"/>
+              </a:effectRef>
+              <a:fontRef idx="minor">
+                <a:schemeClr val="lt1"/>
+              </a:fontRef>
+            </p:style>
+            <p:txBody>
+              <a:bodyPr rtlCol="0" anchor="ctr"/>
+              <a:lstStyle/>
+              <a:p>
+                <a:pPr algn="ctr"/>
+                <a:endParaRPr lang="en-IN"/>
+              </a:p>
+            </p:txBody>
+          </p:sp>
+        </p:grpSp>
+        <p:grpSp>
+          <p:nvGrpSpPr>
+            <p:cNvPr id="25" name="Group 24"/>
+            <p:cNvGrpSpPr/>
+            <p:nvPr/>
+          </p:nvGrpSpPr>
+          <p:grpSpPr>
+            <a:xfrm>
+              <a:off x="7918548" y="3243636"/>
+              <a:ext cx="317769" cy="1648132"/>
+              <a:chOff x="9411776" y="2021680"/>
+              <a:chExt cx="799024" cy="2105820"/>
+            </a:xfrm>
+            <a:grpFill/>
+          </p:grpSpPr>
+          <p:sp>
+            <p:nvSpPr>
+              <p:cNvPr id="26" name="Freeform 25"/>
+              <p:cNvSpPr/>
+              <p:nvPr/>
+            </p:nvSpPr>
+            <p:spPr>
+              <a:xfrm>
+                <a:off x="9411776" y="2021680"/>
+                <a:ext cx="799024" cy="2093120"/>
+              </a:xfrm>
+              <a:custGeom>
+                <a:avLst/>
+                <a:gdLst>
+                  <a:gd name="connsiteX0" fmla="*/ 399512 w 799024"/>
+                  <a:gd name="connsiteY0" fmla="*/ 0 h 2093120"/>
+                  <a:gd name="connsiteX1" fmla="*/ 799024 w 799024"/>
+                  <a:gd name="connsiteY1" fmla="*/ 358927 h 2093120"/>
+                  <a:gd name="connsiteX2" fmla="*/ 794947 w 799024"/>
+                  <a:gd name="connsiteY2" fmla="*/ 395269 h 2093120"/>
+                  <a:gd name="connsiteX3" fmla="*/ 796319 w 799024"/>
+                  <a:gd name="connsiteY3" fmla="*/ 399240 h 2093120"/>
+                  <a:gd name="connsiteX4" fmla="*/ 799024 w 799024"/>
+                  <a:gd name="connsiteY4" fmla="*/ 423353 h 2093120"/>
+                  <a:gd name="connsiteX5" fmla="*/ 799024 w 799024"/>
+                  <a:gd name="connsiteY5" fmla="*/ 1605968 h 2093120"/>
+                  <a:gd name="connsiteX6" fmla="*/ 791359 w 799024"/>
+                  <a:gd name="connsiteY6" fmla="*/ 1640078 h 2093120"/>
+                  <a:gd name="connsiteX7" fmla="*/ 799024 w 799024"/>
+                  <a:gd name="connsiteY7" fmla="*/ 1712516 h 2093120"/>
+                  <a:gd name="connsiteX8" fmla="*/ 399512 w 799024"/>
+                  <a:gd name="connsiteY8" fmla="*/ 2093120 h 2093120"/>
+                  <a:gd name="connsiteX9" fmla="*/ 0 w 799024"/>
+                  <a:gd name="connsiteY9" fmla="*/ 1712516 h 2093120"/>
+                  <a:gd name="connsiteX10" fmla="*/ 7665 w 799024"/>
+                  <a:gd name="connsiteY10" fmla="*/ 1640078 h 2093120"/>
+                  <a:gd name="connsiteX11" fmla="*/ 0 w 799024"/>
+                  <a:gd name="connsiteY11" fmla="*/ 1605968 h 2093120"/>
+                  <a:gd name="connsiteX12" fmla="*/ 0 w 799024"/>
+                  <a:gd name="connsiteY12" fmla="*/ 423353 h 2093120"/>
+                  <a:gd name="connsiteX13" fmla="*/ 2706 w 799024"/>
+                  <a:gd name="connsiteY13" fmla="*/ 399240 h 2093120"/>
+                  <a:gd name="connsiteX14" fmla="*/ 4078 w 799024"/>
+                  <a:gd name="connsiteY14" fmla="*/ 395269 h 2093120"/>
+                  <a:gd name="connsiteX15" fmla="*/ 0 w 799024"/>
+                  <a:gd name="connsiteY15" fmla="*/ 358927 h 2093120"/>
+                  <a:gd name="connsiteX16" fmla="*/ 399512 w 799024"/>
+                  <a:gd name="connsiteY16" fmla="*/ 0 h 2093120"/>
+                </a:gdLst>
+                <a:ahLst/>
+                <a:cxnLst>
+                  <a:cxn ang="0">
+                    <a:pos x="connsiteX0" y="connsiteY0"/>
+                  </a:cxn>
+                  <a:cxn ang="0">
+                    <a:pos x="connsiteX1" y="connsiteY1"/>
+                  </a:cxn>
+                  <a:cxn ang="0">
+                    <a:pos x="connsiteX2" y="connsiteY2"/>
+                  </a:cxn>
+                  <a:cxn ang="0">
+                    <a:pos x="connsiteX3" y="connsiteY3"/>
+                  </a:cxn>
+                  <a:cxn ang="0">
+                    <a:pos x="connsiteX4" y="connsiteY4"/>
+                  </a:cxn>
+                  <a:cxn ang="0">
+                    <a:pos x="connsiteX5" y="connsiteY5"/>
+                  </a:cxn>
+                  <a:cxn ang="0">
+                    <a:pos x="connsiteX6" y="connsiteY6"/>
+                  </a:cxn>
+                  <a:cxn ang="0">
+                    <a:pos x="connsiteX7" y="connsiteY7"/>
+                  </a:cxn>
+                  <a:cxn ang="0">
+                    <a:pos x="connsiteX8" y="connsiteY8"/>
+                  </a:cxn>
+                  <a:cxn ang="0">
+                    <a:pos x="connsiteX9" y="connsiteY9"/>
+                  </a:cxn>
+                  <a:cxn ang="0">
+                    <a:pos x="connsiteX10" y="connsiteY10"/>
+                  </a:cxn>
+                  <a:cxn ang="0">
+                    <a:pos x="connsiteX11" y="connsiteY11"/>
+                  </a:cxn>
+                  <a:cxn ang="0">
+                    <a:pos x="connsiteX12" y="connsiteY12"/>
+                  </a:cxn>
+                  <a:cxn ang="0">
+                    <a:pos x="connsiteX13" y="connsiteY13"/>
+                  </a:cxn>
+                  <a:cxn ang="0">
+                    <a:pos x="connsiteX14" y="connsiteY14"/>
+                  </a:cxn>
+                  <a:cxn ang="0">
+                    <a:pos x="connsiteX15" y="connsiteY15"/>
+                  </a:cxn>
+                  <a:cxn ang="0">
+                    <a:pos x="connsiteX16" y="connsiteY16"/>
+                  </a:cxn>
+                </a:cxnLst>
+                <a:rect l="l" t="t" r="r" b="b"/>
+                <a:pathLst>
+                  <a:path w="799024" h="2093120">
+                    <a:moveTo>
+                      <a:pt x="399512" y="0"/>
+                    </a:moveTo>
+                    <a:cubicBezTo>
+                      <a:pt x="620156" y="0"/>
+                      <a:pt x="799024" y="160697"/>
+                      <a:pt x="799024" y="358927"/>
+                    </a:cubicBezTo>
+                    <a:lnTo>
+                      <a:pt x="794947" y="395269"/>
+                    </a:lnTo>
+                    <a:lnTo>
+                      <a:pt x="796319" y="399240"/>
+                    </a:lnTo>
+                    <a:cubicBezTo>
+                      <a:pt x="798092" y="407029"/>
+                      <a:pt x="799024" y="415093"/>
+                      <a:pt x="799024" y="423353"/>
+                    </a:cubicBezTo>
+                    <a:lnTo>
+                      <a:pt x="799024" y="1605968"/>
+                    </a:lnTo>
+                    <a:lnTo>
+                      <a:pt x="791359" y="1640078"/>
+                    </a:lnTo>
+                    <a:lnTo>
+                      <a:pt x="799024" y="1712516"/>
+                    </a:lnTo>
+                    <a:cubicBezTo>
+                      <a:pt x="799024" y="1922718"/>
+                      <a:pt x="620156" y="2093120"/>
+                      <a:pt x="399512" y="2093120"/>
+                    </a:cubicBezTo>
+                    <a:cubicBezTo>
+                      <a:pt x="178868" y="2093120"/>
+                      <a:pt x="0" y="1922718"/>
+                      <a:pt x="0" y="1712516"/>
+                    </a:cubicBezTo>
+                    <a:lnTo>
+                      <a:pt x="7665" y="1640078"/>
+                    </a:lnTo>
+                    <a:lnTo>
+                      <a:pt x="0" y="1605968"/>
+                    </a:lnTo>
+                    <a:lnTo>
+                      <a:pt x="0" y="423353"/>
+                    </a:lnTo>
+                    <a:cubicBezTo>
+                      <a:pt x="0" y="415093"/>
+                      <a:pt x="932" y="407029"/>
+                      <a:pt x="2706" y="399240"/>
+                    </a:cubicBezTo>
+                    <a:lnTo>
+                      <a:pt x="4078" y="395269"/>
+                    </a:lnTo>
+                    <a:lnTo>
+                      <a:pt x="0" y="358927"/>
+                    </a:lnTo>
+                    <a:cubicBezTo>
+                      <a:pt x="0" y="160697"/>
+                      <a:pt x="178868" y="0"/>
+                      <a:pt x="399512" y="0"/>
+                    </a:cubicBezTo>
+                    <a:close/>
+                  </a:path>
+                </a:pathLst>
+              </a:custGeom>
+              <a:grpFill/>
+              <a:ln>
+                <a:noFill/>
+              </a:ln>
+              <a:effectLst>
+                <a:outerShdw blurRad="190500" dist="228600" dir="2700000" algn="ctr">
+                  <a:srgbClr val="000000">
+                    <a:alpha val="30000"/>
+                  </a:srgbClr>
+                </a:outerShdw>
+              </a:effectLst>
+              <a:scene3d>
+                <a:camera prst="orthographicFront">
+                  <a:rot lat="0" lon="0" rev="0"/>
+                </a:camera>
+                <a:lightRig rig="glow" dir="t">
+                  <a:rot lat="0" lon="0" rev="4800000"/>
+                </a:lightRig>
+              </a:scene3d>
+              <a:sp3d prstMaterial="matte">
+                <a:bevelT w="127000" h="63500"/>
+              </a:sp3d>
+            </p:spPr>
+            <p:style>
+              <a:lnRef idx="2">
+                <a:schemeClr val="accent1">
+                  <a:shade val="50000"/>
+                </a:schemeClr>
+              </a:lnRef>
+              <a:fillRef idx="1">
+                <a:schemeClr val="accent1"/>
+              </a:fillRef>
+              <a:effectRef idx="0">
+                <a:schemeClr val="accent1"/>
+              </a:effectRef>
+              <a:fontRef idx="minor">
+                <a:schemeClr val="lt1"/>
+              </a:fontRef>
+            </p:style>
+            <p:txBody>
+              <a:bodyPr rtlCol="0" anchor="ctr"/>
+              <a:lstStyle/>
+              <a:p>
+                <a:pPr algn="ctr"/>
+                <a:endParaRPr lang="en-IN" dirty="0"/>
+              </a:p>
+            </p:txBody>
+          </p:sp>
+          <p:sp>
+            <p:nvSpPr>
+              <p:cNvPr id="27" name="Oval 26"/>
+              <p:cNvSpPr/>
+              <p:nvPr/>
+            </p:nvSpPr>
+            <p:spPr>
+              <a:xfrm>
+                <a:off x="9411776" y="3725695"/>
+                <a:ext cx="799024" cy="401805"/>
+              </a:xfrm>
+              <a:prstGeom prst="ellipse">
+                <a:avLst/>
+              </a:prstGeom>
+              <a:grpFill/>
+              <a:ln>
+                <a:noFill/>
+              </a:ln>
+              <a:effectLst>
+                <a:outerShdw blurRad="190500" dist="228600" dir="2700000" algn="ctr">
+                  <a:srgbClr val="000000">
+                    <a:alpha val="30000"/>
+                  </a:srgbClr>
+                </a:outerShdw>
+              </a:effectLst>
+              <a:scene3d>
+                <a:camera prst="orthographicFront">
+                  <a:rot lat="0" lon="0" rev="0"/>
+                </a:camera>
+                <a:lightRig rig="glow" dir="t">
+                  <a:rot lat="0" lon="0" rev="4800000"/>
+                </a:lightRig>
+              </a:scene3d>
+              <a:sp3d prstMaterial="matte">
+                <a:bevelT w="127000" h="63500"/>
+              </a:sp3d>
+            </p:spPr>
+            <p:style>
+              <a:lnRef idx="2">
+                <a:schemeClr val="accent1">
+                  <a:shade val="50000"/>
+                </a:schemeClr>
+              </a:lnRef>
+              <a:fillRef idx="1">
+                <a:schemeClr val="accent1"/>
+              </a:fillRef>
+              <a:effectRef idx="0">
+                <a:schemeClr val="accent1"/>
+              </a:effectRef>
+              <a:fontRef idx="minor">
+                <a:schemeClr val="lt1"/>
+              </a:fontRef>
+            </p:style>
+            <p:txBody>
+              <a:bodyPr rtlCol="0" anchor="ctr"/>
+              <a:lstStyle/>
+              <a:p>
+                <a:pPr algn="ctr"/>
+                <a:endParaRPr lang="en-IN"/>
+              </a:p>
+            </p:txBody>
+          </p:sp>
+        </p:grpSp>
+        <p:grpSp>
+          <p:nvGrpSpPr>
+            <p:cNvPr id="28" name="Group 27"/>
+            <p:cNvGrpSpPr/>
+            <p:nvPr/>
+          </p:nvGrpSpPr>
+          <p:grpSpPr>
+            <a:xfrm>
+              <a:off x="8699734" y="3414439"/>
+              <a:ext cx="305338" cy="1270001"/>
+              <a:chOff x="9411776" y="2021680"/>
+              <a:chExt cx="799024" cy="2105820"/>
+            </a:xfrm>
+            <a:grpFill/>
+          </p:grpSpPr>
+          <p:sp>
+            <p:nvSpPr>
+              <p:cNvPr id="29" name="Freeform 28"/>
+              <p:cNvSpPr/>
+              <p:nvPr/>
+            </p:nvSpPr>
+            <p:spPr>
+              <a:xfrm>
+                <a:off x="9411776" y="2021680"/>
+                <a:ext cx="799024" cy="2093120"/>
+              </a:xfrm>
+              <a:custGeom>
+                <a:avLst/>
+                <a:gdLst>
+                  <a:gd name="connsiteX0" fmla="*/ 399512 w 799024"/>
+                  <a:gd name="connsiteY0" fmla="*/ 0 h 2093120"/>
+                  <a:gd name="connsiteX1" fmla="*/ 799024 w 799024"/>
+                  <a:gd name="connsiteY1" fmla="*/ 358927 h 2093120"/>
+                  <a:gd name="connsiteX2" fmla="*/ 794947 w 799024"/>
+                  <a:gd name="connsiteY2" fmla="*/ 395269 h 2093120"/>
+                  <a:gd name="connsiteX3" fmla="*/ 796319 w 799024"/>
+                  <a:gd name="connsiteY3" fmla="*/ 399240 h 2093120"/>
+                  <a:gd name="connsiteX4" fmla="*/ 799024 w 799024"/>
+                  <a:gd name="connsiteY4" fmla="*/ 423353 h 2093120"/>
+                  <a:gd name="connsiteX5" fmla="*/ 799024 w 799024"/>
+                  <a:gd name="connsiteY5" fmla="*/ 1605968 h 2093120"/>
+                  <a:gd name="connsiteX6" fmla="*/ 791359 w 799024"/>
+                  <a:gd name="connsiteY6" fmla="*/ 1640078 h 2093120"/>
+                  <a:gd name="connsiteX7" fmla="*/ 799024 w 799024"/>
+                  <a:gd name="connsiteY7" fmla="*/ 1712516 h 2093120"/>
+                  <a:gd name="connsiteX8" fmla="*/ 399512 w 799024"/>
+                  <a:gd name="connsiteY8" fmla="*/ 2093120 h 2093120"/>
+                  <a:gd name="connsiteX9" fmla="*/ 0 w 799024"/>
+                  <a:gd name="connsiteY9" fmla="*/ 1712516 h 2093120"/>
+                  <a:gd name="connsiteX10" fmla="*/ 7665 w 799024"/>
+                  <a:gd name="connsiteY10" fmla="*/ 1640078 h 2093120"/>
+                  <a:gd name="connsiteX11" fmla="*/ 0 w 799024"/>
+                  <a:gd name="connsiteY11" fmla="*/ 1605968 h 2093120"/>
+                  <a:gd name="connsiteX12" fmla="*/ 0 w 799024"/>
+                  <a:gd name="connsiteY12" fmla="*/ 423353 h 2093120"/>
+                  <a:gd name="connsiteX13" fmla="*/ 2706 w 799024"/>
+                  <a:gd name="connsiteY13" fmla="*/ 399240 h 2093120"/>
+                  <a:gd name="connsiteX14" fmla="*/ 4078 w 799024"/>
+                  <a:gd name="connsiteY14" fmla="*/ 395269 h 2093120"/>
+                  <a:gd name="connsiteX15" fmla="*/ 0 w 799024"/>
+                  <a:gd name="connsiteY15" fmla="*/ 358927 h 2093120"/>
+                  <a:gd name="connsiteX16" fmla="*/ 399512 w 799024"/>
+                  <a:gd name="connsiteY16" fmla="*/ 0 h 2093120"/>
+                </a:gdLst>
+                <a:ahLst/>
+                <a:cxnLst>
+                  <a:cxn ang="0">
+                    <a:pos x="connsiteX0" y="connsiteY0"/>
+                  </a:cxn>
+                  <a:cxn ang="0">
+                    <a:pos x="connsiteX1" y="connsiteY1"/>
+                  </a:cxn>
+                  <a:cxn ang="0">
+                    <a:pos x="connsiteX2" y="connsiteY2"/>
+                  </a:cxn>
+                  <a:cxn ang="0">
+                    <a:pos x="connsiteX3" y="connsiteY3"/>
+                  </a:cxn>
+                  <a:cxn ang="0">
+                    <a:pos x="connsiteX4" y="connsiteY4"/>
+                  </a:cxn>
+                  <a:cxn ang="0">
+                    <a:pos x="connsiteX5" y="connsiteY5"/>
+                  </a:cxn>
+                  <a:cxn ang="0">
+                    <a:pos x="connsiteX6" y="connsiteY6"/>
+                  </a:cxn>
+                  <a:cxn ang="0">
+                    <a:pos x="connsiteX7" y="connsiteY7"/>
+                  </a:cxn>
+                  <a:cxn ang="0">
+                    <a:pos x="connsiteX8" y="connsiteY8"/>
+                  </a:cxn>
+                  <a:cxn ang="0">
+                    <a:pos x="connsiteX9" y="connsiteY9"/>
+                  </a:cxn>
+                  <a:cxn ang="0">
+                    <a:pos x="connsiteX10" y="connsiteY10"/>
+                  </a:cxn>
+                  <a:cxn ang="0">
+                    <a:pos x="connsiteX11" y="connsiteY11"/>
+                  </a:cxn>
+                  <a:cxn ang="0">
+                    <a:pos x="connsiteX12" y="connsiteY12"/>
+                  </a:cxn>
+                  <a:cxn ang="0">
+                    <a:pos x="connsiteX13" y="connsiteY13"/>
+                  </a:cxn>
+                  <a:cxn ang="0">
+                    <a:pos x="connsiteX14" y="connsiteY14"/>
+                  </a:cxn>
+                  <a:cxn ang="0">
+                    <a:pos x="connsiteX15" y="connsiteY15"/>
+                  </a:cxn>
+                  <a:cxn ang="0">
+                    <a:pos x="connsiteX16" y="connsiteY16"/>
+                  </a:cxn>
+                </a:cxnLst>
+                <a:rect l="l" t="t" r="r" b="b"/>
+                <a:pathLst>
+                  <a:path w="799024" h="2093120">
+                    <a:moveTo>
+                      <a:pt x="399512" y="0"/>
+                    </a:moveTo>
+                    <a:cubicBezTo>
+                      <a:pt x="620156" y="0"/>
+                      <a:pt x="799024" y="160697"/>
+                      <a:pt x="799024" y="358927"/>
+                    </a:cubicBezTo>
+                    <a:lnTo>
+                      <a:pt x="794947" y="395269"/>
+                    </a:lnTo>
+                    <a:lnTo>
+                      <a:pt x="796319" y="399240"/>
+                    </a:lnTo>
+                    <a:cubicBezTo>
+                      <a:pt x="798092" y="407029"/>
+                      <a:pt x="799024" y="415093"/>
+                      <a:pt x="799024" y="423353"/>
+                    </a:cubicBezTo>
+                    <a:lnTo>
+                      <a:pt x="799024" y="1605968"/>
+                    </a:lnTo>
+                    <a:lnTo>
+                      <a:pt x="791359" y="1640078"/>
+                    </a:lnTo>
+                    <a:lnTo>
+                      <a:pt x="799024" y="1712516"/>
+                    </a:lnTo>
+                    <a:cubicBezTo>
+                      <a:pt x="799024" y="1922718"/>
+                      <a:pt x="620156" y="2093120"/>
+                      <a:pt x="399512" y="2093120"/>
+                    </a:cubicBezTo>
+                    <a:cubicBezTo>
+                      <a:pt x="178868" y="2093120"/>
+                      <a:pt x="0" y="1922718"/>
+                      <a:pt x="0" y="1712516"/>
+                    </a:cubicBezTo>
+                    <a:lnTo>
+                      <a:pt x="7665" y="1640078"/>
+                    </a:lnTo>
+                    <a:lnTo>
+                      <a:pt x="0" y="1605968"/>
+                    </a:lnTo>
+                    <a:lnTo>
+                      <a:pt x="0" y="423353"/>
+                    </a:lnTo>
+                    <a:cubicBezTo>
+                      <a:pt x="0" y="415093"/>
+                      <a:pt x="932" y="407029"/>
+                      <a:pt x="2706" y="399240"/>
+                    </a:cubicBezTo>
+                    <a:lnTo>
+                      <a:pt x="4078" y="395269"/>
+                    </a:lnTo>
+                    <a:lnTo>
+                      <a:pt x="0" y="358927"/>
+                    </a:lnTo>
+                    <a:cubicBezTo>
+                      <a:pt x="0" y="160697"/>
+                      <a:pt x="178868" y="0"/>
+                      <a:pt x="399512" y="0"/>
+                    </a:cubicBezTo>
+                    <a:close/>
+                  </a:path>
+                </a:pathLst>
+              </a:custGeom>
+              <a:grpFill/>
+              <a:ln>
+                <a:noFill/>
+              </a:ln>
+              <a:effectLst>
+                <a:outerShdw blurRad="190500" dist="228600" dir="2700000" algn="ctr">
+                  <a:srgbClr val="000000">
+                    <a:alpha val="30000"/>
+                  </a:srgbClr>
+                </a:outerShdw>
+              </a:effectLst>
+              <a:scene3d>
+                <a:camera prst="orthographicFront">
+                  <a:rot lat="0" lon="0" rev="0"/>
+                </a:camera>
+                <a:lightRig rig="glow" dir="t">
+                  <a:rot lat="0" lon="0" rev="4800000"/>
+                </a:lightRig>
+              </a:scene3d>
+              <a:sp3d prstMaterial="matte">
+                <a:bevelT w="127000" h="63500"/>
+              </a:sp3d>
+            </p:spPr>
+            <p:style>
+              <a:lnRef idx="2">
+                <a:schemeClr val="accent1">
+                  <a:shade val="50000"/>
+                </a:schemeClr>
+              </a:lnRef>
+              <a:fillRef idx="1">
+                <a:schemeClr val="accent1"/>
+              </a:fillRef>
+              <a:effectRef idx="0">
+                <a:schemeClr val="accent1"/>
+              </a:effectRef>
+              <a:fontRef idx="minor">
+                <a:schemeClr val="lt1"/>
+              </a:fontRef>
+            </p:style>
+            <p:txBody>
+              <a:bodyPr rtlCol="0" anchor="ctr"/>
+              <a:lstStyle/>
+              <a:p>
+                <a:pPr algn="ctr"/>
+                <a:endParaRPr lang="en-IN" dirty="0"/>
+              </a:p>
+            </p:txBody>
+          </p:sp>
+          <p:sp>
+            <p:nvSpPr>
+              <p:cNvPr id="30" name="Oval 29"/>
+              <p:cNvSpPr/>
+              <p:nvPr/>
+            </p:nvSpPr>
+            <p:spPr>
+              <a:xfrm>
+                <a:off x="9411776" y="3725695"/>
+                <a:ext cx="799024" cy="401805"/>
+              </a:xfrm>
+              <a:prstGeom prst="ellipse">
+                <a:avLst/>
+              </a:prstGeom>
+              <a:grpFill/>
+              <a:ln>
+                <a:noFill/>
+              </a:ln>
+              <a:effectLst>
+                <a:outerShdw blurRad="190500" dist="228600" dir="2700000" algn="ctr">
+                  <a:srgbClr val="000000">
+                    <a:alpha val="30000"/>
+                  </a:srgbClr>
+                </a:outerShdw>
+              </a:effectLst>
+              <a:scene3d>
+                <a:camera prst="orthographicFront">
+                  <a:rot lat="0" lon="0" rev="0"/>
+                </a:camera>
+                <a:lightRig rig="glow" dir="t">
+                  <a:rot lat="0" lon="0" rev="4800000"/>
+                </a:lightRig>
+              </a:scene3d>
+              <a:sp3d prstMaterial="matte">
+                <a:bevelT w="127000" h="63500"/>
+              </a:sp3d>
+            </p:spPr>
+            <p:style>
+              <a:lnRef idx="2">
+                <a:schemeClr val="accent1">
+                  <a:shade val="50000"/>
+                </a:schemeClr>
+              </a:lnRef>
+              <a:fillRef idx="1">
+                <a:schemeClr val="accent1"/>
+              </a:fillRef>
+              <a:effectRef idx="0">
+                <a:schemeClr val="accent1"/>
+              </a:effectRef>
+              <a:fontRef idx="minor">
+                <a:schemeClr val="lt1"/>
+              </a:fontRef>
+            </p:style>
+            <p:txBody>
+              <a:bodyPr rtlCol="0" anchor="ctr"/>
+              <a:lstStyle/>
+              <a:p>
+                <a:pPr algn="ctr"/>
+                <a:endParaRPr lang="en-IN"/>
+              </a:p>
+            </p:txBody>
+          </p:sp>
+        </p:grpSp>
+        <p:grpSp>
+          <p:nvGrpSpPr>
+            <p:cNvPr id="31" name="Group 30"/>
+            <p:cNvGrpSpPr/>
+            <p:nvPr/>
+          </p:nvGrpSpPr>
+          <p:grpSpPr>
+            <a:xfrm>
+              <a:off x="9317164" y="3604623"/>
+              <a:ext cx="240222" cy="895033"/>
+              <a:chOff x="9411776" y="2021680"/>
+              <a:chExt cx="799024" cy="2105820"/>
+            </a:xfrm>
+            <a:grpFill/>
+          </p:grpSpPr>
+          <p:sp>
+            <p:nvSpPr>
+              <p:cNvPr id="32" name="Freeform 31"/>
+              <p:cNvSpPr/>
+              <p:nvPr/>
+            </p:nvSpPr>
+            <p:spPr>
+              <a:xfrm>
+                <a:off x="9411776" y="2021680"/>
+                <a:ext cx="799024" cy="2093120"/>
+              </a:xfrm>
+              <a:custGeom>
+                <a:avLst/>
+                <a:gdLst>
+                  <a:gd name="connsiteX0" fmla="*/ 399512 w 799024"/>
+                  <a:gd name="connsiteY0" fmla="*/ 0 h 2093120"/>
+                  <a:gd name="connsiteX1" fmla="*/ 799024 w 799024"/>
+                  <a:gd name="connsiteY1" fmla="*/ 358927 h 2093120"/>
+                  <a:gd name="connsiteX2" fmla="*/ 794947 w 799024"/>
+                  <a:gd name="connsiteY2" fmla="*/ 395269 h 2093120"/>
+                  <a:gd name="connsiteX3" fmla="*/ 796319 w 799024"/>
+                  <a:gd name="connsiteY3" fmla="*/ 399240 h 2093120"/>
+                  <a:gd name="connsiteX4" fmla="*/ 799024 w 799024"/>
+                  <a:gd name="connsiteY4" fmla="*/ 423353 h 2093120"/>
+                  <a:gd name="connsiteX5" fmla="*/ 799024 w 799024"/>
+                  <a:gd name="connsiteY5" fmla="*/ 1605968 h 2093120"/>
+                  <a:gd name="connsiteX6" fmla="*/ 791359 w 799024"/>
+                  <a:gd name="connsiteY6" fmla="*/ 1640078 h 2093120"/>
+                  <a:gd name="connsiteX7" fmla="*/ 799024 w 799024"/>
+                  <a:gd name="connsiteY7" fmla="*/ 1712516 h 2093120"/>
+                  <a:gd name="connsiteX8" fmla="*/ 399512 w 799024"/>
+                  <a:gd name="connsiteY8" fmla="*/ 2093120 h 2093120"/>
+                  <a:gd name="connsiteX9" fmla="*/ 0 w 799024"/>
+                  <a:gd name="connsiteY9" fmla="*/ 1712516 h 2093120"/>
+                  <a:gd name="connsiteX10" fmla="*/ 7665 w 799024"/>
+                  <a:gd name="connsiteY10" fmla="*/ 1640078 h 2093120"/>
+                  <a:gd name="connsiteX11" fmla="*/ 0 w 799024"/>
+                  <a:gd name="connsiteY11" fmla="*/ 1605968 h 2093120"/>
+                  <a:gd name="connsiteX12" fmla="*/ 0 w 799024"/>
+                  <a:gd name="connsiteY12" fmla="*/ 423353 h 2093120"/>
+                  <a:gd name="connsiteX13" fmla="*/ 2706 w 799024"/>
+                  <a:gd name="connsiteY13" fmla="*/ 399240 h 2093120"/>
+                  <a:gd name="connsiteX14" fmla="*/ 4078 w 799024"/>
+                  <a:gd name="connsiteY14" fmla="*/ 395269 h 2093120"/>
+                  <a:gd name="connsiteX15" fmla="*/ 0 w 799024"/>
+                  <a:gd name="connsiteY15" fmla="*/ 358927 h 2093120"/>
+                  <a:gd name="connsiteX16" fmla="*/ 399512 w 799024"/>
+                  <a:gd name="connsiteY16" fmla="*/ 0 h 2093120"/>
+                </a:gdLst>
+                <a:ahLst/>
+                <a:cxnLst>
+                  <a:cxn ang="0">
+                    <a:pos x="connsiteX0" y="connsiteY0"/>
+                  </a:cxn>
+                  <a:cxn ang="0">
+                    <a:pos x="connsiteX1" y="connsiteY1"/>
+                  </a:cxn>
+                  <a:cxn ang="0">
+                    <a:pos x="connsiteX2" y="connsiteY2"/>
+                  </a:cxn>
+                  <a:cxn ang="0">
+                    <a:pos x="connsiteX3" y="connsiteY3"/>
+                  </a:cxn>
+                  <a:cxn ang="0">
+                    <a:pos x="connsiteX4" y="connsiteY4"/>
+                  </a:cxn>
+                  <a:cxn ang="0">
+                    <a:pos x="connsiteX5" y="connsiteY5"/>
+                  </a:cxn>
+                  <a:cxn ang="0">
+                    <a:pos x="connsiteX6" y="connsiteY6"/>
+                  </a:cxn>
+                  <a:cxn ang="0">
+                    <a:pos x="connsiteX7" y="connsiteY7"/>
+                  </a:cxn>
+                  <a:cxn ang="0">
+                    <a:pos x="connsiteX8" y="connsiteY8"/>
+                  </a:cxn>
+                  <a:cxn ang="0">
+                    <a:pos x="connsiteX9" y="connsiteY9"/>
+                  </a:cxn>
+                  <a:cxn ang="0">
+                    <a:pos x="connsiteX10" y="connsiteY10"/>
+                  </a:cxn>
+                  <a:cxn ang="0">
+                    <a:pos x="connsiteX11" y="connsiteY11"/>
+                  </a:cxn>
+                  <a:cxn ang="0">
+                    <a:pos x="connsiteX12" y="connsiteY12"/>
+                  </a:cxn>
+                  <a:cxn ang="0">
+                    <a:pos x="connsiteX13" y="connsiteY13"/>
+                  </a:cxn>
+                  <a:cxn ang="0">
+                    <a:pos x="connsiteX14" y="connsiteY14"/>
+                  </a:cxn>
+                  <a:cxn ang="0">
+                    <a:pos x="connsiteX15" y="connsiteY15"/>
+                  </a:cxn>
+                  <a:cxn ang="0">
+                    <a:pos x="connsiteX16" y="connsiteY16"/>
+                  </a:cxn>
+                </a:cxnLst>
+                <a:rect l="l" t="t" r="r" b="b"/>
+                <a:pathLst>
+                  <a:path w="799024" h="2093120">
+                    <a:moveTo>
+                      <a:pt x="399512" y="0"/>
+                    </a:moveTo>
+                    <a:cubicBezTo>
+                      <a:pt x="620156" y="0"/>
+                      <a:pt x="799024" y="160697"/>
+                      <a:pt x="799024" y="358927"/>
+                    </a:cubicBezTo>
+                    <a:lnTo>
+                      <a:pt x="794947" y="395269"/>
+                    </a:lnTo>
+                    <a:lnTo>
+                      <a:pt x="796319" y="399240"/>
+                    </a:lnTo>
+                    <a:cubicBezTo>
+                      <a:pt x="798092" y="407029"/>
+                      <a:pt x="799024" y="415093"/>
+                      <a:pt x="799024" y="423353"/>
+                    </a:cubicBezTo>
+                    <a:lnTo>
+                      <a:pt x="799024" y="1605968"/>
+                    </a:lnTo>
+                    <a:lnTo>
+                      <a:pt x="791359" y="1640078"/>
+                    </a:lnTo>
+                    <a:lnTo>
+                      <a:pt x="799024" y="1712516"/>
+                    </a:lnTo>
+                    <a:cubicBezTo>
+                      <a:pt x="799024" y="1922718"/>
+                      <a:pt x="620156" y="2093120"/>
+                      <a:pt x="399512" y="2093120"/>
+                    </a:cubicBezTo>
+                    <a:cubicBezTo>
+                      <a:pt x="178868" y="2093120"/>
+                      <a:pt x="0" y="1922718"/>
+                      <a:pt x="0" y="1712516"/>
+                    </a:cubicBezTo>
+                    <a:lnTo>
+                      <a:pt x="7665" y="1640078"/>
+                    </a:lnTo>
+                    <a:lnTo>
+                      <a:pt x="0" y="1605968"/>
+                    </a:lnTo>
+                    <a:lnTo>
+                      <a:pt x="0" y="423353"/>
+                    </a:lnTo>
+                    <a:cubicBezTo>
+                      <a:pt x="0" y="415093"/>
+                      <a:pt x="932" y="407029"/>
+                      <a:pt x="2706" y="399240"/>
+                    </a:cubicBezTo>
+                    <a:lnTo>
+                      <a:pt x="4078" y="395269"/>
+                    </a:lnTo>
+                    <a:lnTo>
+                      <a:pt x="0" y="358927"/>
+                    </a:lnTo>
+                    <a:cubicBezTo>
+                      <a:pt x="0" y="160697"/>
+                      <a:pt x="178868" y="0"/>
+                      <a:pt x="399512" y="0"/>
+                    </a:cubicBezTo>
+                    <a:close/>
+                  </a:path>
+                </a:pathLst>
+              </a:custGeom>
+              <a:grpFill/>
+              <a:ln>
+                <a:noFill/>
+              </a:ln>
+              <a:effectLst>
+                <a:outerShdw blurRad="190500" dist="228600" dir="2700000" algn="ctr">
+                  <a:srgbClr val="000000">
+                    <a:alpha val="30000"/>
+                  </a:srgbClr>
+                </a:outerShdw>
+              </a:effectLst>
+              <a:scene3d>
+                <a:camera prst="orthographicFront">
+                  <a:rot lat="0" lon="0" rev="0"/>
+                </a:camera>
+                <a:lightRig rig="glow" dir="t">
+                  <a:rot lat="0" lon="0" rev="4800000"/>
+                </a:lightRig>
+              </a:scene3d>
+              <a:sp3d prstMaterial="matte">
+                <a:bevelT w="127000" h="63500"/>
+              </a:sp3d>
+            </p:spPr>
+            <p:style>
+              <a:lnRef idx="2">
+                <a:schemeClr val="accent1">
+                  <a:shade val="50000"/>
+                </a:schemeClr>
+              </a:lnRef>
+              <a:fillRef idx="1">
+                <a:schemeClr val="accent1"/>
+              </a:fillRef>
+              <a:effectRef idx="0">
+                <a:schemeClr val="accent1"/>
+              </a:effectRef>
+              <a:fontRef idx="minor">
+                <a:schemeClr val="lt1"/>
+              </a:fontRef>
+            </p:style>
+            <p:txBody>
+              <a:bodyPr rtlCol="0" anchor="ctr"/>
+              <a:lstStyle/>
+              <a:p>
+                <a:pPr algn="ctr"/>
+                <a:endParaRPr lang="en-IN" dirty="0"/>
+              </a:p>
+            </p:txBody>
+          </p:sp>
+          <p:sp>
+            <p:nvSpPr>
+              <p:cNvPr id="33" name="Oval 32"/>
+              <p:cNvSpPr/>
+              <p:nvPr/>
+            </p:nvSpPr>
+            <p:spPr>
+              <a:xfrm>
+                <a:off x="9411776" y="3725695"/>
+                <a:ext cx="799024" cy="401805"/>
+              </a:xfrm>
+              <a:prstGeom prst="ellipse">
+                <a:avLst/>
+              </a:prstGeom>
+              <a:grpFill/>
+              <a:ln>
+                <a:noFill/>
+              </a:ln>
+              <a:effectLst>
+                <a:outerShdw blurRad="190500" dist="228600" dir="2700000" algn="ctr">
+                  <a:srgbClr val="000000">
+                    <a:alpha val="30000"/>
+                  </a:srgbClr>
+                </a:outerShdw>
+              </a:effectLst>
+              <a:scene3d>
+                <a:camera prst="orthographicFront">
+                  <a:rot lat="0" lon="0" rev="0"/>
+                </a:camera>
+                <a:lightRig rig="glow" dir="t">
+                  <a:rot lat="0" lon="0" rev="4800000"/>
+                </a:lightRig>
+              </a:scene3d>
+              <a:sp3d prstMaterial="matte">
+                <a:bevelT w="127000" h="63500"/>
+              </a:sp3d>
+            </p:spPr>
+            <p:style>
+              <a:lnRef idx="2">
+                <a:schemeClr val="accent1">
+                  <a:shade val="50000"/>
+                </a:schemeClr>
+              </a:lnRef>
+              <a:fillRef idx="1">
+                <a:schemeClr val="accent1"/>
+              </a:fillRef>
+              <a:effectRef idx="0">
+                <a:schemeClr val="accent1"/>
+              </a:effectRef>
+              <a:fontRef idx="minor">
+                <a:schemeClr val="lt1"/>
+              </a:fontRef>
+            </p:style>
+            <p:txBody>
+              <a:bodyPr rtlCol="0" anchor="ctr"/>
+              <a:lstStyle/>
+              <a:p>
+                <a:pPr algn="ctr"/>
+                <a:endParaRPr lang="en-IN"/>
+              </a:p>
+            </p:txBody>
+          </p:sp>
+        </p:grpSp>
+        <p:sp>
+          <p:nvSpPr>
+            <p:cNvPr id="46" name="Oval 45"/>
+            <p:cNvSpPr/>
+            <p:nvPr/>
+          </p:nvSpPr>
+          <p:spPr>
+            <a:xfrm>
+              <a:off x="8880425" y="2100288"/>
+              <a:ext cx="736600" cy="763447"/>
+            </a:xfrm>
+            <a:prstGeom prst="ellipse">
+              <a:avLst/>
+            </a:prstGeom>
+            <a:grpFill/>
+            <a:ln>
+              <a:noFill/>
+            </a:ln>
+            <a:effectLst>
+              <a:outerShdw blurRad="190500" dist="228600" dir="2700000" algn="ctr">
+                <a:srgbClr val="000000">
+                  <a:alpha val="30000"/>
+                </a:srgbClr>
+              </a:outerShdw>
+            </a:effectLst>
+            <a:scene3d>
+              <a:camera prst="orthographicFront">
+                <a:rot lat="0" lon="0" rev="0"/>
+              </a:camera>
+              <a:lightRig rig="glow" dir="t">
+                <a:rot lat="0" lon="0" rev="4800000"/>
+              </a:lightRig>
+            </a:scene3d>
+            <a:sp3d prstMaterial="matte">
+              <a:bevelT w="127000" h="63500"/>
+            </a:sp3d>
+          </p:spPr>
+          <p:style>
+            <a:lnRef idx="2">
+              <a:schemeClr val="accent1">
+                <a:shade val="50000"/>
+              </a:schemeClr>
+            </a:lnRef>
+            <a:fillRef idx="1">
+              <a:schemeClr val="accent1"/>
+            </a:fillRef>
+            <a:effectRef idx="0">
+              <a:schemeClr val="accent1"/>
+            </a:effectRef>
+            <a:fontRef idx="minor">
+              <a:schemeClr val="lt1"/>
+            </a:fontRef>
+          </p:style>
+          <p:txBody>
+            <a:bodyPr rtlCol="0" anchor="ctr"/>
+            <a:lstStyle/>
+            <a:p>
+              <a:pPr algn="ctr"/>
+              <a:endParaRPr lang="en-IN"/>
+            </a:p>
+          </p:txBody>
+        </p:sp>
+        <p:sp>
+          <p:nvSpPr>
+            <p:cNvPr id="45" name="Oval 44"/>
+            <p:cNvSpPr/>
+            <p:nvPr/>
+          </p:nvSpPr>
+          <p:spPr>
+            <a:xfrm>
+              <a:off x="8230371" y="1640114"/>
+              <a:ext cx="895485" cy="935942"/>
+            </a:xfrm>
+            <a:prstGeom prst="ellipse">
+              <a:avLst/>
+            </a:prstGeom>
+            <a:grpFill/>
+            <a:ln>
+              <a:noFill/>
+            </a:ln>
+            <a:effectLst>
+              <a:outerShdw blurRad="190500" dist="228600" dir="2700000" algn="ctr">
+                <a:srgbClr val="000000">
+                  <a:alpha val="30000"/>
+                </a:srgbClr>
+              </a:outerShdw>
+            </a:effectLst>
+            <a:scene3d>
+              <a:camera prst="orthographicFront">
+                <a:rot lat="0" lon="0" rev="0"/>
+              </a:camera>
+              <a:lightRig rig="glow" dir="t">
+                <a:rot lat="0" lon="0" rev="4800000"/>
+              </a:lightRig>
+            </a:scene3d>
+            <a:sp3d prstMaterial="matte">
+              <a:bevelT w="127000" h="63500"/>
+            </a:sp3d>
+          </p:spPr>
+          <p:style>
+            <a:lnRef idx="2">
+              <a:schemeClr val="accent1">
+                <a:shade val="50000"/>
+              </a:schemeClr>
+            </a:lnRef>
+            <a:fillRef idx="1">
+              <a:schemeClr val="accent1"/>
+            </a:fillRef>
+            <a:effectRef idx="0">
+              <a:schemeClr val="accent1"/>
+            </a:effectRef>
+            <a:fontRef idx="minor">
+              <a:schemeClr val="lt1"/>
+            </a:fontRef>
+          </p:style>
+          <p:txBody>
+            <a:bodyPr rtlCol="0" anchor="ctr"/>
+            <a:lstStyle/>
+            <a:p>
+              <a:pPr algn="ctr"/>
+              <a:endParaRPr lang="en-IN"/>
+            </a:p>
+          </p:txBody>
+        </p:sp>
+        <p:sp>
+          <p:nvSpPr>
+            <p:cNvPr id="44" name="Oval 43"/>
+            <p:cNvSpPr/>
+            <p:nvPr/>
+          </p:nvSpPr>
+          <p:spPr>
+            <a:xfrm>
+              <a:off x="7322457" y="1297289"/>
+              <a:ext cx="1066800" cy="1035880"/>
+            </a:xfrm>
+            <a:prstGeom prst="ellipse">
+              <a:avLst/>
+            </a:prstGeom>
+            <a:grpFill/>
+            <a:ln>
+              <a:noFill/>
+            </a:ln>
+            <a:effectLst>
+              <a:outerShdw blurRad="190500" dist="228600" dir="2700000" algn="ctr">
+                <a:srgbClr val="000000">
+                  <a:alpha val="30000"/>
+                </a:srgbClr>
+              </a:outerShdw>
+            </a:effectLst>
+            <a:scene3d>
+              <a:camera prst="orthographicFront">
+                <a:rot lat="0" lon="0" rev="0"/>
+              </a:camera>
+              <a:lightRig rig="glow" dir="t">
+                <a:rot lat="0" lon="0" rev="4800000"/>
+              </a:lightRig>
+            </a:scene3d>
+            <a:sp3d prstMaterial="matte">
+              <a:bevelT w="127000" h="63500"/>
+            </a:sp3d>
+          </p:spPr>
+          <p:style>
+            <a:lnRef idx="2">
+              <a:schemeClr val="accent1">
+                <a:shade val="50000"/>
+              </a:schemeClr>
+            </a:lnRef>
+            <a:fillRef idx="1">
+              <a:schemeClr val="accent1"/>
+            </a:fillRef>
+            <a:effectRef idx="0">
+              <a:schemeClr val="accent1"/>
+            </a:effectRef>
+            <a:fontRef idx="minor">
+              <a:schemeClr val="lt1"/>
+            </a:fontRef>
+          </p:style>
+          <p:txBody>
+            <a:bodyPr rtlCol="0" anchor="ctr"/>
+            <a:lstStyle/>
+            <a:p>
+              <a:pPr algn="ctr"/>
+              <a:endParaRPr lang="en-IN"/>
+            </a:p>
+          </p:txBody>
+        </p:sp>
+        <p:sp>
+          <p:nvSpPr>
+            <p:cNvPr id="40" name="Oval 39"/>
+            <p:cNvSpPr/>
+            <p:nvPr/>
+          </p:nvSpPr>
+          <p:spPr>
+            <a:xfrm>
+              <a:off x="6395356" y="876421"/>
+              <a:ext cx="1219200" cy="1250373"/>
+            </a:xfrm>
+            <a:prstGeom prst="ellipse">
+              <a:avLst/>
+            </a:prstGeom>
+            <a:grpFill/>
+            <a:ln>
+              <a:noFill/>
+            </a:ln>
+            <a:effectLst>
+              <a:outerShdw blurRad="190500" dist="228600" dir="2700000" algn="ctr">
+                <a:srgbClr val="000000">
+                  <a:alpha val="30000"/>
+                </a:srgbClr>
+              </a:outerShdw>
+            </a:effectLst>
+            <a:scene3d>
+              <a:camera prst="orthographicFront">
+                <a:rot lat="0" lon="0" rev="0"/>
+              </a:camera>
+              <a:lightRig rig="glow" dir="t">
+                <a:rot lat="0" lon="0" rev="4800000"/>
+              </a:lightRig>
+            </a:scene3d>
+            <a:sp3d prstMaterial="matte">
+              <a:bevelT w="127000" h="63500"/>
+            </a:sp3d>
+          </p:spPr>
+          <p:style>
+            <a:lnRef idx="2">
+              <a:schemeClr val="accent1">
+                <a:shade val="50000"/>
+              </a:schemeClr>
+            </a:lnRef>
+            <a:fillRef idx="1">
+              <a:schemeClr val="accent1"/>
+            </a:fillRef>
+            <a:effectRef idx="0">
+              <a:schemeClr val="accent1"/>
+            </a:effectRef>
+            <a:fontRef idx="minor">
+              <a:schemeClr val="lt1"/>
+            </a:fontRef>
+          </p:style>
+          <p:txBody>
+            <a:bodyPr rtlCol="0" anchor="ctr"/>
+            <a:lstStyle/>
+            <a:p>
+              <a:pPr algn="ctr"/>
+              <a:endParaRPr lang="en-IN"/>
+            </a:p>
+          </p:txBody>
+        </p:sp>
         <p:sp>
           <p:nvSpPr>
             <p:cNvPr id="20" name="Freeform 19"/>
@@ -3966,8 +5717,8 @@
           </p:nvSpPr>
           <p:spPr>
             <a:xfrm>
-              <a:off x="9411776" y="2021680"/>
-              <a:ext cx="799024" cy="2093120"/>
+              <a:off x="6126506" y="2953430"/>
+              <a:ext cx="456124" cy="2226454"/>
             </a:xfrm>
             <a:custGeom>
               <a:avLst/>
@@ -4131,6 +5882,7 @@
                 </a:path>
               </a:pathLst>
             </a:custGeom>
+            <a:grpFill/>
             <a:ln>
               <a:noFill/>
             </a:ln>
@@ -4186,12 +5938,13 @@
           </p:nvSpPr>
           <p:spPr>
             <a:xfrm>
-              <a:off x="9411776" y="3725695"/>
-              <a:ext cx="799024" cy="401805"/>
+              <a:off x="6126506" y="4765993"/>
+              <a:ext cx="456124" cy="427400"/>
             </a:xfrm>
             <a:prstGeom prst="ellipse">
               <a:avLst/>
             </a:prstGeom>
+            <a:grpFill/>
             <a:ln>
               <a:noFill/>
             </a:ln>
@@ -4239,1190 +5992,534 @@
             </a:p>
           </p:txBody>
         </p:sp>
-      </p:grpSp>
-      <p:grpSp>
-        <p:nvGrpSpPr>
-          <p:cNvPr id="22" name="Group 21"/>
-          <p:cNvGrpSpPr/>
-          <p:nvPr/>
-        </p:nvGrpSpPr>
-        <p:grpSpPr>
-          <a:xfrm>
-            <a:off x="5231862" y="2665794"/>
-            <a:ext cx="355868" cy="1969706"/>
-            <a:chOff x="9411776" y="2021680"/>
-            <a:chExt cx="799024" cy="2105820"/>
-          </a:xfrm>
-        </p:grpSpPr>
-        <p:sp>
-          <p:nvSpPr>
-            <p:cNvPr id="23" name="Freeform 22"/>
-            <p:cNvSpPr/>
+        <p:grpSp>
+          <p:nvGrpSpPr>
+            <p:cNvPr id="47" name="Group 46"/>
+            <p:cNvGrpSpPr/>
             <p:nvPr/>
-          </p:nvSpPr>
-          <p:spPr>
+          </p:nvGrpSpPr>
+          <p:grpSpPr>
             <a:xfrm>
-              <a:off x="9411776" y="2021680"/>
-              <a:ext cx="799024" cy="2093120"/>
+              <a:off x="5417456" y="577395"/>
+              <a:ext cx="1677367" cy="1393372"/>
+              <a:chOff x="3704771" y="969281"/>
+              <a:chExt cx="1677367" cy="1393372"/>
             </a:xfrm>
-            <a:custGeom>
-              <a:avLst/>
-              <a:gdLst>
-                <a:gd name="connsiteX0" fmla="*/ 399512 w 799024"/>
-                <a:gd name="connsiteY0" fmla="*/ 0 h 2093120"/>
-                <a:gd name="connsiteX1" fmla="*/ 799024 w 799024"/>
-                <a:gd name="connsiteY1" fmla="*/ 358927 h 2093120"/>
-                <a:gd name="connsiteX2" fmla="*/ 794947 w 799024"/>
-                <a:gd name="connsiteY2" fmla="*/ 395269 h 2093120"/>
-                <a:gd name="connsiteX3" fmla="*/ 796319 w 799024"/>
-                <a:gd name="connsiteY3" fmla="*/ 399240 h 2093120"/>
-                <a:gd name="connsiteX4" fmla="*/ 799024 w 799024"/>
-                <a:gd name="connsiteY4" fmla="*/ 423353 h 2093120"/>
-                <a:gd name="connsiteX5" fmla="*/ 799024 w 799024"/>
-                <a:gd name="connsiteY5" fmla="*/ 1605968 h 2093120"/>
-                <a:gd name="connsiteX6" fmla="*/ 791359 w 799024"/>
-                <a:gd name="connsiteY6" fmla="*/ 1640078 h 2093120"/>
-                <a:gd name="connsiteX7" fmla="*/ 799024 w 799024"/>
-                <a:gd name="connsiteY7" fmla="*/ 1712516 h 2093120"/>
-                <a:gd name="connsiteX8" fmla="*/ 399512 w 799024"/>
-                <a:gd name="connsiteY8" fmla="*/ 2093120 h 2093120"/>
-                <a:gd name="connsiteX9" fmla="*/ 0 w 799024"/>
-                <a:gd name="connsiteY9" fmla="*/ 1712516 h 2093120"/>
-                <a:gd name="connsiteX10" fmla="*/ 7665 w 799024"/>
-                <a:gd name="connsiteY10" fmla="*/ 1640078 h 2093120"/>
-                <a:gd name="connsiteX11" fmla="*/ 0 w 799024"/>
-                <a:gd name="connsiteY11" fmla="*/ 1605968 h 2093120"/>
-                <a:gd name="connsiteX12" fmla="*/ 0 w 799024"/>
-                <a:gd name="connsiteY12" fmla="*/ 423353 h 2093120"/>
-                <a:gd name="connsiteX13" fmla="*/ 2706 w 799024"/>
-                <a:gd name="connsiteY13" fmla="*/ 399240 h 2093120"/>
-                <a:gd name="connsiteX14" fmla="*/ 4078 w 799024"/>
-                <a:gd name="connsiteY14" fmla="*/ 395269 h 2093120"/>
-                <a:gd name="connsiteX15" fmla="*/ 0 w 799024"/>
-                <a:gd name="connsiteY15" fmla="*/ 358927 h 2093120"/>
-                <a:gd name="connsiteX16" fmla="*/ 399512 w 799024"/>
-                <a:gd name="connsiteY16" fmla="*/ 0 h 2093120"/>
-              </a:gdLst>
-              <a:ahLst/>
-              <a:cxnLst>
-                <a:cxn ang="0">
-                  <a:pos x="connsiteX0" y="connsiteY0"/>
-                </a:cxn>
-                <a:cxn ang="0">
-                  <a:pos x="connsiteX1" y="connsiteY1"/>
-                </a:cxn>
-                <a:cxn ang="0">
-                  <a:pos x="connsiteX2" y="connsiteY2"/>
-                </a:cxn>
-                <a:cxn ang="0">
-                  <a:pos x="connsiteX3" y="connsiteY3"/>
-                </a:cxn>
-                <a:cxn ang="0">
-                  <a:pos x="connsiteX4" y="connsiteY4"/>
-                </a:cxn>
-                <a:cxn ang="0">
-                  <a:pos x="connsiteX5" y="connsiteY5"/>
-                </a:cxn>
-                <a:cxn ang="0">
-                  <a:pos x="connsiteX6" y="connsiteY6"/>
-                </a:cxn>
-                <a:cxn ang="0">
-                  <a:pos x="connsiteX7" y="connsiteY7"/>
-                </a:cxn>
-                <a:cxn ang="0">
-                  <a:pos x="connsiteX8" y="connsiteY8"/>
-                </a:cxn>
-                <a:cxn ang="0">
-                  <a:pos x="connsiteX9" y="connsiteY9"/>
-                </a:cxn>
-                <a:cxn ang="0">
-                  <a:pos x="connsiteX10" y="connsiteY10"/>
-                </a:cxn>
-                <a:cxn ang="0">
-                  <a:pos x="connsiteX11" y="connsiteY11"/>
-                </a:cxn>
-                <a:cxn ang="0">
-                  <a:pos x="connsiteX12" y="connsiteY12"/>
-                </a:cxn>
-                <a:cxn ang="0">
-                  <a:pos x="connsiteX13" y="connsiteY13"/>
-                </a:cxn>
-                <a:cxn ang="0">
-                  <a:pos x="connsiteX14" y="connsiteY14"/>
-                </a:cxn>
-                <a:cxn ang="0">
-                  <a:pos x="connsiteX15" y="connsiteY15"/>
-                </a:cxn>
-                <a:cxn ang="0">
-                  <a:pos x="connsiteX16" y="connsiteY16"/>
-                </a:cxn>
-              </a:cxnLst>
-              <a:rect l="l" t="t" r="r" b="b"/>
-              <a:pathLst>
-                <a:path w="799024" h="2093120">
-                  <a:moveTo>
-                    <a:pt x="399512" y="0"/>
-                  </a:moveTo>
-                  <a:cubicBezTo>
-                    <a:pt x="620156" y="0"/>
-                    <a:pt x="799024" y="160697"/>
-                    <a:pt x="799024" y="358927"/>
-                  </a:cubicBezTo>
-                  <a:lnTo>
-                    <a:pt x="794947" y="395269"/>
-                  </a:lnTo>
-                  <a:lnTo>
-                    <a:pt x="796319" y="399240"/>
-                  </a:lnTo>
-                  <a:cubicBezTo>
-                    <a:pt x="798092" y="407029"/>
-                    <a:pt x="799024" y="415093"/>
-                    <a:pt x="799024" y="423353"/>
-                  </a:cubicBezTo>
-                  <a:lnTo>
-                    <a:pt x="799024" y="1605968"/>
-                  </a:lnTo>
-                  <a:lnTo>
-                    <a:pt x="791359" y="1640078"/>
-                  </a:lnTo>
-                  <a:lnTo>
-                    <a:pt x="799024" y="1712516"/>
-                  </a:lnTo>
-                  <a:cubicBezTo>
-                    <a:pt x="799024" y="1922718"/>
-                    <a:pt x="620156" y="2093120"/>
-                    <a:pt x="399512" y="2093120"/>
-                  </a:cubicBezTo>
-                  <a:cubicBezTo>
-                    <a:pt x="178868" y="2093120"/>
-                    <a:pt x="0" y="1922718"/>
-                    <a:pt x="0" y="1712516"/>
-                  </a:cubicBezTo>
-                  <a:lnTo>
-                    <a:pt x="7665" y="1640078"/>
-                  </a:lnTo>
-                  <a:lnTo>
-                    <a:pt x="0" y="1605968"/>
-                  </a:lnTo>
-                  <a:lnTo>
-                    <a:pt x="0" y="423353"/>
-                  </a:lnTo>
-                  <a:cubicBezTo>
-                    <a:pt x="0" y="415093"/>
-                    <a:pt x="932" y="407029"/>
-                    <a:pt x="2706" y="399240"/>
-                  </a:cubicBezTo>
-                  <a:lnTo>
-                    <a:pt x="4078" y="395269"/>
-                  </a:lnTo>
-                  <a:lnTo>
-                    <a:pt x="0" y="358927"/>
-                  </a:lnTo>
-                  <a:cubicBezTo>
-                    <a:pt x="0" y="160697"/>
-                    <a:pt x="178868" y="0"/>
-                    <a:pt x="399512" y="0"/>
-                  </a:cubicBezTo>
-                  <a:close/>
-                </a:path>
-              </a:pathLst>
-            </a:custGeom>
-            <a:ln>
-              <a:noFill/>
-            </a:ln>
-            <a:effectLst>
-              <a:outerShdw blurRad="190500" dist="228600" dir="2700000" algn="ctr">
-                <a:srgbClr val="000000">
-                  <a:alpha val="30000"/>
-                </a:srgbClr>
-              </a:outerShdw>
-            </a:effectLst>
-            <a:scene3d>
-              <a:camera prst="orthographicFront">
-                <a:rot lat="0" lon="0" rev="0"/>
-              </a:camera>
-              <a:lightRig rig="glow" dir="t">
-                <a:rot lat="0" lon="0" rev="4800000"/>
-              </a:lightRig>
-            </a:scene3d>
-            <a:sp3d prstMaterial="matte">
-              <a:bevelT w="127000" h="63500"/>
-            </a:sp3d>
-          </p:spPr>
-          <p:style>
-            <a:lnRef idx="2">
-              <a:schemeClr val="accent1">
-                <a:shade val="50000"/>
-              </a:schemeClr>
-            </a:lnRef>
-            <a:fillRef idx="1">
-              <a:schemeClr val="accent1"/>
-            </a:fillRef>
-            <a:effectRef idx="0">
-              <a:schemeClr val="accent1"/>
-            </a:effectRef>
-            <a:fontRef idx="minor">
-              <a:schemeClr val="lt1"/>
-            </a:fontRef>
-          </p:style>
-          <p:txBody>
-            <a:bodyPr rtlCol="0" anchor="ctr"/>
-            <a:lstStyle/>
-            <a:p>
-              <a:pPr algn="ctr"/>
-              <a:endParaRPr lang="en-IN" dirty="0"/>
-            </a:p>
-          </p:txBody>
-        </p:sp>
-        <p:sp>
-          <p:nvSpPr>
-            <p:cNvPr id="24" name="Oval 23"/>
-            <p:cNvSpPr/>
-            <p:nvPr/>
-          </p:nvSpPr>
-          <p:spPr>
-            <a:xfrm>
-              <a:off x="9411776" y="3725695"/>
-              <a:ext cx="799024" cy="401805"/>
-            </a:xfrm>
-            <a:prstGeom prst="ellipse">
-              <a:avLst/>
-            </a:prstGeom>
-            <a:ln>
-              <a:noFill/>
-            </a:ln>
-            <a:effectLst>
-              <a:outerShdw blurRad="190500" dist="228600" dir="2700000" algn="ctr">
-                <a:srgbClr val="000000">
-                  <a:alpha val="30000"/>
-                </a:srgbClr>
-              </a:outerShdw>
-            </a:effectLst>
-            <a:scene3d>
-              <a:camera prst="orthographicFront">
-                <a:rot lat="0" lon="0" rev="0"/>
-              </a:camera>
-              <a:lightRig rig="glow" dir="t">
-                <a:rot lat="0" lon="0" rev="4800000"/>
-              </a:lightRig>
-            </a:scene3d>
-            <a:sp3d prstMaterial="matte">
-              <a:bevelT w="127000" h="63500"/>
-            </a:sp3d>
-          </p:spPr>
-          <p:style>
-            <a:lnRef idx="2">
-              <a:schemeClr val="accent1">
-                <a:shade val="50000"/>
-              </a:schemeClr>
-            </a:lnRef>
-            <a:fillRef idx="1">
-              <a:schemeClr val="accent1"/>
-            </a:fillRef>
-            <a:effectRef idx="0">
-              <a:schemeClr val="accent1"/>
-            </a:effectRef>
-            <a:fontRef idx="minor">
-              <a:schemeClr val="lt1"/>
-            </a:fontRef>
-          </p:style>
-          <p:txBody>
-            <a:bodyPr rtlCol="0" anchor="ctr"/>
-            <a:lstStyle/>
-            <a:p>
-              <a:pPr algn="ctr"/>
-              <a:endParaRPr lang="en-IN"/>
-            </a:p>
-          </p:txBody>
-        </p:sp>
-      </p:grpSp>
-      <p:grpSp>
-        <p:nvGrpSpPr>
-          <p:cNvPr id="25" name="Group 24"/>
-          <p:cNvGrpSpPr/>
-          <p:nvPr/>
-        </p:nvGrpSpPr>
-        <p:grpSpPr>
-          <a:xfrm>
-            <a:off x="6031692" y="2793693"/>
-            <a:ext cx="317769" cy="1648132"/>
-            <a:chOff x="9411776" y="2021680"/>
-            <a:chExt cx="799024" cy="2105820"/>
-          </a:xfrm>
-        </p:grpSpPr>
-        <p:sp>
-          <p:nvSpPr>
-            <p:cNvPr id="26" name="Freeform 25"/>
-            <p:cNvSpPr/>
-            <p:nvPr/>
-          </p:nvSpPr>
-          <p:spPr>
-            <a:xfrm>
-              <a:off x="9411776" y="2021680"/>
-              <a:ext cx="799024" cy="2093120"/>
-            </a:xfrm>
-            <a:custGeom>
-              <a:avLst/>
-              <a:gdLst>
-                <a:gd name="connsiteX0" fmla="*/ 399512 w 799024"/>
-                <a:gd name="connsiteY0" fmla="*/ 0 h 2093120"/>
-                <a:gd name="connsiteX1" fmla="*/ 799024 w 799024"/>
-                <a:gd name="connsiteY1" fmla="*/ 358927 h 2093120"/>
-                <a:gd name="connsiteX2" fmla="*/ 794947 w 799024"/>
-                <a:gd name="connsiteY2" fmla="*/ 395269 h 2093120"/>
-                <a:gd name="connsiteX3" fmla="*/ 796319 w 799024"/>
-                <a:gd name="connsiteY3" fmla="*/ 399240 h 2093120"/>
-                <a:gd name="connsiteX4" fmla="*/ 799024 w 799024"/>
-                <a:gd name="connsiteY4" fmla="*/ 423353 h 2093120"/>
-                <a:gd name="connsiteX5" fmla="*/ 799024 w 799024"/>
-                <a:gd name="connsiteY5" fmla="*/ 1605968 h 2093120"/>
-                <a:gd name="connsiteX6" fmla="*/ 791359 w 799024"/>
-                <a:gd name="connsiteY6" fmla="*/ 1640078 h 2093120"/>
-                <a:gd name="connsiteX7" fmla="*/ 799024 w 799024"/>
-                <a:gd name="connsiteY7" fmla="*/ 1712516 h 2093120"/>
-                <a:gd name="connsiteX8" fmla="*/ 399512 w 799024"/>
-                <a:gd name="connsiteY8" fmla="*/ 2093120 h 2093120"/>
-                <a:gd name="connsiteX9" fmla="*/ 0 w 799024"/>
-                <a:gd name="connsiteY9" fmla="*/ 1712516 h 2093120"/>
-                <a:gd name="connsiteX10" fmla="*/ 7665 w 799024"/>
-                <a:gd name="connsiteY10" fmla="*/ 1640078 h 2093120"/>
-                <a:gd name="connsiteX11" fmla="*/ 0 w 799024"/>
-                <a:gd name="connsiteY11" fmla="*/ 1605968 h 2093120"/>
-                <a:gd name="connsiteX12" fmla="*/ 0 w 799024"/>
-                <a:gd name="connsiteY12" fmla="*/ 423353 h 2093120"/>
-                <a:gd name="connsiteX13" fmla="*/ 2706 w 799024"/>
-                <a:gd name="connsiteY13" fmla="*/ 399240 h 2093120"/>
-                <a:gd name="connsiteX14" fmla="*/ 4078 w 799024"/>
-                <a:gd name="connsiteY14" fmla="*/ 395269 h 2093120"/>
-                <a:gd name="connsiteX15" fmla="*/ 0 w 799024"/>
-                <a:gd name="connsiteY15" fmla="*/ 358927 h 2093120"/>
-                <a:gd name="connsiteX16" fmla="*/ 399512 w 799024"/>
-                <a:gd name="connsiteY16" fmla="*/ 0 h 2093120"/>
-              </a:gdLst>
-              <a:ahLst/>
-              <a:cxnLst>
-                <a:cxn ang="0">
-                  <a:pos x="connsiteX0" y="connsiteY0"/>
-                </a:cxn>
-                <a:cxn ang="0">
-                  <a:pos x="connsiteX1" y="connsiteY1"/>
-                </a:cxn>
-                <a:cxn ang="0">
-                  <a:pos x="connsiteX2" y="connsiteY2"/>
-                </a:cxn>
-                <a:cxn ang="0">
-                  <a:pos x="connsiteX3" y="connsiteY3"/>
-                </a:cxn>
-                <a:cxn ang="0">
-                  <a:pos x="connsiteX4" y="connsiteY4"/>
-                </a:cxn>
-                <a:cxn ang="0">
-                  <a:pos x="connsiteX5" y="connsiteY5"/>
-                </a:cxn>
-                <a:cxn ang="0">
-                  <a:pos x="connsiteX6" y="connsiteY6"/>
-                </a:cxn>
-                <a:cxn ang="0">
-                  <a:pos x="connsiteX7" y="connsiteY7"/>
-                </a:cxn>
-                <a:cxn ang="0">
-                  <a:pos x="connsiteX8" y="connsiteY8"/>
-                </a:cxn>
-                <a:cxn ang="0">
-                  <a:pos x="connsiteX9" y="connsiteY9"/>
-                </a:cxn>
-                <a:cxn ang="0">
-                  <a:pos x="connsiteX10" y="connsiteY10"/>
-                </a:cxn>
-                <a:cxn ang="0">
-                  <a:pos x="connsiteX11" y="connsiteY11"/>
-                </a:cxn>
-                <a:cxn ang="0">
-                  <a:pos x="connsiteX12" y="connsiteY12"/>
-                </a:cxn>
-                <a:cxn ang="0">
-                  <a:pos x="connsiteX13" y="connsiteY13"/>
-                </a:cxn>
-                <a:cxn ang="0">
-                  <a:pos x="connsiteX14" y="connsiteY14"/>
-                </a:cxn>
-                <a:cxn ang="0">
-                  <a:pos x="connsiteX15" y="connsiteY15"/>
-                </a:cxn>
-                <a:cxn ang="0">
-                  <a:pos x="connsiteX16" y="connsiteY16"/>
-                </a:cxn>
-              </a:cxnLst>
-              <a:rect l="l" t="t" r="r" b="b"/>
-              <a:pathLst>
-                <a:path w="799024" h="2093120">
-                  <a:moveTo>
-                    <a:pt x="399512" y="0"/>
-                  </a:moveTo>
-                  <a:cubicBezTo>
-                    <a:pt x="620156" y="0"/>
-                    <a:pt x="799024" y="160697"/>
-                    <a:pt x="799024" y="358927"/>
-                  </a:cubicBezTo>
-                  <a:lnTo>
-                    <a:pt x="794947" y="395269"/>
-                  </a:lnTo>
-                  <a:lnTo>
-                    <a:pt x="796319" y="399240"/>
-                  </a:lnTo>
-                  <a:cubicBezTo>
-                    <a:pt x="798092" y="407029"/>
-                    <a:pt x="799024" y="415093"/>
-                    <a:pt x="799024" y="423353"/>
-                  </a:cubicBezTo>
-                  <a:lnTo>
-                    <a:pt x="799024" y="1605968"/>
-                  </a:lnTo>
-                  <a:lnTo>
-                    <a:pt x="791359" y="1640078"/>
-                  </a:lnTo>
-                  <a:lnTo>
-                    <a:pt x="799024" y="1712516"/>
-                  </a:lnTo>
-                  <a:cubicBezTo>
-                    <a:pt x="799024" y="1922718"/>
-                    <a:pt x="620156" y="2093120"/>
-                    <a:pt x="399512" y="2093120"/>
-                  </a:cubicBezTo>
-                  <a:cubicBezTo>
-                    <a:pt x="178868" y="2093120"/>
-                    <a:pt x="0" y="1922718"/>
-                    <a:pt x="0" y="1712516"/>
-                  </a:cubicBezTo>
-                  <a:lnTo>
-                    <a:pt x="7665" y="1640078"/>
-                  </a:lnTo>
-                  <a:lnTo>
-                    <a:pt x="0" y="1605968"/>
-                  </a:lnTo>
-                  <a:lnTo>
-                    <a:pt x="0" y="423353"/>
-                  </a:lnTo>
-                  <a:cubicBezTo>
-                    <a:pt x="0" y="415093"/>
-                    <a:pt x="932" y="407029"/>
-                    <a:pt x="2706" y="399240"/>
-                  </a:cubicBezTo>
-                  <a:lnTo>
-                    <a:pt x="4078" y="395269"/>
-                  </a:lnTo>
-                  <a:lnTo>
-                    <a:pt x="0" y="358927"/>
-                  </a:lnTo>
-                  <a:cubicBezTo>
-                    <a:pt x="0" y="160697"/>
-                    <a:pt x="178868" y="0"/>
-                    <a:pt x="399512" y="0"/>
-                  </a:cubicBezTo>
-                  <a:close/>
-                </a:path>
-              </a:pathLst>
-            </a:custGeom>
-            <a:ln>
-              <a:noFill/>
-            </a:ln>
-            <a:effectLst>
-              <a:outerShdw blurRad="190500" dist="228600" dir="2700000" algn="ctr">
-                <a:srgbClr val="000000">
-                  <a:alpha val="30000"/>
-                </a:srgbClr>
-              </a:outerShdw>
-            </a:effectLst>
-            <a:scene3d>
-              <a:camera prst="orthographicFront">
-                <a:rot lat="0" lon="0" rev="0"/>
-              </a:camera>
-              <a:lightRig rig="glow" dir="t">
-                <a:rot lat="0" lon="0" rev="4800000"/>
-              </a:lightRig>
-            </a:scene3d>
-            <a:sp3d prstMaterial="matte">
-              <a:bevelT w="127000" h="63500"/>
-            </a:sp3d>
-          </p:spPr>
-          <p:style>
-            <a:lnRef idx="2">
-              <a:schemeClr val="accent1">
-                <a:shade val="50000"/>
-              </a:schemeClr>
-            </a:lnRef>
-            <a:fillRef idx="1">
-              <a:schemeClr val="accent1"/>
-            </a:fillRef>
-            <a:effectRef idx="0">
-              <a:schemeClr val="accent1"/>
-            </a:effectRef>
-            <a:fontRef idx="minor">
-              <a:schemeClr val="lt1"/>
-            </a:fontRef>
-          </p:style>
-          <p:txBody>
-            <a:bodyPr rtlCol="0" anchor="ctr"/>
-            <a:lstStyle/>
-            <a:p>
-              <a:pPr algn="ctr"/>
-              <a:endParaRPr lang="en-IN" dirty="0"/>
-            </a:p>
-          </p:txBody>
-        </p:sp>
-        <p:sp>
-          <p:nvSpPr>
-            <p:cNvPr id="27" name="Oval 26"/>
-            <p:cNvSpPr/>
-            <p:nvPr/>
-          </p:nvSpPr>
-          <p:spPr>
-            <a:xfrm>
-              <a:off x="9411776" y="3725695"/>
-              <a:ext cx="799024" cy="401805"/>
-            </a:xfrm>
-            <a:prstGeom prst="ellipse">
-              <a:avLst/>
-            </a:prstGeom>
-            <a:ln>
-              <a:noFill/>
-            </a:ln>
-            <a:effectLst>
-              <a:outerShdw blurRad="190500" dist="228600" dir="2700000" algn="ctr">
-                <a:srgbClr val="000000">
-                  <a:alpha val="30000"/>
-                </a:srgbClr>
-              </a:outerShdw>
-            </a:effectLst>
-            <a:scene3d>
-              <a:camera prst="orthographicFront">
-                <a:rot lat="0" lon="0" rev="0"/>
-              </a:camera>
-              <a:lightRig rig="glow" dir="t">
-                <a:rot lat="0" lon="0" rev="4800000"/>
-              </a:lightRig>
-            </a:scene3d>
-            <a:sp3d prstMaterial="matte">
-              <a:bevelT w="127000" h="63500"/>
-            </a:sp3d>
-          </p:spPr>
-          <p:style>
-            <a:lnRef idx="2">
-              <a:schemeClr val="accent1">
-                <a:shade val="50000"/>
-              </a:schemeClr>
-            </a:lnRef>
-            <a:fillRef idx="1">
-              <a:schemeClr val="accent1"/>
-            </a:fillRef>
-            <a:effectRef idx="0">
-              <a:schemeClr val="accent1"/>
-            </a:effectRef>
-            <a:fontRef idx="minor">
-              <a:schemeClr val="lt1"/>
-            </a:fontRef>
-          </p:style>
-          <p:txBody>
-            <a:bodyPr rtlCol="0" anchor="ctr"/>
-            <a:lstStyle/>
-            <a:p>
-              <a:pPr algn="ctr"/>
-              <a:endParaRPr lang="en-IN"/>
-            </a:p>
-          </p:txBody>
-        </p:sp>
-      </p:grpSp>
-      <p:grpSp>
-        <p:nvGrpSpPr>
-          <p:cNvPr id="28" name="Group 27"/>
-          <p:cNvGrpSpPr/>
-          <p:nvPr/>
-        </p:nvGrpSpPr>
-        <p:grpSpPr>
-          <a:xfrm>
-            <a:off x="6812878" y="2964496"/>
-            <a:ext cx="305338" cy="1270001"/>
-            <a:chOff x="9411776" y="2021680"/>
-            <a:chExt cx="799024" cy="2105820"/>
-          </a:xfrm>
-        </p:grpSpPr>
-        <p:sp>
-          <p:nvSpPr>
-            <p:cNvPr id="29" name="Freeform 28"/>
-            <p:cNvSpPr/>
-            <p:nvPr/>
-          </p:nvSpPr>
-          <p:spPr>
-            <a:xfrm>
-              <a:off x="9411776" y="2021680"/>
-              <a:ext cx="799024" cy="2093120"/>
-            </a:xfrm>
-            <a:custGeom>
-              <a:avLst/>
-              <a:gdLst>
-                <a:gd name="connsiteX0" fmla="*/ 399512 w 799024"/>
-                <a:gd name="connsiteY0" fmla="*/ 0 h 2093120"/>
-                <a:gd name="connsiteX1" fmla="*/ 799024 w 799024"/>
-                <a:gd name="connsiteY1" fmla="*/ 358927 h 2093120"/>
-                <a:gd name="connsiteX2" fmla="*/ 794947 w 799024"/>
-                <a:gd name="connsiteY2" fmla="*/ 395269 h 2093120"/>
-                <a:gd name="connsiteX3" fmla="*/ 796319 w 799024"/>
-                <a:gd name="connsiteY3" fmla="*/ 399240 h 2093120"/>
-                <a:gd name="connsiteX4" fmla="*/ 799024 w 799024"/>
-                <a:gd name="connsiteY4" fmla="*/ 423353 h 2093120"/>
-                <a:gd name="connsiteX5" fmla="*/ 799024 w 799024"/>
-                <a:gd name="connsiteY5" fmla="*/ 1605968 h 2093120"/>
-                <a:gd name="connsiteX6" fmla="*/ 791359 w 799024"/>
-                <a:gd name="connsiteY6" fmla="*/ 1640078 h 2093120"/>
-                <a:gd name="connsiteX7" fmla="*/ 799024 w 799024"/>
-                <a:gd name="connsiteY7" fmla="*/ 1712516 h 2093120"/>
-                <a:gd name="connsiteX8" fmla="*/ 399512 w 799024"/>
-                <a:gd name="connsiteY8" fmla="*/ 2093120 h 2093120"/>
-                <a:gd name="connsiteX9" fmla="*/ 0 w 799024"/>
-                <a:gd name="connsiteY9" fmla="*/ 1712516 h 2093120"/>
-                <a:gd name="connsiteX10" fmla="*/ 7665 w 799024"/>
-                <a:gd name="connsiteY10" fmla="*/ 1640078 h 2093120"/>
-                <a:gd name="connsiteX11" fmla="*/ 0 w 799024"/>
-                <a:gd name="connsiteY11" fmla="*/ 1605968 h 2093120"/>
-                <a:gd name="connsiteX12" fmla="*/ 0 w 799024"/>
-                <a:gd name="connsiteY12" fmla="*/ 423353 h 2093120"/>
-                <a:gd name="connsiteX13" fmla="*/ 2706 w 799024"/>
-                <a:gd name="connsiteY13" fmla="*/ 399240 h 2093120"/>
-                <a:gd name="connsiteX14" fmla="*/ 4078 w 799024"/>
-                <a:gd name="connsiteY14" fmla="*/ 395269 h 2093120"/>
-                <a:gd name="connsiteX15" fmla="*/ 0 w 799024"/>
-                <a:gd name="connsiteY15" fmla="*/ 358927 h 2093120"/>
-                <a:gd name="connsiteX16" fmla="*/ 399512 w 799024"/>
-                <a:gd name="connsiteY16" fmla="*/ 0 h 2093120"/>
-              </a:gdLst>
-              <a:ahLst/>
-              <a:cxnLst>
-                <a:cxn ang="0">
-                  <a:pos x="connsiteX0" y="connsiteY0"/>
-                </a:cxn>
-                <a:cxn ang="0">
-                  <a:pos x="connsiteX1" y="connsiteY1"/>
-                </a:cxn>
-                <a:cxn ang="0">
-                  <a:pos x="connsiteX2" y="connsiteY2"/>
-                </a:cxn>
-                <a:cxn ang="0">
-                  <a:pos x="connsiteX3" y="connsiteY3"/>
-                </a:cxn>
-                <a:cxn ang="0">
-                  <a:pos x="connsiteX4" y="connsiteY4"/>
-                </a:cxn>
-                <a:cxn ang="0">
-                  <a:pos x="connsiteX5" y="connsiteY5"/>
-                </a:cxn>
-                <a:cxn ang="0">
-                  <a:pos x="connsiteX6" y="connsiteY6"/>
-                </a:cxn>
-                <a:cxn ang="0">
-                  <a:pos x="connsiteX7" y="connsiteY7"/>
-                </a:cxn>
-                <a:cxn ang="0">
-                  <a:pos x="connsiteX8" y="connsiteY8"/>
-                </a:cxn>
-                <a:cxn ang="0">
-                  <a:pos x="connsiteX9" y="connsiteY9"/>
-                </a:cxn>
-                <a:cxn ang="0">
-                  <a:pos x="connsiteX10" y="connsiteY10"/>
-                </a:cxn>
-                <a:cxn ang="0">
-                  <a:pos x="connsiteX11" y="connsiteY11"/>
-                </a:cxn>
-                <a:cxn ang="0">
-                  <a:pos x="connsiteX12" y="connsiteY12"/>
-                </a:cxn>
-                <a:cxn ang="0">
-                  <a:pos x="connsiteX13" y="connsiteY13"/>
-                </a:cxn>
-                <a:cxn ang="0">
-                  <a:pos x="connsiteX14" y="connsiteY14"/>
-                </a:cxn>
-                <a:cxn ang="0">
-                  <a:pos x="connsiteX15" y="connsiteY15"/>
-                </a:cxn>
-                <a:cxn ang="0">
-                  <a:pos x="connsiteX16" y="connsiteY16"/>
-                </a:cxn>
-              </a:cxnLst>
-              <a:rect l="l" t="t" r="r" b="b"/>
-              <a:pathLst>
-                <a:path w="799024" h="2093120">
-                  <a:moveTo>
-                    <a:pt x="399512" y="0"/>
-                  </a:moveTo>
-                  <a:cubicBezTo>
-                    <a:pt x="620156" y="0"/>
-                    <a:pt x="799024" y="160697"/>
-                    <a:pt x="799024" y="358927"/>
-                  </a:cubicBezTo>
-                  <a:lnTo>
-                    <a:pt x="794947" y="395269"/>
-                  </a:lnTo>
-                  <a:lnTo>
-                    <a:pt x="796319" y="399240"/>
-                  </a:lnTo>
-                  <a:cubicBezTo>
-                    <a:pt x="798092" y="407029"/>
-                    <a:pt x="799024" y="415093"/>
-                    <a:pt x="799024" y="423353"/>
-                  </a:cubicBezTo>
-                  <a:lnTo>
-                    <a:pt x="799024" y="1605968"/>
-                  </a:lnTo>
-                  <a:lnTo>
-                    <a:pt x="791359" y="1640078"/>
-                  </a:lnTo>
-                  <a:lnTo>
-                    <a:pt x="799024" y="1712516"/>
-                  </a:lnTo>
-                  <a:cubicBezTo>
-                    <a:pt x="799024" y="1922718"/>
-                    <a:pt x="620156" y="2093120"/>
-                    <a:pt x="399512" y="2093120"/>
-                  </a:cubicBezTo>
-                  <a:cubicBezTo>
-                    <a:pt x="178868" y="2093120"/>
-                    <a:pt x="0" y="1922718"/>
-                    <a:pt x="0" y="1712516"/>
-                  </a:cubicBezTo>
-                  <a:lnTo>
-                    <a:pt x="7665" y="1640078"/>
-                  </a:lnTo>
-                  <a:lnTo>
-                    <a:pt x="0" y="1605968"/>
-                  </a:lnTo>
-                  <a:lnTo>
-                    <a:pt x="0" y="423353"/>
-                  </a:lnTo>
-                  <a:cubicBezTo>
-                    <a:pt x="0" y="415093"/>
-                    <a:pt x="932" y="407029"/>
-                    <a:pt x="2706" y="399240"/>
-                  </a:cubicBezTo>
-                  <a:lnTo>
-                    <a:pt x="4078" y="395269"/>
-                  </a:lnTo>
-                  <a:lnTo>
-                    <a:pt x="0" y="358927"/>
-                  </a:lnTo>
-                  <a:cubicBezTo>
-                    <a:pt x="0" y="160697"/>
-                    <a:pt x="178868" y="0"/>
-                    <a:pt x="399512" y="0"/>
-                  </a:cubicBezTo>
-                  <a:close/>
-                </a:path>
-              </a:pathLst>
-            </a:custGeom>
-            <a:ln>
-              <a:noFill/>
-            </a:ln>
-            <a:effectLst>
-              <a:outerShdw blurRad="190500" dist="228600" dir="2700000" algn="ctr">
-                <a:srgbClr val="000000">
-                  <a:alpha val="30000"/>
-                </a:srgbClr>
-              </a:outerShdw>
-            </a:effectLst>
-            <a:scene3d>
-              <a:camera prst="orthographicFront">
-                <a:rot lat="0" lon="0" rev="0"/>
-              </a:camera>
-              <a:lightRig rig="glow" dir="t">
-                <a:rot lat="0" lon="0" rev="4800000"/>
-              </a:lightRig>
-            </a:scene3d>
-            <a:sp3d prstMaterial="matte">
-              <a:bevelT w="127000" h="63500"/>
-            </a:sp3d>
-          </p:spPr>
-          <p:style>
-            <a:lnRef idx="2">
-              <a:schemeClr val="accent1">
-                <a:shade val="50000"/>
-              </a:schemeClr>
-            </a:lnRef>
-            <a:fillRef idx="1">
-              <a:schemeClr val="accent1"/>
-            </a:fillRef>
-            <a:effectRef idx="0">
-              <a:schemeClr val="accent1"/>
-            </a:effectRef>
-            <a:fontRef idx="minor">
-              <a:schemeClr val="lt1"/>
-            </a:fontRef>
-          </p:style>
-          <p:txBody>
-            <a:bodyPr rtlCol="0" anchor="ctr"/>
-            <a:lstStyle/>
-            <a:p>
-              <a:pPr algn="ctr"/>
-              <a:endParaRPr lang="en-IN" dirty="0"/>
-            </a:p>
-          </p:txBody>
-        </p:sp>
-        <p:sp>
-          <p:nvSpPr>
-            <p:cNvPr id="30" name="Oval 29"/>
-            <p:cNvSpPr/>
-            <p:nvPr/>
-          </p:nvSpPr>
-          <p:spPr>
-            <a:xfrm>
-              <a:off x="9411776" y="3725695"/>
-              <a:ext cx="799024" cy="401805"/>
-            </a:xfrm>
-            <a:prstGeom prst="ellipse">
-              <a:avLst/>
-            </a:prstGeom>
-            <a:ln>
-              <a:noFill/>
-            </a:ln>
-            <a:effectLst>
-              <a:outerShdw blurRad="190500" dist="228600" dir="2700000" algn="ctr">
-                <a:srgbClr val="000000">
-                  <a:alpha val="30000"/>
-                </a:srgbClr>
-              </a:outerShdw>
-            </a:effectLst>
-            <a:scene3d>
-              <a:camera prst="orthographicFront">
-                <a:rot lat="0" lon="0" rev="0"/>
-              </a:camera>
-              <a:lightRig rig="glow" dir="t">
-                <a:rot lat="0" lon="0" rev="4800000"/>
-              </a:lightRig>
-            </a:scene3d>
-            <a:sp3d prstMaterial="matte">
-              <a:bevelT w="127000" h="63500"/>
-            </a:sp3d>
-          </p:spPr>
-          <p:style>
-            <a:lnRef idx="2">
-              <a:schemeClr val="accent1">
-                <a:shade val="50000"/>
-              </a:schemeClr>
-            </a:lnRef>
-            <a:fillRef idx="1">
-              <a:schemeClr val="accent1"/>
-            </a:fillRef>
-            <a:effectRef idx="0">
-              <a:schemeClr val="accent1"/>
-            </a:effectRef>
-            <a:fontRef idx="minor">
-              <a:schemeClr val="lt1"/>
-            </a:fontRef>
-          </p:style>
-          <p:txBody>
-            <a:bodyPr rtlCol="0" anchor="ctr"/>
-            <a:lstStyle/>
-            <a:p>
-              <a:pPr algn="ctr"/>
-              <a:endParaRPr lang="en-IN"/>
-            </a:p>
-          </p:txBody>
-        </p:sp>
-      </p:grpSp>
-      <p:grpSp>
-        <p:nvGrpSpPr>
-          <p:cNvPr id="31" name="Group 30"/>
-          <p:cNvGrpSpPr/>
-          <p:nvPr/>
-        </p:nvGrpSpPr>
-        <p:grpSpPr>
-          <a:xfrm>
-            <a:off x="7430308" y="3154680"/>
-            <a:ext cx="240222" cy="895033"/>
-            <a:chOff x="9411776" y="2021680"/>
-            <a:chExt cx="799024" cy="2105820"/>
-          </a:xfrm>
-        </p:grpSpPr>
-        <p:sp>
-          <p:nvSpPr>
-            <p:cNvPr id="32" name="Freeform 31"/>
-            <p:cNvSpPr/>
-            <p:nvPr/>
-          </p:nvSpPr>
-          <p:spPr>
-            <a:xfrm>
-              <a:off x="9411776" y="2021680"/>
-              <a:ext cx="799024" cy="2093120"/>
-            </a:xfrm>
-            <a:custGeom>
-              <a:avLst/>
-              <a:gdLst>
-                <a:gd name="connsiteX0" fmla="*/ 399512 w 799024"/>
-                <a:gd name="connsiteY0" fmla="*/ 0 h 2093120"/>
-                <a:gd name="connsiteX1" fmla="*/ 799024 w 799024"/>
-                <a:gd name="connsiteY1" fmla="*/ 358927 h 2093120"/>
-                <a:gd name="connsiteX2" fmla="*/ 794947 w 799024"/>
-                <a:gd name="connsiteY2" fmla="*/ 395269 h 2093120"/>
-                <a:gd name="connsiteX3" fmla="*/ 796319 w 799024"/>
-                <a:gd name="connsiteY3" fmla="*/ 399240 h 2093120"/>
-                <a:gd name="connsiteX4" fmla="*/ 799024 w 799024"/>
-                <a:gd name="connsiteY4" fmla="*/ 423353 h 2093120"/>
-                <a:gd name="connsiteX5" fmla="*/ 799024 w 799024"/>
-                <a:gd name="connsiteY5" fmla="*/ 1605968 h 2093120"/>
-                <a:gd name="connsiteX6" fmla="*/ 791359 w 799024"/>
-                <a:gd name="connsiteY6" fmla="*/ 1640078 h 2093120"/>
-                <a:gd name="connsiteX7" fmla="*/ 799024 w 799024"/>
-                <a:gd name="connsiteY7" fmla="*/ 1712516 h 2093120"/>
-                <a:gd name="connsiteX8" fmla="*/ 399512 w 799024"/>
-                <a:gd name="connsiteY8" fmla="*/ 2093120 h 2093120"/>
-                <a:gd name="connsiteX9" fmla="*/ 0 w 799024"/>
-                <a:gd name="connsiteY9" fmla="*/ 1712516 h 2093120"/>
-                <a:gd name="connsiteX10" fmla="*/ 7665 w 799024"/>
-                <a:gd name="connsiteY10" fmla="*/ 1640078 h 2093120"/>
-                <a:gd name="connsiteX11" fmla="*/ 0 w 799024"/>
-                <a:gd name="connsiteY11" fmla="*/ 1605968 h 2093120"/>
-                <a:gd name="connsiteX12" fmla="*/ 0 w 799024"/>
-                <a:gd name="connsiteY12" fmla="*/ 423353 h 2093120"/>
-                <a:gd name="connsiteX13" fmla="*/ 2706 w 799024"/>
-                <a:gd name="connsiteY13" fmla="*/ 399240 h 2093120"/>
-                <a:gd name="connsiteX14" fmla="*/ 4078 w 799024"/>
-                <a:gd name="connsiteY14" fmla="*/ 395269 h 2093120"/>
-                <a:gd name="connsiteX15" fmla="*/ 0 w 799024"/>
-                <a:gd name="connsiteY15" fmla="*/ 358927 h 2093120"/>
-                <a:gd name="connsiteX16" fmla="*/ 399512 w 799024"/>
-                <a:gd name="connsiteY16" fmla="*/ 0 h 2093120"/>
-              </a:gdLst>
-              <a:ahLst/>
-              <a:cxnLst>
-                <a:cxn ang="0">
-                  <a:pos x="connsiteX0" y="connsiteY0"/>
-                </a:cxn>
-                <a:cxn ang="0">
-                  <a:pos x="connsiteX1" y="connsiteY1"/>
-                </a:cxn>
-                <a:cxn ang="0">
-                  <a:pos x="connsiteX2" y="connsiteY2"/>
-                </a:cxn>
-                <a:cxn ang="0">
-                  <a:pos x="connsiteX3" y="connsiteY3"/>
-                </a:cxn>
-                <a:cxn ang="0">
-                  <a:pos x="connsiteX4" y="connsiteY4"/>
-                </a:cxn>
-                <a:cxn ang="0">
-                  <a:pos x="connsiteX5" y="connsiteY5"/>
-                </a:cxn>
-                <a:cxn ang="0">
-                  <a:pos x="connsiteX6" y="connsiteY6"/>
-                </a:cxn>
-                <a:cxn ang="0">
-                  <a:pos x="connsiteX7" y="connsiteY7"/>
-                </a:cxn>
-                <a:cxn ang="0">
-                  <a:pos x="connsiteX8" y="connsiteY8"/>
-                </a:cxn>
-                <a:cxn ang="0">
-                  <a:pos x="connsiteX9" y="connsiteY9"/>
-                </a:cxn>
-                <a:cxn ang="0">
-                  <a:pos x="connsiteX10" y="connsiteY10"/>
-                </a:cxn>
-                <a:cxn ang="0">
-                  <a:pos x="connsiteX11" y="connsiteY11"/>
-                </a:cxn>
-                <a:cxn ang="0">
-                  <a:pos x="connsiteX12" y="connsiteY12"/>
-                </a:cxn>
-                <a:cxn ang="0">
-                  <a:pos x="connsiteX13" y="connsiteY13"/>
-                </a:cxn>
-                <a:cxn ang="0">
-                  <a:pos x="connsiteX14" y="connsiteY14"/>
-                </a:cxn>
-                <a:cxn ang="0">
-                  <a:pos x="connsiteX15" y="connsiteY15"/>
-                </a:cxn>
-                <a:cxn ang="0">
-                  <a:pos x="connsiteX16" y="connsiteY16"/>
-                </a:cxn>
-              </a:cxnLst>
-              <a:rect l="l" t="t" r="r" b="b"/>
-              <a:pathLst>
-                <a:path w="799024" h="2093120">
-                  <a:moveTo>
-                    <a:pt x="399512" y="0"/>
-                  </a:moveTo>
-                  <a:cubicBezTo>
-                    <a:pt x="620156" y="0"/>
-                    <a:pt x="799024" y="160697"/>
-                    <a:pt x="799024" y="358927"/>
-                  </a:cubicBezTo>
-                  <a:lnTo>
-                    <a:pt x="794947" y="395269"/>
-                  </a:lnTo>
-                  <a:lnTo>
-                    <a:pt x="796319" y="399240"/>
-                  </a:lnTo>
-                  <a:cubicBezTo>
-                    <a:pt x="798092" y="407029"/>
-                    <a:pt x="799024" y="415093"/>
-                    <a:pt x="799024" y="423353"/>
-                  </a:cubicBezTo>
-                  <a:lnTo>
-                    <a:pt x="799024" y="1605968"/>
-                  </a:lnTo>
-                  <a:lnTo>
-                    <a:pt x="791359" y="1640078"/>
-                  </a:lnTo>
-                  <a:lnTo>
-                    <a:pt x="799024" y="1712516"/>
-                  </a:lnTo>
-                  <a:cubicBezTo>
-                    <a:pt x="799024" y="1922718"/>
-                    <a:pt x="620156" y="2093120"/>
-                    <a:pt x="399512" y="2093120"/>
-                  </a:cubicBezTo>
-                  <a:cubicBezTo>
-                    <a:pt x="178868" y="2093120"/>
-                    <a:pt x="0" y="1922718"/>
-                    <a:pt x="0" y="1712516"/>
-                  </a:cubicBezTo>
-                  <a:lnTo>
-                    <a:pt x="7665" y="1640078"/>
-                  </a:lnTo>
-                  <a:lnTo>
-                    <a:pt x="0" y="1605968"/>
-                  </a:lnTo>
-                  <a:lnTo>
-                    <a:pt x="0" y="423353"/>
-                  </a:lnTo>
-                  <a:cubicBezTo>
-                    <a:pt x="0" y="415093"/>
-                    <a:pt x="932" y="407029"/>
-                    <a:pt x="2706" y="399240"/>
-                  </a:cubicBezTo>
-                  <a:lnTo>
-                    <a:pt x="4078" y="395269"/>
-                  </a:lnTo>
-                  <a:lnTo>
-                    <a:pt x="0" y="358927"/>
-                  </a:lnTo>
-                  <a:cubicBezTo>
-                    <a:pt x="0" y="160697"/>
-                    <a:pt x="178868" y="0"/>
-                    <a:pt x="399512" y="0"/>
-                  </a:cubicBezTo>
-                  <a:close/>
-                </a:path>
-              </a:pathLst>
-            </a:custGeom>
-            <a:ln>
-              <a:noFill/>
-            </a:ln>
-            <a:effectLst>
-              <a:outerShdw blurRad="190500" dist="228600" dir="2700000" algn="ctr">
-                <a:srgbClr val="000000">
-                  <a:alpha val="30000"/>
-                </a:srgbClr>
-              </a:outerShdw>
-            </a:effectLst>
-            <a:scene3d>
-              <a:camera prst="orthographicFront">
-                <a:rot lat="0" lon="0" rev="0"/>
-              </a:camera>
-              <a:lightRig rig="glow" dir="t">
-                <a:rot lat="0" lon="0" rev="4800000"/>
-              </a:lightRig>
-            </a:scene3d>
-            <a:sp3d prstMaterial="matte">
-              <a:bevelT w="127000" h="63500"/>
-            </a:sp3d>
-          </p:spPr>
-          <p:style>
-            <a:lnRef idx="2">
-              <a:schemeClr val="accent1">
-                <a:shade val="50000"/>
-              </a:schemeClr>
-            </a:lnRef>
-            <a:fillRef idx="1">
-              <a:schemeClr val="accent1"/>
-            </a:fillRef>
-            <a:effectRef idx="0">
-              <a:schemeClr val="accent1"/>
-            </a:effectRef>
-            <a:fontRef idx="minor">
-              <a:schemeClr val="lt1"/>
-            </a:fontRef>
-          </p:style>
-          <p:txBody>
-            <a:bodyPr rtlCol="0" anchor="ctr"/>
-            <a:lstStyle/>
-            <a:p>
-              <a:pPr algn="ctr"/>
-              <a:endParaRPr lang="en-IN" dirty="0"/>
-            </a:p>
-          </p:txBody>
-        </p:sp>
-        <p:sp>
-          <p:nvSpPr>
-            <p:cNvPr id="33" name="Oval 32"/>
-            <p:cNvSpPr/>
-            <p:nvPr/>
-          </p:nvSpPr>
-          <p:spPr>
-            <a:xfrm>
-              <a:off x="9411776" y="3725695"/>
-              <a:ext cx="799024" cy="401805"/>
-            </a:xfrm>
-            <a:prstGeom prst="ellipse">
-              <a:avLst/>
-            </a:prstGeom>
-            <a:ln>
-              <a:noFill/>
-            </a:ln>
-            <a:effectLst>
-              <a:outerShdw blurRad="190500" dist="228600" dir="2700000" algn="ctr">
-                <a:srgbClr val="000000">
-                  <a:alpha val="30000"/>
-                </a:srgbClr>
-              </a:outerShdw>
-            </a:effectLst>
-            <a:scene3d>
-              <a:camera prst="orthographicFront">
-                <a:rot lat="0" lon="0" rev="0"/>
-              </a:camera>
-              <a:lightRig rig="glow" dir="t">
-                <a:rot lat="0" lon="0" rev="4800000"/>
-              </a:lightRig>
-            </a:scene3d>
-            <a:sp3d prstMaterial="matte">
-              <a:bevelT w="127000" h="63500"/>
-            </a:sp3d>
-          </p:spPr>
-          <p:style>
-            <a:lnRef idx="2">
-              <a:schemeClr val="accent1">
-                <a:shade val="50000"/>
-              </a:schemeClr>
-            </a:lnRef>
-            <a:fillRef idx="1">
-              <a:schemeClr val="accent1"/>
-            </a:fillRef>
-            <a:effectRef idx="0">
-              <a:schemeClr val="accent1"/>
-            </a:effectRef>
-            <a:fontRef idx="minor">
-              <a:schemeClr val="lt1"/>
-            </a:fontRef>
-          </p:style>
-          <p:txBody>
-            <a:bodyPr rtlCol="0" anchor="ctr"/>
-            <a:lstStyle/>
-            <a:p>
-              <a:pPr algn="ctr"/>
-              <a:endParaRPr lang="en-IN"/>
-            </a:p>
-          </p:txBody>
-        </p:sp>
+            <a:grpFill/>
+          </p:grpSpPr>
+          <p:sp>
+            <p:nvSpPr>
+              <p:cNvPr id="43" name="Freeform 42"/>
+              <p:cNvSpPr/>
+              <p:nvPr/>
+            </p:nvSpPr>
+            <p:spPr>
+              <a:xfrm>
+                <a:off x="3879665" y="1171649"/>
+                <a:ext cx="1059912" cy="977486"/>
+              </a:xfrm>
+              <a:custGeom>
+                <a:avLst/>
+                <a:gdLst>
+                  <a:gd name="connsiteX0" fmla="*/ 529956 w 1059912"/>
+                  <a:gd name="connsiteY0" fmla="*/ 0 h 977486"/>
+                  <a:gd name="connsiteX1" fmla="*/ 1059912 w 1059912"/>
+                  <a:gd name="connsiteY1" fmla="*/ 488743 h 977486"/>
+                  <a:gd name="connsiteX2" fmla="*/ 529956 w 1059912"/>
+                  <a:gd name="connsiteY2" fmla="*/ 977486 h 977486"/>
+                  <a:gd name="connsiteX3" fmla="*/ 0 w 1059912"/>
+                  <a:gd name="connsiteY3" fmla="*/ 488743 h 977486"/>
+                  <a:gd name="connsiteX4" fmla="*/ 529956 w 1059912"/>
+                  <a:gd name="connsiteY4" fmla="*/ 0 h 977486"/>
+                </a:gdLst>
+                <a:ahLst/>
+                <a:cxnLst>
+                  <a:cxn ang="0">
+                    <a:pos x="connsiteX0" y="connsiteY0"/>
+                  </a:cxn>
+                  <a:cxn ang="0">
+                    <a:pos x="connsiteX1" y="connsiteY1"/>
+                  </a:cxn>
+                  <a:cxn ang="0">
+                    <a:pos x="connsiteX2" y="connsiteY2"/>
+                  </a:cxn>
+                  <a:cxn ang="0">
+                    <a:pos x="connsiteX3" y="connsiteY3"/>
+                  </a:cxn>
+                  <a:cxn ang="0">
+                    <a:pos x="connsiteX4" y="connsiteY4"/>
+                  </a:cxn>
+                </a:cxnLst>
+                <a:rect l="l" t="t" r="r" b="b"/>
+                <a:pathLst>
+                  <a:path w="1059912" h="977486">
+                    <a:moveTo>
+                      <a:pt x="529956" y="0"/>
+                    </a:moveTo>
+                    <a:cubicBezTo>
+                      <a:pt x="822643" y="0"/>
+                      <a:pt x="1059912" y="218818"/>
+                      <a:pt x="1059912" y="488743"/>
+                    </a:cubicBezTo>
+                    <a:cubicBezTo>
+                      <a:pt x="1059912" y="758668"/>
+                      <a:pt x="822643" y="977486"/>
+                      <a:pt x="529956" y="977486"/>
+                    </a:cubicBezTo>
+                    <a:cubicBezTo>
+                      <a:pt x="237269" y="977486"/>
+                      <a:pt x="0" y="758668"/>
+                      <a:pt x="0" y="488743"/>
+                    </a:cubicBezTo>
+                    <a:cubicBezTo>
+                      <a:pt x="0" y="218818"/>
+                      <a:pt x="237269" y="0"/>
+                      <a:pt x="529956" y="0"/>
+                    </a:cubicBezTo>
+                    <a:close/>
+                  </a:path>
+                </a:pathLst>
+              </a:custGeom>
+              <a:grpFill/>
+              <a:ln>
+                <a:noFill/>
+              </a:ln>
+              <a:effectLst>
+                <a:outerShdw blurRad="190500" dist="228600" dir="2700000" algn="ctr">
+                  <a:srgbClr val="000000">
+                    <a:alpha val="30000"/>
+                  </a:srgbClr>
+                </a:outerShdw>
+              </a:effectLst>
+              <a:scene3d>
+                <a:camera prst="orthographicFront">
+                  <a:rot lat="0" lon="0" rev="0"/>
+                </a:camera>
+                <a:lightRig rig="glow" dir="t">
+                  <a:rot lat="0" lon="0" rev="4800000"/>
+                </a:lightRig>
+              </a:scene3d>
+              <a:sp3d prstMaterial="matte">
+                <a:bevelT w="127000" h="63500"/>
+              </a:sp3d>
+            </p:spPr>
+            <p:style>
+              <a:lnRef idx="2">
+                <a:schemeClr val="accent1">
+                  <a:shade val="50000"/>
+                </a:schemeClr>
+              </a:lnRef>
+              <a:fillRef idx="1">
+                <a:schemeClr val="accent1"/>
+              </a:fillRef>
+              <a:effectRef idx="0">
+                <a:schemeClr val="accent1"/>
+              </a:effectRef>
+              <a:fontRef idx="minor">
+                <a:schemeClr val="lt1"/>
+              </a:fontRef>
+            </p:style>
+            <p:txBody>
+              <a:bodyPr rtlCol="0" anchor="ctr"/>
+              <a:lstStyle/>
+              <a:p>
+                <a:pPr algn="ctr"/>
+                <a:endParaRPr lang="en-IN"/>
+              </a:p>
+            </p:txBody>
+          </p:sp>
+          <p:sp>
+            <p:nvSpPr>
+              <p:cNvPr id="42" name="Freeform 41"/>
+              <p:cNvSpPr/>
+              <p:nvPr/>
+            </p:nvSpPr>
+            <p:spPr>
+              <a:xfrm>
+                <a:off x="3704771" y="969281"/>
+                <a:ext cx="1409700" cy="1393372"/>
+              </a:xfrm>
+              <a:custGeom>
+                <a:avLst/>
+                <a:gdLst>
+                  <a:gd name="connsiteX0" fmla="*/ 704850 w 1409700"/>
+                  <a:gd name="connsiteY0" fmla="*/ 0 h 1393372"/>
+                  <a:gd name="connsiteX1" fmla="*/ 1409700 w 1409700"/>
+                  <a:gd name="connsiteY1" fmla="*/ 696686 h 1393372"/>
+                  <a:gd name="connsiteX2" fmla="*/ 704850 w 1409700"/>
+                  <a:gd name="connsiteY2" fmla="*/ 1393372 h 1393372"/>
+                  <a:gd name="connsiteX3" fmla="*/ 0 w 1409700"/>
+                  <a:gd name="connsiteY3" fmla="*/ 696686 h 1393372"/>
+                  <a:gd name="connsiteX4" fmla="*/ 704850 w 1409700"/>
+                  <a:gd name="connsiteY4" fmla="*/ 0 h 1393372"/>
+                  <a:gd name="connsiteX5" fmla="*/ 704850 w 1409700"/>
+                  <a:gd name="connsiteY5" fmla="*/ 202368 h 1393372"/>
+                  <a:gd name="connsiteX6" fmla="*/ 174894 w 1409700"/>
+                  <a:gd name="connsiteY6" fmla="*/ 691111 h 1393372"/>
+                  <a:gd name="connsiteX7" fmla="*/ 704850 w 1409700"/>
+                  <a:gd name="connsiteY7" fmla="*/ 1179854 h 1393372"/>
+                  <a:gd name="connsiteX8" fmla="*/ 1234806 w 1409700"/>
+                  <a:gd name="connsiteY8" fmla="*/ 691111 h 1393372"/>
+                  <a:gd name="connsiteX9" fmla="*/ 704850 w 1409700"/>
+                  <a:gd name="connsiteY9" fmla="*/ 202368 h 1393372"/>
+                </a:gdLst>
+                <a:ahLst/>
+                <a:cxnLst>
+                  <a:cxn ang="0">
+                    <a:pos x="connsiteX0" y="connsiteY0"/>
+                  </a:cxn>
+                  <a:cxn ang="0">
+                    <a:pos x="connsiteX1" y="connsiteY1"/>
+                  </a:cxn>
+                  <a:cxn ang="0">
+                    <a:pos x="connsiteX2" y="connsiteY2"/>
+                  </a:cxn>
+                  <a:cxn ang="0">
+                    <a:pos x="connsiteX3" y="connsiteY3"/>
+                  </a:cxn>
+                  <a:cxn ang="0">
+                    <a:pos x="connsiteX4" y="connsiteY4"/>
+                  </a:cxn>
+                  <a:cxn ang="0">
+                    <a:pos x="connsiteX5" y="connsiteY5"/>
+                  </a:cxn>
+                  <a:cxn ang="0">
+                    <a:pos x="connsiteX6" y="connsiteY6"/>
+                  </a:cxn>
+                  <a:cxn ang="0">
+                    <a:pos x="connsiteX7" y="connsiteY7"/>
+                  </a:cxn>
+                  <a:cxn ang="0">
+                    <a:pos x="connsiteX8" y="connsiteY8"/>
+                  </a:cxn>
+                  <a:cxn ang="0">
+                    <a:pos x="connsiteX9" y="connsiteY9"/>
+                  </a:cxn>
+                </a:cxnLst>
+                <a:rect l="l" t="t" r="r" b="b"/>
+                <a:pathLst>
+                  <a:path w="1409700" h="1393372">
+                    <a:moveTo>
+                      <a:pt x="704850" y="0"/>
+                    </a:moveTo>
+                    <a:cubicBezTo>
+                      <a:pt x="1094128" y="0"/>
+                      <a:pt x="1409700" y="311917"/>
+                      <a:pt x="1409700" y="696686"/>
+                    </a:cubicBezTo>
+                    <a:cubicBezTo>
+                      <a:pt x="1409700" y="1081455"/>
+                      <a:pt x="1094128" y="1393372"/>
+                      <a:pt x="704850" y="1393372"/>
+                    </a:cubicBezTo>
+                    <a:cubicBezTo>
+                      <a:pt x="315572" y="1393372"/>
+                      <a:pt x="0" y="1081455"/>
+                      <a:pt x="0" y="696686"/>
+                    </a:cubicBezTo>
+                    <a:cubicBezTo>
+                      <a:pt x="0" y="311917"/>
+                      <a:pt x="315572" y="0"/>
+                      <a:pt x="704850" y="0"/>
+                    </a:cubicBezTo>
+                    <a:close/>
+                    <a:moveTo>
+                      <a:pt x="704850" y="202368"/>
+                    </a:moveTo>
+                    <a:cubicBezTo>
+                      <a:pt x="412163" y="202368"/>
+                      <a:pt x="174894" y="421186"/>
+                      <a:pt x="174894" y="691111"/>
+                    </a:cubicBezTo>
+                    <a:cubicBezTo>
+                      <a:pt x="174894" y="961036"/>
+                      <a:pt x="412163" y="1179854"/>
+                      <a:pt x="704850" y="1179854"/>
+                    </a:cubicBezTo>
+                    <a:cubicBezTo>
+                      <a:pt x="997537" y="1179854"/>
+                      <a:pt x="1234806" y="961036"/>
+                      <a:pt x="1234806" y="691111"/>
+                    </a:cubicBezTo>
+                    <a:cubicBezTo>
+                      <a:pt x="1234806" y="421186"/>
+                      <a:pt x="997537" y="202368"/>
+                      <a:pt x="704850" y="202368"/>
+                    </a:cubicBezTo>
+                    <a:close/>
+                  </a:path>
+                </a:pathLst>
+              </a:custGeom>
+              <a:grpFill/>
+              <a:ln>
+                <a:noFill/>
+              </a:ln>
+              <a:effectLst>
+                <a:outerShdw blurRad="190500" dist="228600" dir="2700000" algn="ctr">
+                  <a:srgbClr val="000000">
+                    <a:alpha val="30000"/>
+                  </a:srgbClr>
+                </a:outerShdw>
+              </a:effectLst>
+              <a:scene3d>
+                <a:camera prst="orthographicFront">
+                  <a:rot lat="0" lon="0" rev="0"/>
+                </a:camera>
+                <a:lightRig rig="glow" dir="t">
+                  <a:rot lat="0" lon="0" rev="4800000"/>
+                </a:lightRig>
+              </a:scene3d>
+              <a:sp3d prstMaterial="matte">
+                <a:bevelT w="127000" h="63500"/>
+              </a:sp3d>
+            </p:spPr>
+            <p:style>
+              <a:lnRef idx="2">
+                <a:schemeClr val="accent1">
+                  <a:shade val="50000"/>
+                </a:schemeClr>
+              </a:lnRef>
+              <a:fillRef idx="1">
+                <a:schemeClr val="accent1"/>
+              </a:fillRef>
+              <a:effectRef idx="0">
+                <a:schemeClr val="accent1"/>
+              </a:effectRef>
+              <a:fontRef idx="minor">
+                <a:schemeClr val="lt1"/>
+              </a:fontRef>
+            </p:style>
+            <p:txBody>
+              <a:bodyPr rtlCol="0" anchor="ctr"/>
+              <a:lstStyle/>
+              <a:p>
+                <a:pPr algn="ctr"/>
+                <a:endParaRPr lang="en-IN"/>
+              </a:p>
+            </p:txBody>
+          </p:sp>
+          <p:sp>
+            <p:nvSpPr>
+              <p:cNvPr id="37" name="Freeform 36"/>
+              <p:cNvSpPr/>
+              <p:nvPr/>
+            </p:nvSpPr>
+            <p:spPr>
+              <a:xfrm rot="7740000">
+                <a:off x="4775837" y="1619269"/>
+                <a:ext cx="269791" cy="942811"/>
+              </a:xfrm>
+              <a:custGeom>
+                <a:avLst/>
+                <a:gdLst>
+                  <a:gd name="connsiteX0" fmla="*/ 399512 w 799024"/>
+                  <a:gd name="connsiteY0" fmla="*/ 0 h 2093120"/>
+                  <a:gd name="connsiteX1" fmla="*/ 799024 w 799024"/>
+                  <a:gd name="connsiteY1" fmla="*/ 358927 h 2093120"/>
+                  <a:gd name="connsiteX2" fmla="*/ 794947 w 799024"/>
+                  <a:gd name="connsiteY2" fmla="*/ 395269 h 2093120"/>
+                  <a:gd name="connsiteX3" fmla="*/ 796319 w 799024"/>
+                  <a:gd name="connsiteY3" fmla="*/ 399240 h 2093120"/>
+                  <a:gd name="connsiteX4" fmla="*/ 799024 w 799024"/>
+                  <a:gd name="connsiteY4" fmla="*/ 423353 h 2093120"/>
+                  <a:gd name="connsiteX5" fmla="*/ 799024 w 799024"/>
+                  <a:gd name="connsiteY5" fmla="*/ 1605968 h 2093120"/>
+                  <a:gd name="connsiteX6" fmla="*/ 791359 w 799024"/>
+                  <a:gd name="connsiteY6" fmla="*/ 1640078 h 2093120"/>
+                  <a:gd name="connsiteX7" fmla="*/ 799024 w 799024"/>
+                  <a:gd name="connsiteY7" fmla="*/ 1712516 h 2093120"/>
+                  <a:gd name="connsiteX8" fmla="*/ 399512 w 799024"/>
+                  <a:gd name="connsiteY8" fmla="*/ 2093120 h 2093120"/>
+                  <a:gd name="connsiteX9" fmla="*/ 0 w 799024"/>
+                  <a:gd name="connsiteY9" fmla="*/ 1712516 h 2093120"/>
+                  <a:gd name="connsiteX10" fmla="*/ 7665 w 799024"/>
+                  <a:gd name="connsiteY10" fmla="*/ 1640078 h 2093120"/>
+                  <a:gd name="connsiteX11" fmla="*/ 0 w 799024"/>
+                  <a:gd name="connsiteY11" fmla="*/ 1605968 h 2093120"/>
+                  <a:gd name="connsiteX12" fmla="*/ 0 w 799024"/>
+                  <a:gd name="connsiteY12" fmla="*/ 423353 h 2093120"/>
+                  <a:gd name="connsiteX13" fmla="*/ 2706 w 799024"/>
+                  <a:gd name="connsiteY13" fmla="*/ 399240 h 2093120"/>
+                  <a:gd name="connsiteX14" fmla="*/ 4078 w 799024"/>
+                  <a:gd name="connsiteY14" fmla="*/ 395269 h 2093120"/>
+                  <a:gd name="connsiteX15" fmla="*/ 0 w 799024"/>
+                  <a:gd name="connsiteY15" fmla="*/ 358927 h 2093120"/>
+                  <a:gd name="connsiteX16" fmla="*/ 399512 w 799024"/>
+                  <a:gd name="connsiteY16" fmla="*/ 0 h 2093120"/>
+                </a:gdLst>
+                <a:ahLst/>
+                <a:cxnLst>
+                  <a:cxn ang="0">
+                    <a:pos x="connsiteX0" y="connsiteY0"/>
+                  </a:cxn>
+                  <a:cxn ang="0">
+                    <a:pos x="connsiteX1" y="connsiteY1"/>
+                  </a:cxn>
+                  <a:cxn ang="0">
+                    <a:pos x="connsiteX2" y="connsiteY2"/>
+                  </a:cxn>
+                  <a:cxn ang="0">
+                    <a:pos x="connsiteX3" y="connsiteY3"/>
+                  </a:cxn>
+                  <a:cxn ang="0">
+                    <a:pos x="connsiteX4" y="connsiteY4"/>
+                  </a:cxn>
+                  <a:cxn ang="0">
+                    <a:pos x="connsiteX5" y="connsiteY5"/>
+                  </a:cxn>
+                  <a:cxn ang="0">
+                    <a:pos x="connsiteX6" y="connsiteY6"/>
+                  </a:cxn>
+                  <a:cxn ang="0">
+                    <a:pos x="connsiteX7" y="connsiteY7"/>
+                  </a:cxn>
+                  <a:cxn ang="0">
+                    <a:pos x="connsiteX8" y="connsiteY8"/>
+                  </a:cxn>
+                  <a:cxn ang="0">
+                    <a:pos x="connsiteX9" y="connsiteY9"/>
+                  </a:cxn>
+                  <a:cxn ang="0">
+                    <a:pos x="connsiteX10" y="connsiteY10"/>
+                  </a:cxn>
+                  <a:cxn ang="0">
+                    <a:pos x="connsiteX11" y="connsiteY11"/>
+                  </a:cxn>
+                  <a:cxn ang="0">
+                    <a:pos x="connsiteX12" y="connsiteY12"/>
+                  </a:cxn>
+                  <a:cxn ang="0">
+                    <a:pos x="connsiteX13" y="connsiteY13"/>
+                  </a:cxn>
+                  <a:cxn ang="0">
+                    <a:pos x="connsiteX14" y="connsiteY14"/>
+                  </a:cxn>
+                  <a:cxn ang="0">
+                    <a:pos x="connsiteX15" y="connsiteY15"/>
+                  </a:cxn>
+                  <a:cxn ang="0">
+                    <a:pos x="connsiteX16" y="connsiteY16"/>
+                  </a:cxn>
+                </a:cxnLst>
+                <a:rect l="l" t="t" r="r" b="b"/>
+                <a:pathLst>
+                  <a:path w="799024" h="2093120">
+                    <a:moveTo>
+                      <a:pt x="399512" y="0"/>
+                    </a:moveTo>
+                    <a:cubicBezTo>
+                      <a:pt x="620156" y="0"/>
+                      <a:pt x="799024" y="160697"/>
+                      <a:pt x="799024" y="358927"/>
+                    </a:cubicBezTo>
+                    <a:lnTo>
+                      <a:pt x="794947" y="395269"/>
+                    </a:lnTo>
+                    <a:lnTo>
+                      <a:pt x="796319" y="399240"/>
+                    </a:lnTo>
+                    <a:cubicBezTo>
+                      <a:pt x="798092" y="407029"/>
+                      <a:pt x="799024" y="415093"/>
+                      <a:pt x="799024" y="423353"/>
+                    </a:cubicBezTo>
+                    <a:lnTo>
+                      <a:pt x="799024" y="1605968"/>
+                    </a:lnTo>
+                    <a:lnTo>
+                      <a:pt x="791359" y="1640078"/>
+                    </a:lnTo>
+                    <a:lnTo>
+                      <a:pt x="799024" y="1712516"/>
+                    </a:lnTo>
+                    <a:cubicBezTo>
+                      <a:pt x="799024" y="1922718"/>
+                      <a:pt x="620156" y="2093120"/>
+                      <a:pt x="399512" y="2093120"/>
+                    </a:cubicBezTo>
+                    <a:cubicBezTo>
+                      <a:pt x="178868" y="2093120"/>
+                      <a:pt x="0" y="1922718"/>
+                      <a:pt x="0" y="1712516"/>
+                    </a:cubicBezTo>
+                    <a:lnTo>
+                      <a:pt x="7665" y="1640078"/>
+                    </a:lnTo>
+                    <a:lnTo>
+                      <a:pt x="0" y="1605968"/>
+                    </a:lnTo>
+                    <a:lnTo>
+                      <a:pt x="0" y="423353"/>
+                    </a:lnTo>
+                    <a:cubicBezTo>
+                      <a:pt x="0" y="415093"/>
+                      <a:pt x="932" y="407029"/>
+                      <a:pt x="2706" y="399240"/>
+                    </a:cubicBezTo>
+                    <a:lnTo>
+                      <a:pt x="4078" y="395269"/>
+                    </a:lnTo>
+                    <a:lnTo>
+                      <a:pt x="0" y="358927"/>
+                    </a:lnTo>
+                    <a:cubicBezTo>
+                      <a:pt x="0" y="160697"/>
+                      <a:pt x="178868" y="0"/>
+                      <a:pt x="399512" y="0"/>
+                    </a:cubicBezTo>
+                    <a:close/>
+                  </a:path>
+                </a:pathLst>
+              </a:custGeom>
+              <a:grpFill/>
+              <a:ln>
+                <a:noFill/>
+              </a:ln>
+              <a:effectLst>
+                <a:outerShdw blurRad="190500" dist="228600" dir="2700000" algn="ctr">
+                  <a:srgbClr val="000000">
+                    <a:alpha val="30000"/>
+                  </a:srgbClr>
+                </a:outerShdw>
+              </a:effectLst>
+              <a:scene3d>
+                <a:camera prst="orthographicFront">
+                  <a:rot lat="0" lon="0" rev="0"/>
+                </a:camera>
+                <a:lightRig rig="glow" dir="t">
+                  <a:rot lat="0" lon="0" rev="4800000"/>
+                </a:lightRig>
+              </a:scene3d>
+              <a:sp3d prstMaterial="matte">
+                <a:bevelT w="133350" h="63500"/>
+              </a:sp3d>
+            </p:spPr>
+            <p:style>
+              <a:lnRef idx="2">
+                <a:schemeClr val="accent1">
+                  <a:shade val="50000"/>
+                </a:schemeClr>
+              </a:lnRef>
+              <a:fillRef idx="1">
+                <a:schemeClr val="accent1"/>
+              </a:fillRef>
+              <a:effectRef idx="0">
+                <a:schemeClr val="accent1"/>
+              </a:effectRef>
+              <a:fontRef idx="minor">
+                <a:schemeClr val="lt1"/>
+              </a:fontRef>
+            </p:style>
+            <p:txBody>
+              <a:bodyPr rtlCol="0" anchor="ctr"/>
+              <a:lstStyle/>
+              <a:p>
+                <a:pPr algn="ctr"/>
+                <a:endParaRPr lang="en-IN" dirty="0"/>
+              </a:p>
+            </p:txBody>
+          </p:sp>
+        </p:grpSp>
       </p:grpSp>
     </p:spTree>
     <p:extLst>
